--- a/sales/Dispango-demo-deck.pptx
+++ b/sales/Dispango-demo-deck.pptx
@@ -15,9 +15,11 @@
     <p:sldId id="263" r:id="rId9"/>
     <p:sldId id="264" r:id="rId10"/>
     <p:sldId id="265" r:id="rId11"/>
+    <p:sldId id="266" r:id="rId12"/>
+    <p:sldId id="267" r:id="rId13"/>
   </p:sldIdLst>
   <p:notesMasterIdLst>
-    <p:notesMasterId r:id="rId12"/>
+    <p:notesMasterId r:id="rId14"/>
   </p:notesMasterIdLst>
   <p:sldSz cx="12191695" cy="6858000"/>
   <p:notesSz cx="6858000" cy="12191695"/>
@@ -599,7 +601,7 @@
           <a:p>
             <a:r>
               <a:rPr lang="en-US" dirty="0"/>
-              <a:t>Close with a clear next step: 'I'll set you up with a quick trial so you can hear it answer your own number.' Confirm the follow-up and put time on the calendar before you hang up. Replace contact details on this slide before presenting.</a:t>
+              <a:t>Replaces fabricated testimonials — never fake social proof. Risk-reversal + live proof are the strongest pre-launch trust levers. On a call, actually dial the demo line on speaker and let them hear it. Swap in a real customer quote/screenshot here once you have one.</a:t>
             </a:r>
             <a:endParaRPr lang="en-US" dirty="0"/>
           </a:p>
@@ -623,6 +625,182 @@
             <a:fld id="{F7021451-1387-4CA6-816F-3879F97B5CBC}" type="slidenum">
               <a:rPr lang="en-US"/>
               <a:t>10</a:t>
+            </a:fld>
+            <a:endParaRPr lang="en-US"/>
+          </a:p>
+        </p:txBody>
+      </p:sp>
+    </p:spTree>
+    <p:extLst>
+      <p:ext uri="{BB962C8B-B14F-4D97-AF65-F5344CB8AC3E}">
+        <p14:creationId xmlns:p14="http://schemas.microsoft.com/office/powerpoint/2010/main" val="1024086991"/>
+      </p:ext>
+    </p:extLst>
+  </p:cSld>
+  <p:clrMapOvr>
+    <a:masterClrMapping/>
+  </p:clrMapOvr>
+</p:notes>
+</file>
+
+<file path=ppt/notesSlides/notesSlide11.xml><?xml version="1.0" encoding="utf-8"?>
+<p:notes xmlns:a="http://schemas.openxmlformats.org/drawingml/2006/main" xmlns:r="http://schemas.openxmlformats.org/officeDocument/2006/relationships" xmlns:p="http://schemas.openxmlformats.org/presentationml/2006/main">
+  <p:cSld>
+    <p:spTree>
+      <p:nvGrpSpPr>
+        <p:cNvPr id="1" name=""/>
+        <p:cNvGrpSpPr/>
+        <p:nvPr/>
+      </p:nvGrpSpPr>
+      <p:grpSpPr>
+        <a:xfrm>
+          <a:off x="0" y="0"/>
+          <a:ext cx="0" cy="0"/>
+          <a:chOff x="0" y="0"/>
+          <a:chExt cx="0" cy="0"/>
+        </a:xfrm>
+      </p:grpSpPr>
+      <p:sp>
+        <p:nvSpPr>
+          <p:cNvPr id="2" name="Slide Image Placeholder 1"/>
+          <p:cNvSpPr>
+            <a:spLocks noGrp="1" noRot="1" noChangeAspect="1"/>
+          </p:cNvSpPr>
+          <p:nvPr>
+            <p:ph type="sldImg"/>
+          </p:nvPr>
+        </p:nvSpPr>
+        <p:spPr/>
+      </p:sp>
+      <p:sp>
+        <p:nvSpPr>
+          <p:cNvPr id="3" name="Notes Placeholder 2"/>
+          <p:cNvSpPr>
+            <a:spLocks noGrp="1"/>
+          </p:cNvSpPr>
+          <p:nvPr>
+            <p:ph type="body" idx="1"/>
+          </p:nvPr>
+        </p:nvSpPr>
+        <p:spPr/>
+        <p:txBody>
+          <a:bodyPr/>
+          <a:lstStyle/>
+          <a:p>
+            <a:r>
+              <a:rPr lang="en-US" dirty="0"/>
+              <a:t>Kill the #1 objection — 'this sounds complicated.' It isn't. 'We do the setup, you flip one forwarding setting, and you're getting leads the same day. Your number and your workflow don't change.'</a:t>
+            </a:r>
+            <a:endParaRPr lang="en-US" dirty="0"/>
+          </a:p>
+        </p:txBody>
+      </p:sp>
+      <p:sp>
+        <p:nvSpPr>
+          <p:cNvPr id="4" name="Slide Number Placeholder 3"/>
+          <p:cNvSpPr>
+            <a:spLocks noGrp="1"/>
+          </p:cNvSpPr>
+          <p:nvPr>
+            <p:ph type="sldNum" sz="quarter" idx="10"/>
+          </p:nvPr>
+        </p:nvSpPr>
+        <p:spPr/>
+        <p:txBody>
+          <a:bodyPr/>
+          <a:lstStyle/>
+          <a:p>
+            <a:fld id="{F7021451-1387-4CA6-816F-3879F97B5CBC}" type="slidenum">
+              <a:rPr lang="en-US"/>
+              <a:t>11</a:t>
+            </a:fld>
+            <a:endParaRPr lang="en-US"/>
+          </a:p>
+        </p:txBody>
+      </p:sp>
+    </p:spTree>
+    <p:extLst>
+      <p:ext uri="{BB962C8B-B14F-4D97-AF65-F5344CB8AC3E}">
+        <p14:creationId xmlns:p14="http://schemas.microsoft.com/office/powerpoint/2010/main" val="1024086991"/>
+      </p:ext>
+    </p:extLst>
+  </p:cSld>
+  <p:clrMapOvr>
+    <a:masterClrMapping/>
+  </p:clrMapOvr>
+</p:notes>
+</file>
+
+<file path=ppt/notesSlides/notesSlide12.xml><?xml version="1.0" encoding="utf-8"?>
+<p:notes xmlns:a="http://schemas.openxmlformats.org/drawingml/2006/main" xmlns:r="http://schemas.openxmlformats.org/officeDocument/2006/relationships" xmlns:p="http://schemas.openxmlformats.org/presentationml/2006/main">
+  <p:cSld>
+    <p:spTree>
+      <p:nvGrpSpPr>
+        <p:cNvPr id="1" name=""/>
+        <p:cNvGrpSpPr/>
+        <p:nvPr/>
+      </p:nvGrpSpPr>
+      <p:grpSpPr>
+        <a:xfrm>
+          <a:off x="0" y="0"/>
+          <a:ext cx="0" cy="0"/>
+          <a:chOff x="0" y="0"/>
+          <a:chExt cx="0" cy="0"/>
+        </a:xfrm>
+      </p:grpSpPr>
+      <p:sp>
+        <p:nvSpPr>
+          <p:cNvPr id="2" name="Slide Image Placeholder 1"/>
+          <p:cNvSpPr>
+            <a:spLocks noGrp="1" noRot="1" noChangeAspect="1"/>
+          </p:cNvSpPr>
+          <p:nvPr>
+            <p:ph type="sldImg"/>
+          </p:nvPr>
+        </p:nvSpPr>
+        <p:spPr/>
+      </p:sp>
+      <p:sp>
+        <p:nvSpPr>
+          <p:cNvPr id="3" name="Notes Placeholder 2"/>
+          <p:cNvSpPr>
+            <a:spLocks noGrp="1"/>
+          </p:cNvSpPr>
+          <p:nvPr>
+            <p:ph type="body" idx="1"/>
+          </p:nvPr>
+        </p:nvSpPr>
+        <p:spPr/>
+        <p:txBody>
+          <a:bodyPr/>
+          <a:lstStyle/>
+          <a:p>
+            <a:r>
+              <a:rPr lang="en-US" dirty="0"/>
+              <a:t>Close with a clear next step: 'I'll set you up with a quick trial so you can hear it answer your own number.' Confirm the follow-up and put time on the calendar before you hang up. Replace contact details on this slide before presenting.</a:t>
+            </a:r>
+            <a:endParaRPr lang="en-US" dirty="0"/>
+          </a:p>
+        </p:txBody>
+      </p:sp>
+      <p:sp>
+        <p:nvSpPr>
+          <p:cNvPr id="4" name="Slide Number Placeholder 3"/>
+          <p:cNvSpPr>
+            <a:spLocks noGrp="1"/>
+          </p:cNvSpPr>
+          <p:nvPr>
+            <p:ph type="sldNum" sz="quarter" idx="10"/>
+          </p:nvPr>
+        </p:nvSpPr>
+        <p:spPr/>
+        <p:txBody>
+          <a:bodyPr/>
+          <a:lstStyle/>
+          <a:p>
+            <a:fld id="{F7021451-1387-4CA6-816F-3879F97B5CBC}" type="slidenum">
+              <a:rPr lang="en-US"/>
+              <a:t>12</a:t>
             </a:fld>
             <a:endParaRPr lang="en-US"/>
           </a:p>
@@ -775,7 +953,7 @@
           <a:p>
             <a:r>
               <a:rPr lang="en-US" dirty="0"/>
-              <a:t>The one-liner. Say it slowly. 'It's not voicemail and it's not a call centre — it's an AI that actually has the conversation and hands you a ready-to-work lead.' Then transition: 'Here's how it works.'</a:t>
+              <a:t>The most important slide — the contrast. Point left, then right: 'Right now an after-hours call does this. With Dispango, the exact same call does this.' Same call, opposite outcome.</a:t>
             </a:r>
             <a:endParaRPr lang="en-US" dirty="0"/>
           </a:p>
@@ -863,7 +1041,7 @@
           <a:p>
             <a:r>
               <a:rPr lang="en-US" dirty="0"/>
-              <a:t>Walk left to right, one sentence each. Emphasise step 3 — 'in seconds' — and step 4, the memory: 'A repeat customer calls and it already knows them. That's the kind of service that keeps people off Google next time.'</a:t>
+              <a:t>The one-liner. Say it slowly. 'It's not voicemail and it's not a call centre — it's an AI that actually has the conversation and hands you a ready-to-work lead.' Then transition: 'Here's how it works.'</a:t>
             </a:r>
             <a:endParaRPr lang="en-US" dirty="0"/>
           </a:p>
@@ -951,7 +1129,7 @@
           <a:p>
             <a:r>
               <a:rPr lang="en-US" dirty="0"/>
-              <a:t>This is the 'aha' slide — let it land. 'That text arrived 8 seconds after the call ended, at 2am, while you were asleep. You wake up, see a real job with an address, and call Marcus back before your competitor's voicemail even gets checked.'</a:t>
+              <a:t>Walk left to right, one sentence each. Emphasise step 3 — 'in seconds' — and step 4, the memory: 'A repeat customer calls and it already knows them. That's the kind of service that keeps people off Google next time.'</a:t>
             </a:r>
             <a:endParaRPr lang="en-US" dirty="0"/>
           </a:p>
@@ -1039,7 +1217,7 @@
           <a:p>
             <a:r>
               <a:rPr lang="en-US" dirty="0"/>
-              <a:t>Don't read all six — hit the two that matched their pain from slide 2. If they said after-hours, lead with 'catch every lead.' If they worried about robots, lead with 'sounds human.' Make it about them.</a:t>
+              <a:t>This is the 'aha' slide — let it land. 'That text arrived 8 seconds after the call ended, at 2am, while you were asleep. You wake up, see a real job with an address, and call Marcus back before your competitor's voicemail even gets checked.'</a:t>
             </a:r>
             <a:endParaRPr lang="en-US" dirty="0"/>
           </a:p>
@@ -1127,7 +1305,7 @@
           <a:p>
             <a:r>
               <a:rPr lang="en-US" dirty="0"/>
-              <a:t>PLACEHOLDER PRICE — set $XXX before any real call. Anchor on value, not cost: 'One after-hours lockout is usually $150–$250. The plan pays for itself the first job you'd have otherwise missed.' Then go quiet and let them react.</a:t>
+              <a:t>Don't read all six — hit the two that matched their pain from slide 2. If they said after-hours, lead with 'catch every lead.' If they worried about robots, lead with 'sounds human.' Make it about them.</a:t>
             </a:r>
             <a:endParaRPr lang="en-US" dirty="0"/>
           </a:p>
@@ -1215,7 +1393,7 @@
           <a:p>
             <a:r>
               <a:rPr lang="en-US" dirty="0"/>
-              <a:t>If you have a real testimonial or even a screenshot of a happy text from a customer, use it here instead. Until then, you can skip this slide live or speak to early results. Never present fabricated quotes as real.</a:t>
+              <a:t>The ROI slide. 'You're not buying software — you're buying back jobs you're already losing. Catch two a month and it's paid for; everything after is money you weren't seeing.' Tie to the number they gave you on the problem slide.</a:t>
             </a:r>
             <a:endParaRPr lang="en-US" dirty="0"/>
           </a:p>
@@ -1303,7 +1481,7 @@
           <a:p>
             <a:r>
               <a:rPr lang="en-US" dirty="0"/>
-              <a:t>Kill the #1 objection — 'this sounds complicated.' It isn't. 'We do the setup, you flip one forwarding setting, and you're getting leads the same day. Your number and your workflow don't change.'</a:t>
+              <a:t>PLACEHOLDER PRICE — set $XXX before any real call. Anchor on value, not cost: 'One after-hours lockout is usually $150–$250. The plan pays for itself the first job you'd have otherwise missed.' Then go quiet and let them react.</a:t>
             </a:r>
             <a:endParaRPr lang="en-US" dirty="0"/>
           </a:p>
@@ -1831,6 +2009,1321 @@
     <p:bg>
       <p:bgPr>
         <a:solidFill>
+          <a:srgbClr val="F4F8FD"/>
+        </a:solidFill>
+      </p:bgPr>
+    </p:bg>
+    <p:spTree>
+      <p:nvGrpSpPr>
+        <p:cNvPr id="1" name=""/>
+        <p:cNvGrpSpPr/>
+        <p:nvPr/>
+      </p:nvGrpSpPr>
+      <p:grpSpPr>
+        <a:xfrm>
+          <a:off x="0" y="0"/>
+          <a:ext cx="0" cy="0"/>
+          <a:chOff x="0" y="0"/>
+          <a:chExt cx="0" cy="0"/>
+        </a:xfrm>
+      </p:grpSpPr>
+      <p:pic>
+        <p:nvPicPr>
+          <p:cNvPr id="2" name="Image 0" descr="preencoded.png">    </p:cNvPr>
+          <p:cNvPicPr>
+            <a:picLocks noChangeAspect="1"/>
+          </p:cNvPicPr>
+          <p:nvPr/>
+        </p:nvPicPr>
+        <p:blipFill>
+          <a:blip r:embed="rId1"/>
+          <a:stretch>
+            <a:fillRect/>
+          </a:stretch>
+        </p:blipFill>
+        <p:spPr>
+          <a:xfrm>
+            <a:off x="640080" y="384048"/>
+            <a:ext cx="365760" cy="365760"/>
+          </a:xfrm>
+          <a:prstGeom prst="rect">
+            <a:avLst/>
+          </a:prstGeom>
+        </p:spPr>
+      </p:pic>
+      <p:sp>
+        <p:nvSpPr>
+          <p:cNvPr id="3" name="Text 0"/>
+          <p:cNvSpPr/>
+          <p:nvPr/>
+        </p:nvSpPr>
+        <p:spPr>
+          <a:xfrm>
+            <a:off x="1097280" y="365760"/>
+            <a:ext cx="2743200" cy="402336"/>
+          </a:xfrm>
+          <a:prstGeom prst="rect">
+            <a:avLst/>
+          </a:prstGeom>
+          <a:noFill/>
+          <a:ln/>
+        </p:spPr>
+        <p:txBody>
+          <a:bodyPr wrap="square" lIns="0" tIns="0" rIns="0" bIns="0" rtlCol="0" anchor="ctr"/>
+          <a:lstStyle/>
+          <a:p>
+            <a:pPr indent="0" marL="0">
+              <a:buNone/>
+            </a:pPr>
+            <a:r>
+              <a:rPr lang="en-US" sz="1500" b="1" dirty="0">
+                <a:solidFill>
+                  <a:srgbClr val="0C1726"/>
+                </a:solidFill>
+                <a:latin typeface="Arial" pitchFamily="34" charset="0"/>
+                <a:ea typeface="Arial" pitchFamily="34" charset="-122"/>
+                <a:cs typeface="Arial" pitchFamily="34" charset="-120"/>
+              </a:rPr>
+              <a:t>Dispango</a:t>
+            </a:r>
+            <a:endParaRPr lang="en-US" sz="1500" dirty="0"/>
+          </a:p>
+        </p:txBody>
+      </p:sp>
+      <p:sp>
+        <p:nvSpPr>
+          <p:cNvPr id="4" name="Text 1"/>
+          <p:cNvSpPr/>
+          <p:nvPr/>
+        </p:nvSpPr>
+        <p:spPr>
+          <a:xfrm>
+            <a:off x="640080" y="1051560"/>
+            <a:ext cx="10911535" cy="914400"/>
+          </a:xfrm>
+          <a:prstGeom prst="rect">
+            <a:avLst/>
+          </a:prstGeom>
+          <a:noFill/>
+          <a:ln/>
+        </p:spPr>
+        <p:txBody>
+          <a:bodyPr wrap="square" lIns="0" tIns="0" rIns="0" bIns="0" rtlCol="0" anchor="ctr"/>
+          <a:lstStyle/>
+          <a:p>
+            <a:pPr indent="0" marL="0">
+              <a:buNone/>
+            </a:pPr>
+            <a:r>
+              <a:rPr lang="en-US" sz="3400" b="1" dirty="0">
+                <a:solidFill>
+                  <a:srgbClr val="0C1726"/>
+                </a:solidFill>
+                <a:latin typeface="Arial" pitchFamily="34" charset="0"/>
+                <a:ea typeface="Arial" pitchFamily="34" charset="-122"/>
+                <a:cs typeface="Arial" pitchFamily="34" charset="-120"/>
+              </a:rPr>
+              <a:t>Hear it yourself — then decide</a:t>
+            </a:r>
+            <a:endParaRPr lang="en-US" sz="3400" dirty="0"/>
+          </a:p>
+        </p:txBody>
+      </p:sp>
+      <p:sp>
+        <p:nvSpPr>
+          <p:cNvPr id="5" name="Text 2"/>
+          <p:cNvSpPr/>
+          <p:nvPr/>
+        </p:nvSpPr>
+        <p:spPr>
+          <a:xfrm>
+            <a:off x="640080" y="2148840"/>
+            <a:ext cx="5760720" cy="1280160"/>
+          </a:xfrm>
+          <a:prstGeom prst="rect">
+            <a:avLst/>
+          </a:prstGeom>
+          <a:noFill/>
+          <a:ln/>
+        </p:spPr>
+        <p:txBody>
+          <a:bodyPr wrap="square" lIns="0" tIns="0" rIns="0" bIns="0" rtlCol="0" anchor="ctr"/>
+          <a:lstStyle/>
+          <a:p>
+            <a:pPr indent="0" marL="0">
+              <a:lnSpc>
+                <a:spcPct val="130000"/>
+              </a:lnSpc>
+              <a:buNone/>
+            </a:pPr>
+            <a:r>
+              <a:rPr lang="en-US" sz="1600" dirty="0">
+                <a:solidFill>
+                  <a:srgbClr val="44505F"/>
+                </a:solidFill>
+                <a:latin typeface="Arial" pitchFamily="34" charset="0"/>
+                <a:ea typeface="Arial" pitchFamily="34" charset="-122"/>
+                <a:cs typeface="Arial" pitchFamily="34" charset="-120"/>
+              </a:rPr>
+              <a:t>Don't take our word for it. Call the demo line right now, act like a locked-out customer, and hear exactly what your callers would.</a:t>
+            </a:r>
+            <a:endParaRPr lang="en-US" sz="1600" dirty="0"/>
+          </a:p>
+        </p:txBody>
+      </p:sp>
+      <p:sp>
+        <p:nvSpPr>
+          <p:cNvPr id="6" name="Shape 3"/>
+          <p:cNvSpPr/>
+          <p:nvPr/>
+        </p:nvSpPr>
+        <p:spPr>
+          <a:xfrm>
+            <a:off x="640080" y="3657600"/>
+            <a:ext cx="5760720" cy="1234440"/>
+          </a:xfrm>
+          <a:prstGeom prst="roundRect">
+            <a:avLst>
+              <a:gd name="adj" fmla="val 8889"/>
+            </a:avLst>
+          </a:prstGeom>
+          <a:solidFill>
+            <a:srgbClr val="0C1726"/>
+          </a:solidFill>
+          <a:ln/>
+          <a:effectLst>
+            <a:outerShdw sx="100000" sy="100000" kx="0" ky="0" algn="bl" rotWithShape="0" blurRad="114300" dist="38100" dir="5400000">
+              <a:srgbClr val="0C1726">
+                <a:alpha val="10000"/>
+              </a:srgbClr>
+            </a:outerShdw>
+          </a:effectLst>
+        </p:spPr>
+      </p:sp>
+      <p:pic>
+        <p:nvPicPr>
+          <p:cNvPr id="7" name="Image 1" descr="preencoded.png">    </p:cNvPr>
+          <p:cNvPicPr>
+            <a:picLocks noChangeAspect="1"/>
+          </p:cNvPicPr>
+          <p:nvPr/>
+        </p:nvPicPr>
+        <p:blipFill>
+          <a:blip r:embed="rId2"/>
+          <a:stretch>
+            <a:fillRect/>
+          </a:stretch>
+        </p:blipFill>
+        <p:spPr>
+          <a:xfrm>
+            <a:off x="1024128" y="4069080"/>
+            <a:ext cx="411480" cy="411480"/>
+          </a:xfrm>
+          <a:prstGeom prst="rect">
+            <a:avLst/>
+          </a:prstGeom>
+        </p:spPr>
+      </p:pic>
+      <p:sp>
+        <p:nvSpPr>
+          <p:cNvPr id="8" name="Text 4"/>
+          <p:cNvSpPr/>
+          <p:nvPr/>
+        </p:nvSpPr>
+        <p:spPr>
+          <a:xfrm>
+            <a:off x="1691640" y="3767328"/>
+            <a:ext cx="4480560" cy="1005840"/>
+          </a:xfrm>
+          <a:prstGeom prst="rect">
+            <a:avLst/>
+          </a:prstGeom>
+          <a:noFill/>
+          <a:ln/>
+        </p:spPr>
+        <p:txBody>
+          <a:bodyPr wrap="square" lIns="0" tIns="0" rIns="0" bIns="0" rtlCol="0" anchor="ctr"/>
+          <a:lstStyle/>
+          <a:p>
+            <a:pPr indent="0" marL="0">
+              <a:buNone/>
+            </a:pPr>
+            <a:r>
+              <a:rPr lang="en-US" sz="1200" dirty="0">
+                <a:solidFill>
+                  <a:srgbClr val="CADCFC"/>
+                </a:solidFill>
+                <a:latin typeface="Arial" pitchFamily="34" charset="0"/>
+                <a:ea typeface="Arial" pitchFamily="34" charset="-122"/>
+                <a:cs typeface="Arial" pitchFamily="34" charset="-120"/>
+              </a:rPr>
+              <a:t>Call the live demo
+</a:t>
+            </a:r>
+            <a:pPr indent="0" marL="0">
+              <a:buNone/>
+            </a:pPr>
+            <a:r>
+              <a:rPr lang="en-US" sz="2300" b="1" dirty="0">
+                <a:solidFill>
+                  <a:srgbClr val="FFFFFF"/>
+                </a:solidFill>
+                <a:latin typeface="Arial" pitchFamily="34" charset="0"/>
+                <a:ea typeface="Arial" pitchFamily="34" charset="-122"/>
+                <a:cs typeface="Arial" pitchFamily="34" charset="-120"/>
+              </a:rPr>
+              <a:t>(000) 000-0000</a:t>
+            </a:r>
+            <a:endParaRPr lang="en-US" sz="1200" dirty="0"/>
+          </a:p>
+        </p:txBody>
+      </p:sp>
+      <p:sp>
+        <p:nvSpPr>
+          <p:cNvPr id="9" name="Shape 5"/>
+          <p:cNvSpPr/>
+          <p:nvPr/>
+        </p:nvSpPr>
+        <p:spPr>
+          <a:xfrm>
+            <a:off x="7315200" y="2194560"/>
+            <a:ext cx="3840480" cy="3886200"/>
+          </a:xfrm>
+          <a:prstGeom prst="roundRect">
+            <a:avLst>
+              <a:gd name="adj" fmla="val 3333"/>
+            </a:avLst>
+          </a:prstGeom>
+          <a:solidFill>
+            <a:srgbClr val="FFFFFF"/>
+          </a:solidFill>
+          <a:ln w="12700">
+            <a:solidFill>
+              <a:srgbClr val="E7EDF6"/>
+            </a:solidFill>
+            <a:prstDash val="solid"/>
+          </a:ln>
+          <a:effectLst>
+            <a:outerShdw sx="100000" sy="100000" kx="0" ky="0" algn="bl" rotWithShape="0" blurRad="114300" dist="38100" dir="5400000">
+              <a:srgbClr val="0C1726">
+                <a:alpha val="10000"/>
+              </a:srgbClr>
+            </a:outerShdw>
+          </a:effectLst>
+        </p:spPr>
+      </p:sp>
+      <p:sp>
+        <p:nvSpPr>
+          <p:cNvPr id="10" name="Text 6"/>
+          <p:cNvSpPr/>
+          <p:nvPr/>
+        </p:nvSpPr>
+        <p:spPr>
+          <a:xfrm>
+            <a:off x="7680960" y="2542032"/>
+            <a:ext cx="3108960" cy="457200"/>
+          </a:xfrm>
+          <a:prstGeom prst="rect">
+            <a:avLst/>
+          </a:prstGeom>
+          <a:noFill/>
+          <a:ln/>
+        </p:spPr>
+        <p:txBody>
+          <a:bodyPr wrap="square" lIns="0" tIns="0" rIns="0" bIns="0" rtlCol="0" anchor="ctr"/>
+          <a:lstStyle/>
+          <a:p>
+            <a:pPr indent="0" marL="0">
+              <a:buNone/>
+            </a:pPr>
+            <a:r>
+              <a:rPr lang="en-US" sz="1700" b="1" dirty="0">
+                <a:solidFill>
+                  <a:srgbClr val="0C1726"/>
+                </a:solidFill>
+                <a:latin typeface="Arial" pitchFamily="34" charset="0"/>
+                <a:ea typeface="Arial" pitchFamily="34" charset="-122"/>
+                <a:cs typeface="Arial" pitchFamily="34" charset="-120"/>
+              </a:rPr>
+              <a:t>No risk to try</a:t>
+            </a:r>
+            <a:endParaRPr lang="en-US" sz="1700" dirty="0"/>
+          </a:p>
+        </p:txBody>
+      </p:sp>
+      <p:pic>
+        <p:nvPicPr>
+          <p:cNvPr id="11" name="Image 2" descr="preencoded.png">    </p:cNvPr>
+          <p:cNvPicPr>
+            <a:picLocks noChangeAspect="1"/>
+          </p:cNvPicPr>
+          <p:nvPr/>
+        </p:nvPicPr>
+        <p:blipFill>
+          <a:blip r:embed="rId3"/>
+          <a:stretch>
+            <a:fillRect/>
+          </a:stretch>
+        </p:blipFill>
+        <p:spPr>
+          <a:xfrm>
+            <a:off x="7680960" y="3246120"/>
+            <a:ext cx="274320" cy="274320"/>
+          </a:xfrm>
+          <a:prstGeom prst="rect">
+            <a:avLst/>
+          </a:prstGeom>
+        </p:spPr>
+      </p:pic>
+      <p:sp>
+        <p:nvSpPr>
+          <p:cNvPr id="12" name="Text 7"/>
+          <p:cNvSpPr/>
+          <p:nvPr/>
+        </p:nvSpPr>
+        <p:spPr>
+          <a:xfrm>
+            <a:off x="8065008" y="3182112"/>
+            <a:ext cx="2999232" cy="566928"/>
+          </a:xfrm>
+          <a:prstGeom prst="rect">
+            <a:avLst/>
+          </a:prstGeom>
+          <a:noFill/>
+          <a:ln/>
+        </p:spPr>
+        <p:txBody>
+          <a:bodyPr wrap="square" lIns="0" tIns="0" rIns="0" bIns="0" rtlCol="0" anchor="ctr"/>
+          <a:lstStyle/>
+          <a:p>
+            <a:pPr indent="0" marL="0">
+              <a:buNone/>
+            </a:pPr>
+            <a:r>
+              <a:rPr lang="en-US" sz="1250" dirty="0">
+                <a:solidFill>
+                  <a:srgbClr val="0C1726"/>
+                </a:solidFill>
+                <a:latin typeface="Arial" pitchFamily="34" charset="0"/>
+                <a:ea typeface="Arial" pitchFamily="34" charset="-122"/>
+                <a:cs typeface="Arial" pitchFamily="34" charset="-120"/>
+              </a:rPr>
+              <a:t>Free trial — hear it on your own number</a:t>
+            </a:r>
+            <a:endParaRPr lang="en-US" sz="1250" dirty="0"/>
+          </a:p>
+        </p:txBody>
+      </p:sp>
+      <p:pic>
+        <p:nvPicPr>
+          <p:cNvPr id="13" name="Image 3" descr="preencoded.png">    </p:cNvPr>
+          <p:cNvPicPr>
+            <a:picLocks noChangeAspect="1"/>
+          </p:cNvPicPr>
+          <p:nvPr/>
+        </p:nvPicPr>
+        <p:blipFill>
+          <a:blip r:embed="rId4"/>
+          <a:stretch>
+            <a:fillRect/>
+          </a:stretch>
+        </p:blipFill>
+        <p:spPr>
+          <a:xfrm>
+            <a:off x="7680960" y="3904488"/>
+            <a:ext cx="274320" cy="274320"/>
+          </a:xfrm>
+          <a:prstGeom prst="rect">
+            <a:avLst/>
+          </a:prstGeom>
+        </p:spPr>
+      </p:pic>
+      <p:sp>
+        <p:nvSpPr>
+          <p:cNvPr id="14" name="Text 8"/>
+          <p:cNvSpPr/>
+          <p:nvPr/>
+        </p:nvSpPr>
+        <p:spPr>
+          <a:xfrm>
+            <a:off x="8065008" y="3840480"/>
+            <a:ext cx="2999232" cy="566928"/>
+          </a:xfrm>
+          <a:prstGeom prst="rect">
+            <a:avLst/>
+          </a:prstGeom>
+          <a:noFill/>
+          <a:ln/>
+        </p:spPr>
+        <p:txBody>
+          <a:bodyPr wrap="square" lIns="0" tIns="0" rIns="0" bIns="0" rtlCol="0" anchor="ctr"/>
+          <a:lstStyle/>
+          <a:p>
+            <a:pPr indent="0" marL="0">
+              <a:buNone/>
+            </a:pPr>
+            <a:r>
+              <a:rPr lang="en-US" sz="1250" dirty="0">
+                <a:solidFill>
+                  <a:srgbClr val="0C1726"/>
+                </a:solidFill>
+                <a:latin typeface="Arial" pitchFamily="34" charset="0"/>
+                <a:ea typeface="Arial" pitchFamily="34" charset="-122"/>
+                <a:cs typeface="Arial" pitchFamily="34" charset="-120"/>
+              </a:rPr>
+              <a:t>We do the setup for you</a:t>
+            </a:r>
+            <a:endParaRPr lang="en-US" sz="1250" dirty="0"/>
+          </a:p>
+        </p:txBody>
+      </p:sp>
+      <p:pic>
+        <p:nvPicPr>
+          <p:cNvPr id="15" name="Image 4" descr="preencoded.png">    </p:cNvPr>
+          <p:cNvPicPr>
+            <a:picLocks noChangeAspect="1"/>
+          </p:cNvPicPr>
+          <p:nvPr/>
+        </p:nvPicPr>
+        <p:blipFill>
+          <a:blip r:embed="rId5"/>
+          <a:stretch>
+            <a:fillRect/>
+          </a:stretch>
+        </p:blipFill>
+        <p:spPr>
+          <a:xfrm>
+            <a:off x="7680960" y="4562856"/>
+            <a:ext cx="274320" cy="274320"/>
+          </a:xfrm>
+          <a:prstGeom prst="rect">
+            <a:avLst/>
+          </a:prstGeom>
+        </p:spPr>
+      </p:pic>
+      <p:sp>
+        <p:nvSpPr>
+          <p:cNvPr id="16" name="Text 9"/>
+          <p:cNvSpPr/>
+          <p:nvPr/>
+        </p:nvSpPr>
+        <p:spPr>
+          <a:xfrm>
+            <a:off x="8065008" y="4498848"/>
+            <a:ext cx="2999232" cy="566928"/>
+          </a:xfrm>
+          <a:prstGeom prst="rect">
+            <a:avLst/>
+          </a:prstGeom>
+          <a:noFill/>
+          <a:ln/>
+        </p:spPr>
+        <p:txBody>
+          <a:bodyPr wrap="square" lIns="0" tIns="0" rIns="0" bIns="0" rtlCol="0" anchor="ctr"/>
+          <a:lstStyle/>
+          <a:p>
+            <a:pPr indent="0" marL="0">
+              <a:buNone/>
+            </a:pPr>
+            <a:r>
+              <a:rPr lang="en-US" sz="1250" dirty="0">
+                <a:solidFill>
+                  <a:srgbClr val="0C1726"/>
+                </a:solidFill>
+                <a:latin typeface="Arial" pitchFamily="34" charset="0"/>
+                <a:ea typeface="Arial" pitchFamily="34" charset="-122"/>
+                <a:cs typeface="Arial" pitchFamily="34" charset="-120"/>
+              </a:rPr>
+              <a:t>Keep your number, cancel anytime</a:t>
+            </a:r>
+            <a:endParaRPr lang="en-US" sz="1250" dirty="0"/>
+          </a:p>
+        </p:txBody>
+      </p:sp>
+      <p:pic>
+        <p:nvPicPr>
+          <p:cNvPr id="17" name="Image 5" descr="preencoded.png">    </p:cNvPr>
+          <p:cNvPicPr>
+            <a:picLocks noChangeAspect="1"/>
+          </p:cNvPicPr>
+          <p:nvPr/>
+        </p:nvPicPr>
+        <p:blipFill>
+          <a:blip r:embed="rId6"/>
+          <a:stretch>
+            <a:fillRect/>
+          </a:stretch>
+        </p:blipFill>
+        <p:spPr>
+          <a:xfrm>
+            <a:off x="7680960" y="5221224"/>
+            <a:ext cx="274320" cy="274320"/>
+          </a:xfrm>
+          <a:prstGeom prst="rect">
+            <a:avLst/>
+          </a:prstGeom>
+        </p:spPr>
+      </p:pic>
+      <p:sp>
+        <p:nvSpPr>
+          <p:cNvPr id="18" name="Text 10"/>
+          <p:cNvSpPr/>
+          <p:nvPr/>
+        </p:nvSpPr>
+        <p:spPr>
+          <a:xfrm>
+            <a:off x="8065008" y="5157216"/>
+            <a:ext cx="2999232" cy="566928"/>
+          </a:xfrm>
+          <a:prstGeom prst="rect">
+            <a:avLst/>
+          </a:prstGeom>
+          <a:noFill/>
+          <a:ln/>
+        </p:spPr>
+        <p:txBody>
+          <a:bodyPr wrap="square" lIns="0" tIns="0" rIns="0" bIns="0" rtlCol="0" anchor="ctr"/>
+          <a:lstStyle/>
+          <a:p>
+            <a:pPr indent="0" marL="0">
+              <a:buNone/>
+            </a:pPr>
+            <a:r>
+              <a:rPr lang="en-US" sz="1250" dirty="0">
+                <a:solidFill>
+                  <a:srgbClr val="0C1726"/>
+                </a:solidFill>
+                <a:latin typeface="Arial" pitchFamily="34" charset="0"/>
+                <a:ea typeface="Arial" pitchFamily="34" charset="-122"/>
+                <a:cs typeface="Arial" pitchFamily="34" charset="-120"/>
+              </a:rPr>
+              <a:t>No long contract, no per-call fees</a:t>
+            </a:r>
+            <a:endParaRPr lang="en-US" sz="1250" dirty="0"/>
+          </a:p>
+        </p:txBody>
+      </p:sp>
+    </p:spTree>
+  </p:cSld>
+  <p:clrMapOvr>
+    <a:masterClrMapping/>
+  </p:clrMapOvr>
+</p:sld>
+</file>
+
+<file path=ppt/slides/slide11.xml><?xml version="1.0" encoding="utf-8"?>
+<p:sld xmlns:a="http://schemas.openxmlformats.org/drawingml/2006/main" xmlns:r="http://schemas.openxmlformats.org/officeDocument/2006/relationships" xmlns:p="http://schemas.openxmlformats.org/presentationml/2006/main">
+  <p:cSld name="Slide 11">
+    <p:bg>
+      <p:bgPr>
+        <a:solidFill>
+          <a:srgbClr val="FFFFFF"/>
+        </a:solidFill>
+      </p:bgPr>
+    </p:bg>
+    <p:spTree>
+      <p:nvGrpSpPr>
+        <p:cNvPr id="1" name=""/>
+        <p:cNvGrpSpPr/>
+        <p:nvPr/>
+      </p:nvGrpSpPr>
+      <p:grpSpPr>
+        <a:xfrm>
+          <a:off x="0" y="0"/>
+          <a:ext cx="0" cy="0"/>
+          <a:chOff x="0" y="0"/>
+          <a:chExt cx="0" cy="0"/>
+        </a:xfrm>
+      </p:grpSpPr>
+      <p:pic>
+        <p:nvPicPr>
+          <p:cNvPr id="2" name="Image 0" descr="preencoded.png">    </p:cNvPr>
+          <p:cNvPicPr>
+            <a:picLocks noChangeAspect="1"/>
+          </p:cNvPicPr>
+          <p:nvPr/>
+        </p:nvPicPr>
+        <p:blipFill>
+          <a:blip r:embed="rId1"/>
+          <a:stretch>
+            <a:fillRect/>
+          </a:stretch>
+        </p:blipFill>
+        <p:spPr>
+          <a:xfrm>
+            <a:off x="640080" y="384048"/>
+            <a:ext cx="365760" cy="365760"/>
+          </a:xfrm>
+          <a:prstGeom prst="rect">
+            <a:avLst/>
+          </a:prstGeom>
+        </p:spPr>
+      </p:pic>
+      <p:sp>
+        <p:nvSpPr>
+          <p:cNvPr id="3" name="Text 0"/>
+          <p:cNvSpPr/>
+          <p:nvPr/>
+        </p:nvSpPr>
+        <p:spPr>
+          <a:xfrm>
+            <a:off x="1097280" y="365760"/>
+            <a:ext cx="2743200" cy="402336"/>
+          </a:xfrm>
+          <a:prstGeom prst="rect">
+            <a:avLst/>
+          </a:prstGeom>
+          <a:noFill/>
+          <a:ln/>
+        </p:spPr>
+        <p:txBody>
+          <a:bodyPr wrap="square" lIns="0" tIns="0" rIns="0" bIns="0" rtlCol="0" anchor="ctr"/>
+          <a:lstStyle/>
+          <a:p>
+            <a:pPr indent="0" marL="0">
+              <a:buNone/>
+            </a:pPr>
+            <a:r>
+              <a:rPr lang="en-US" sz="1500" b="1" dirty="0">
+                <a:solidFill>
+                  <a:srgbClr val="0C1726"/>
+                </a:solidFill>
+                <a:latin typeface="Arial" pitchFamily="34" charset="0"/>
+                <a:ea typeface="Arial" pitchFamily="34" charset="-122"/>
+                <a:cs typeface="Arial" pitchFamily="34" charset="-120"/>
+              </a:rPr>
+              <a:t>Dispango</a:t>
+            </a:r>
+            <a:endParaRPr lang="en-US" sz="1500" dirty="0"/>
+          </a:p>
+        </p:txBody>
+      </p:sp>
+      <p:sp>
+        <p:nvSpPr>
+          <p:cNvPr id="4" name="Text 1"/>
+          <p:cNvSpPr/>
+          <p:nvPr/>
+        </p:nvSpPr>
+        <p:spPr>
+          <a:xfrm>
+            <a:off x="640080" y="1051560"/>
+            <a:ext cx="10911535" cy="914400"/>
+          </a:xfrm>
+          <a:prstGeom prst="rect">
+            <a:avLst/>
+          </a:prstGeom>
+          <a:noFill/>
+          <a:ln/>
+        </p:spPr>
+        <p:txBody>
+          <a:bodyPr wrap="square" lIns="0" tIns="0" rIns="0" bIns="0" rtlCol="0" anchor="ctr"/>
+          <a:lstStyle/>
+          <a:p>
+            <a:pPr indent="0" marL="0">
+              <a:buNone/>
+            </a:pPr>
+            <a:r>
+              <a:rPr lang="en-US" sz="3400" b="1" dirty="0">
+                <a:solidFill>
+                  <a:srgbClr val="0C1726"/>
+                </a:solidFill>
+                <a:latin typeface="Arial" pitchFamily="34" charset="0"/>
+                <a:ea typeface="Arial" pitchFamily="34" charset="-122"/>
+                <a:cs typeface="Arial" pitchFamily="34" charset="-120"/>
+              </a:rPr>
+              <a:t>Up and running in a day</a:t>
+            </a:r>
+            <a:endParaRPr lang="en-US" sz="3400" dirty="0"/>
+          </a:p>
+        </p:txBody>
+      </p:sp>
+      <p:sp>
+        <p:nvSpPr>
+          <p:cNvPr id="5" name="Shape 2"/>
+          <p:cNvSpPr/>
+          <p:nvPr/>
+        </p:nvSpPr>
+        <p:spPr>
+          <a:xfrm>
+            <a:off x="640080" y="2560320"/>
+            <a:ext cx="3474720" cy="2743200"/>
+          </a:xfrm>
+          <a:prstGeom prst="roundRect">
+            <a:avLst>
+              <a:gd name="adj" fmla="val 4000"/>
+            </a:avLst>
+          </a:prstGeom>
+          <a:solidFill>
+            <a:srgbClr val="F4F8FD"/>
+          </a:solidFill>
+          <a:ln w="12700">
+            <a:solidFill>
+              <a:srgbClr val="E7EDF6"/>
+            </a:solidFill>
+            <a:prstDash val="solid"/>
+          </a:ln>
+        </p:spPr>
+      </p:sp>
+      <p:sp>
+        <p:nvSpPr>
+          <p:cNvPr id="6" name="Shape 3"/>
+          <p:cNvSpPr/>
+          <p:nvPr/>
+        </p:nvSpPr>
+        <p:spPr>
+          <a:xfrm>
+            <a:off x="960120" y="2880360"/>
+            <a:ext cx="731520" cy="731520"/>
+          </a:xfrm>
+          <a:prstGeom prst="ellipse">
+            <a:avLst/>
+          </a:prstGeom>
+          <a:solidFill>
+            <a:srgbClr val="2F6BED"/>
+          </a:solidFill>
+          <a:ln/>
+        </p:spPr>
+      </p:sp>
+      <p:pic>
+        <p:nvPicPr>
+          <p:cNvPr id="7" name="Image 1" descr="preencoded.png">    </p:cNvPr>
+          <p:cNvPicPr>
+            <a:picLocks noChangeAspect="1"/>
+          </p:cNvPicPr>
+          <p:nvPr/>
+        </p:nvPicPr>
+        <p:blipFill>
+          <a:blip r:embed="rId2"/>
+          <a:stretch>
+            <a:fillRect/>
+          </a:stretch>
+        </p:blipFill>
+        <p:spPr>
+          <a:xfrm>
+            <a:off x="1143000" y="3063240"/>
+            <a:ext cx="365760" cy="365760"/>
+          </a:xfrm>
+          <a:prstGeom prst="rect">
+            <a:avLst/>
+          </a:prstGeom>
+        </p:spPr>
+      </p:pic>
+      <p:sp>
+        <p:nvSpPr>
+          <p:cNvPr id="8" name="Text 4"/>
+          <p:cNvSpPr/>
+          <p:nvPr/>
+        </p:nvSpPr>
+        <p:spPr>
+          <a:xfrm>
+            <a:off x="1828800" y="2971800"/>
+            <a:ext cx="2011680" cy="365760"/>
+          </a:xfrm>
+          <a:prstGeom prst="rect">
+            <a:avLst/>
+          </a:prstGeom>
+          <a:noFill/>
+          <a:ln/>
+        </p:spPr>
+        <p:txBody>
+          <a:bodyPr wrap="square" lIns="0" tIns="0" rIns="0" bIns="0" rtlCol="0" anchor="ctr"/>
+          <a:lstStyle/>
+          <a:p>
+            <a:pPr indent="0" marL="0">
+              <a:buNone/>
+            </a:pPr>
+            <a:r>
+              <a:rPr lang="en-US" sz="1200" b="1" dirty="0">
+                <a:solidFill>
+                  <a:srgbClr val="2F6BED"/>
+                </a:solidFill>
+                <a:latin typeface="Arial" pitchFamily="34" charset="0"/>
+                <a:ea typeface="Arial" pitchFamily="34" charset="-122"/>
+                <a:cs typeface="Arial" pitchFamily="34" charset="-120"/>
+              </a:rPr>
+              <a:t>Step 1</a:t>
+            </a:r>
+            <a:endParaRPr lang="en-US" sz="1200" dirty="0"/>
+          </a:p>
+        </p:txBody>
+      </p:sp>
+      <p:sp>
+        <p:nvSpPr>
+          <p:cNvPr id="9" name="Text 5"/>
+          <p:cNvSpPr/>
+          <p:nvPr/>
+        </p:nvSpPr>
+        <p:spPr>
+          <a:xfrm>
+            <a:off x="960120" y="3794760"/>
+            <a:ext cx="2834640" cy="457200"/>
+          </a:xfrm>
+          <a:prstGeom prst="rect">
+            <a:avLst/>
+          </a:prstGeom>
+          <a:noFill/>
+          <a:ln/>
+        </p:spPr>
+        <p:txBody>
+          <a:bodyPr wrap="square" lIns="0" tIns="0" rIns="0" bIns="0" rtlCol="0" anchor="ctr"/>
+          <a:lstStyle/>
+          <a:p>
+            <a:pPr indent="0" marL="0">
+              <a:buNone/>
+            </a:pPr>
+            <a:r>
+              <a:rPr lang="en-US" sz="1600" b="1" dirty="0">
+                <a:solidFill>
+                  <a:srgbClr val="0C1726"/>
+                </a:solidFill>
+                <a:latin typeface="Arial" pitchFamily="34" charset="0"/>
+                <a:ea typeface="Arial" pitchFamily="34" charset="-122"/>
+                <a:cs typeface="Arial" pitchFamily="34" charset="-120"/>
+              </a:rPr>
+              <a:t>We set it up</a:t>
+            </a:r>
+            <a:endParaRPr lang="en-US" sz="1600" dirty="0"/>
+          </a:p>
+        </p:txBody>
+      </p:sp>
+      <p:sp>
+        <p:nvSpPr>
+          <p:cNvPr id="10" name="Text 6"/>
+          <p:cNvSpPr/>
+          <p:nvPr/>
+        </p:nvSpPr>
+        <p:spPr>
+          <a:xfrm>
+            <a:off x="960120" y="4251960"/>
+            <a:ext cx="2834640" cy="914400"/>
+          </a:xfrm>
+          <a:prstGeom prst="rect">
+            <a:avLst/>
+          </a:prstGeom>
+          <a:noFill/>
+          <a:ln/>
+        </p:spPr>
+        <p:txBody>
+          <a:bodyPr wrap="square" lIns="0" tIns="0" rIns="0" bIns="0" rtlCol="0" anchor="ctr"/>
+          <a:lstStyle/>
+          <a:p>
+            <a:pPr indent="0" marL="0">
+              <a:lnSpc>
+                <a:spcPct val="120000"/>
+              </a:lnSpc>
+              <a:buNone/>
+            </a:pPr>
+            <a:r>
+              <a:rPr lang="en-US" sz="1250" dirty="0">
+                <a:solidFill>
+                  <a:srgbClr val="44505F"/>
+                </a:solidFill>
+                <a:latin typeface="Arial" pitchFamily="34" charset="0"/>
+                <a:ea typeface="Arial" pitchFamily="34" charset="-122"/>
+                <a:cs typeface="Arial" pitchFamily="34" charset="-120"/>
+              </a:rPr>
+              <a:t>We configure your AI receptionist and dispatch number for you.</a:t>
+            </a:r>
+            <a:endParaRPr lang="en-US" sz="1250" dirty="0"/>
+          </a:p>
+        </p:txBody>
+      </p:sp>
+      <p:sp>
+        <p:nvSpPr>
+          <p:cNvPr id="11" name="Shape 7"/>
+          <p:cNvSpPr/>
+          <p:nvPr/>
+        </p:nvSpPr>
+        <p:spPr>
+          <a:xfrm>
+            <a:off x="4343400" y="2560320"/>
+            <a:ext cx="3474720" cy="2743200"/>
+          </a:xfrm>
+          <a:prstGeom prst="roundRect">
+            <a:avLst>
+              <a:gd name="adj" fmla="val 4000"/>
+            </a:avLst>
+          </a:prstGeom>
+          <a:solidFill>
+            <a:srgbClr val="F4F8FD"/>
+          </a:solidFill>
+          <a:ln w="12700">
+            <a:solidFill>
+              <a:srgbClr val="E7EDF6"/>
+            </a:solidFill>
+            <a:prstDash val="solid"/>
+          </a:ln>
+        </p:spPr>
+      </p:sp>
+      <p:sp>
+        <p:nvSpPr>
+          <p:cNvPr id="12" name="Shape 8"/>
+          <p:cNvSpPr/>
+          <p:nvPr/>
+        </p:nvSpPr>
+        <p:spPr>
+          <a:xfrm>
+            <a:off x="4663440" y="2880360"/>
+            <a:ext cx="731520" cy="731520"/>
+          </a:xfrm>
+          <a:prstGeom prst="ellipse">
+            <a:avLst/>
+          </a:prstGeom>
+          <a:solidFill>
+            <a:srgbClr val="2F6BED"/>
+          </a:solidFill>
+          <a:ln/>
+        </p:spPr>
+      </p:sp>
+      <p:pic>
+        <p:nvPicPr>
+          <p:cNvPr id="13" name="Image 2" descr="preencoded.png">    </p:cNvPr>
+          <p:cNvPicPr>
+            <a:picLocks noChangeAspect="1"/>
+          </p:cNvPicPr>
+          <p:nvPr/>
+        </p:nvPicPr>
+        <p:blipFill>
+          <a:blip r:embed="rId3"/>
+          <a:stretch>
+            <a:fillRect/>
+          </a:stretch>
+        </p:blipFill>
+        <p:spPr>
+          <a:xfrm>
+            <a:off x="4846320" y="3063240"/>
+            <a:ext cx="365760" cy="365760"/>
+          </a:xfrm>
+          <a:prstGeom prst="rect">
+            <a:avLst/>
+          </a:prstGeom>
+        </p:spPr>
+      </p:pic>
+      <p:sp>
+        <p:nvSpPr>
+          <p:cNvPr id="14" name="Text 9"/>
+          <p:cNvSpPr/>
+          <p:nvPr/>
+        </p:nvSpPr>
+        <p:spPr>
+          <a:xfrm>
+            <a:off x="5532120" y="2971800"/>
+            <a:ext cx="2011680" cy="365760"/>
+          </a:xfrm>
+          <a:prstGeom prst="rect">
+            <a:avLst/>
+          </a:prstGeom>
+          <a:noFill/>
+          <a:ln/>
+        </p:spPr>
+        <p:txBody>
+          <a:bodyPr wrap="square" lIns="0" tIns="0" rIns="0" bIns="0" rtlCol="0" anchor="ctr"/>
+          <a:lstStyle/>
+          <a:p>
+            <a:pPr indent="0" marL="0">
+              <a:buNone/>
+            </a:pPr>
+            <a:r>
+              <a:rPr lang="en-US" sz="1200" b="1" dirty="0">
+                <a:solidFill>
+                  <a:srgbClr val="2F6BED"/>
+                </a:solidFill>
+                <a:latin typeface="Arial" pitchFamily="34" charset="0"/>
+                <a:ea typeface="Arial" pitchFamily="34" charset="-122"/>
+                <a:cs typeface="Arial" pitchFamily="34" charset="-120"/>
+              </a:rPr>
+              <a:t>Step 2</a:t>
+            </a:r>
+            <a:endParaRPr lang="en-US" sz="1200" dirty="0"/>
+          </a:p>
+        </p:txBody>
+      </p:sp>
+      <p:sp>
+        <p:nvSpPr>
+          <p:cNvPr id="15" name="Text 10"/>
+          <p:cNvSpPr/>
+          <p:nvPr/>
+        </p:nvSpPr>
+        <p:spPr>
+          <a:xfrm>
+            <a:off x="4663440" y="3794760"/>
+            <a:ext cx="2834640" cy="457200"/>
+          </a:xfrm>
+          <a:prstGeom prst="rect">
+            <a:avLst/>
+          </a:prstGeom>
+          <a:noFill/>
+          <a:ln/>
+        </p:spPr>
+        <p:txBody>
+          <a:bodyPr wrap="square" lIns="0" tIns="0" rIns="0" bIns="0" rtlCol="0" anchor="ctr"/>
+          <a:lstStyle/>
+          <a:p>
+            <a:pPr indent="0" marL="0">
+              <a:buNone/>
+            </a:pPr>
+            <a:r>
+              <a:rPr lang="en-US" sz="1600" b="1" dirty="0">
+                <a:solidFill>
+                  <a:srgbClr val="0C1726"/>
+                </a:solidFill>
+                <a:latin typeface="Arial" pitchFamily="34" charset="0"/>
+                <a:ea typeface="Arial" pitchFamily="34" charset="-122"/>
+                <a:cs typeface="Arial" pitchFamily="34" charset="-120"/>
+              </a:rPr>
+              <a:t>You forward your calls</a:t>
+            </a:r>
+            <a:endParaRPr lang="en-US" sz="1600" dirty="0"/>
+          </a:p>
+        </p:txBody>
+      </p:sp>
+      <p:sp>
+        <p:nvSpPr>
+          <p:cNvPr id="16" name="Text 11"/>
+          <p:cNvSpPr/>
+          <p:nvPr/>
+        </p:nvSpPr>
+        <p:spPr>
+          <a:xfrm>
+            <a:off x="4663440" y="4251960"/>
+            <a:ext cx="2834640" cy="914400"/>
+          </a:xfrm>
+          <a:prstGeom prst="rect">
+            <a:avLst/>
+          </a:prstGeom>
+          <a:noFill/>
+          <a:ln/>
+        </p:spPr>
+        <p:txBody>
+          <a:bodyPr wrap="square" lIns="0" tIns="0" rIns="0" bIns="0" rtlCol="0" anchor="ctr"/>
+          <a:lstStyle/>
+          <a:p>
+            <a:pPr indent="0" marL="0">
+              <a:lnSpc>
+                <a:spcPct val="120000"/>
+              </a:lnSpc>
+              <a:buNone/>
+            </a:pPr>
+            <a:r>
+              <a:rPr lang="en-US" sz="1250" dirty="0">
+                <a:solidFill>
+                  <a:srgbClr val="44505F"/>
+                </a:solidFill>
+                <a:latin typeface="Arial" pitchFamily="34" charset="0"/>
+                <a:ea typeface="Arial" pitchFamily="34" charset="-122"/>
+                <a:cs typeface="Arial" pitchFamily="34" charset="-120"/>
+              </a:rPr>
+              <a:t>A quick setting with your carrier — your number stays the same.</a:t>
+            </a:r>
+            <a:endParaRPr lang="en-US" sz="1250" dirty="0"/>
+          </a:p>
+        </p:txBody>
+      </p:sp>
+      <p:sp>
+        <p:nvSpPr>
+          <p:cNvPr id="17" name="Shape 12"/>
+          <p:cNvSpPr/>
+          <p:nvPr/>
+        </p:nvSpPr>
+        <p:spPr>
+          <a:xfrm>
+            <a:off x="8046720" y="2560320"/>
+            <a:ext cx="3474720" cy="2743200"/>
+          </a:xfrm>
+          <a:prstGeom prst="roundRect">
+            <a:avLst>
+              <a:gd name="adj" fmla="val 4000"/>
+            </a:avLst>
+          </a:prstGeom>
+          <a:solidFill>
+            <a:srgbClr val="F4F8FD"/>
+          </a:solidFill>
+          <a:ln w="12700">
+            <a:solidFill>
+              <a:srgbClr val="E7EDF6"/>
+            </a:solidFill>
+            <a:prstDash val="solid"/>
+          </a:ln>
+        </p:spPr>
+      </p:sp>
+      <p:sp>
+        <p:nvSpPr>
+          <p:cNvPr id="18" name="Shape 13"/>
+          <p:cNvSpPr/>
+          <p:nvPr/>
+        </p:nvSpPr>
+        <p:spPr>
+          <a:xfrm>
+            <a:off x="8366760" y="2880360"/>
+            <a:ext cx="731520" cy="731520"/>
+          </a:xfrm>
+          <a:prstGeom prst="ellipse">
+            <a:avLst/>
+          </a:prstGeom>
+          <a:solidFill>
+            <a:srgbClr val="2F6BED"/>
+          </a:solidFill>
+          <a:ln/>
+        </p:spPr>
+      </p:sp>
+      <p:pic>
+        <p:nvPicPr>
+          <p:cNvPr id="19" name="Image 3" descr="preencoded.png">    </p:cNvPr>
+          <p:cNvPicPr>
+            <a:picLocks noChangeAspect="1"/>
+          </p:cNvPicPr>
+          <p:nvPr/>
+        </p:nvPicPr>
+        <p:blipFill>
+          <a:blip r:embed="rId4"/>
+          <a:stretch>
+            <a:fillRect/>
+          </a:stretch>
+        </p:blipFill>
+        <p:spPr>
+          <a:xfrm>
+            <a:off x="8549640" y="3063240"/>
+            <a:ext cx="365760" cy="365760"/>
+          </a:xfrm>
+          <a:prstGeom prst="rect">
+            <a:avLst/>
+          </a:prstGeom>
+        </p:spPr>
+      </p:pic>
+      <p:sp>
+        <p:nvSpPr>
+          <p:cNvPr id="20" name="Text 14"/>
+          <p:cNvSpPr/>
+          <p:nvPr/>
+        </p:nvSpPr>
+        <p:spPr>
+          <a:xfrm>
+            <a:off x="9235440" y="2971800"/>
+            <a:ext cx="2011680" cy="365760"/>
+          </a:xfrm>
+          <a:prstGeom prst="rect">
+            <a:avLst/>
+          </a:prstGeom>
+          <a:noFill/>
+          <a:ln/>
+        </p:spPr>
+        <p:txBody>
+          <a:bodyPr wrap="square" lIns="0" tIns="0" rIns="0" bIns="0" rtlCol="0" anchor="ctr"/>
+          <a:lstStyle/>
+          <a:p>
+            <a:pPr indent="0" marL="0">
+              <a:buNone/>
+            </a:pPr>
+            <a:r>
+              <a:rPr lang="en-US" sz="1200" b="1" dirty="0">
+                <a:solidFill>
+                  <a:srgbClr val="2F6BED"/>
+                </a:solidFill>
+                <a:latin typeface="Arial" pitchFamily="34" charset="0"/>
+                <a:ea typeface="Arial" pitchFamily="34" charset="-122"/>
+                <a:cs typeface="Arial" pitchFamily="34" charset="-120"/>
+              </a:rPr>
+              <a:t>Step 3</a:t>
+            </a:r>
+            <a:endParaRPr lang="en-US" sz="1200" dirty="0"/>
+          </a:p>
+        </p:txBody>
+      </p:sp>
+      <p:sp>
+        <p:nvSpPr>
+          <p:cNvPr id="21" name="Text 15"/>
+          <p:cNvSpPr/>
+          <p:nvPr/>
+        </p:nvSpPr>
+        <p:spPr>
+          <a:xfrm>
+            <a:off x="8366760" y="3794760"/>
+            <a:ext cx="2834640" cy="457200"/>
+          </a:xfrm>
+          <a:prstGeom prst="rect">
+            <a:avLst/>
+          </a:prstGeom>
+          <a:noFill/>
+          <a:ln/>
+        </p:spPr>
+        <p:txBody>
+          <a:bodyPr wrap="square" lIns="0" tIns="0" rIns="0" bIns="0" rtlCol="0" anchor="ctr"/>
+          <a:lstStyle/>
+          <a:p>
+            <a:pPr indent="0" marL="0">
+              <a:buNone/>
+            </a:pPr>
+            <a:r>
+              <a:rPr lang="en-US" sz="1600" b="1" dirty="0">
+                <a:solidFill>
+                  <a:srgbClr val="0C1726"/>
+                </a:solidFill>
+                <a:latin typeface="Arial" pitchFamily="34" charset="0"/>
+                <a:ea typeface="Arial" pitchFamily="34" charset="-122"/>
+                <a:cs typeface="Arial" pitchFamily="34" charset="-120"/>
+              </a:rPr>
+              <a:t>Leads start arriving</a:t>
+            </a:r>
+            <a:endParaRPr lang="en-US" sz="1600" dirty="0"/>
+          </a:p>
+        </p:txBody>
+      </p:sp>
+      <p:sp>
+        <p:nvSpPr>
+          <p:cNvPr id="22" name="Text 16"/>
+          <p:cNvSpPr/>
+          <p:nvPr/>
+        </p:nvSpPr>
+        <p:spPr>
+          <a:xfrm>
+            <a:off x="8366760" y="4251960"/>
+            <a:ext cx="2834640" cy="914400"/>
+          </a:xfrm>
+          <a:prstGeom prst="rect">
+            <a:avLst/>
+          </a:prstGeom>
+          <a:noFill/>
+          <a:ln/>
+        </p:spPr>
+        <p:txBody>
+          <a:bodyPr wrap="square" lIns="0" tIns="0" rIns="0" bIns="0" rtlCol="0" anchor="ctr"/>
+          <a:lstStyle/>
+          <a:p>
+            <a:pPr indent="0" marL="0">
+              <a:lnSpc>
+                <a:spcPct val="120000"/>
+              </a:lnSpc>
+              <a:buNone/>
+            </a:pPr>
+            <a:r>
+              <a:rPr lang="en-US" sz="1250" dirty="0">
+                <a:solidFill>
+                  <a:srgbClr val="44505F"/>
+                </a:solidFill>
+                <a:latin typeface="Arial" pitchFamily="34" charset="0"/>
+                <a:ea typeface="Arial" pitchFamily="34" charset="-122"/>
+                <a:cs typeface="Arial" pitchFamily="34" charset="-120"/>
+              </a:rPr>
+              <a:t>Missed calls turn into texts on your phone, starting the same day.</a:t>
+            </a:r>
+            <a:endParaRPr lang="en-US" sz="1250" dirty="0"/>
+          </a:p>
+        </p:txBody>
+      </p:sp>
+    </p:spTree>
+  </p:cSld>
+  <p:clrMapOvr>
+    <a:masterClrMapping/>
+  </p:clrMapOvr>
+</p:sld>
+</file>
+
+<file path=ppt/slides/slide12.xml><?xml version="1.0" encoding="utf-8"?>
+<p:sld xmlns:a="http://schemas.openxmlformats.org/drawingml/2006/main" xmlns:r="http://schemas.openxmlformats.org/officeDocument/2006/relationships" xmlns:p="http://schemas.openxmlformats.org/presentationml/2006/main">
+  <p:cSld name="Slide 12">
+    <p:bg>
+      <p:bgPr>
+        <a:solidFill>
           <a:srgbClr val="0C1726"/>
         </a:solidFill>
       </p:bgPr>
@@ -2304,7 +3797,7 @@
                 <a:ea typeface="Arial" pitchFamily="34" charset="-122"/>
                 <a:cs typeface="Arial" pitchFamily="34" charset="-120"/>
               </a:rPr>
-              <a:t>2 AM</a:t>
+              <a:t>2 in 3</a:t>
             </a:r>
             <a:endParaRPr lang="en-US" sz="4000" dirty="0"/>
           </a:p>
@@ -2343,7 +3836,7 @@
                 <a:ea typeface="Arial" pitchFamily="34" charset="-122"/>
                 <a:cs typeface="Arial" pitchFamily="34" charset="-120"/>
               </a:rPr>
-              <a:t>when lockouts</a:t>
+              <a:t>calls are after-hours</a:t>
             </a:r>
             <a:endParaRPr lang="en-US" sz="1250" dirty="0"/>
           </a:p>
@@ -2360,7 +3853,7 @@
                 <a:ea typeface="Arial" pitchFamily="34" charset="-122"/>
                 <a:cs typeface="Arial" pitchFamily="34" charset="-120"/>
               </a:rPr>
-              <a:t>actually happen</a:t>
+              <a:t>or mid-job</a:t>
             </a:r>
             <a:endParaRPr lang="en-US" sz="1250" dirty="0"/>
           </a:p>
@@ -2426,7 +3919,7 @@
                 <a:ea typeface="Arial" pitchFamily="34" charset="-122"/>
                 <a:cs typeface="Arial" pitchFamily="34" charset="-120"/>
               </a:rPr>
-              <a:t>1st</a:t>
+              <a:t>~9</a:t>
             </a:r>
             <a:endParaRPr lang="en-US" sz="4000" dirty="0"/>
           </a:p>
@@ -2465,7 +3958,7 @@
                 <a:ea typeface="Arial" pitchFamily="34" charset="-122"/>
                 <a:cs typeface="Arial" pitchFamily="34" charset="-120"/>
               </a:rPr>
-              <a:t>to answer</a:t>
+              <a:t>jobs/week a busy</a:t>
             </a:r>
             <a:endParaRPr lang="en-US" sz="1250" dirty="0"/>
           </a:p>
@@ -2482,7 +3975,7 @@
                 <a:ea typeface="Arial" pitchFamily="34" charset="-122"/>
                 <a:cs typeface="Arial" pitchFamily="34" charset="-120"/>
               </a:rPr>
-              <a:t>wins the job</a:t>
+              <a:t>shop misses</a:t>
             </a:r>
             <a:endParaRPr lang="en-US" sz="1250" dirty="0"/>
           </a:p>
@@ -2587,7 +4080,7 @@
                 <a:ea typeface="Arial" pitchFamily="34" charset="-122"/>
                 <a:cs typeface="Arial" pitchFamily="34" charset="-120"/>
               </a:rPr>
-              <a:t>voicemails most</a:t>
+              <a:t>voicemails callers</a:t>
             </a:r>
             <a:endParaRPr lang="en-US" sz="1250" dirty="0"/>
           </a:p>
@@ -2604,7 +4097,7 @@
                 <a:ea typeface="Arial" pitchFamily="34" charset="-122"/>
                 <a:cs typeface="Arial" pitchFamily="34" charset="-120"/>
               </a:rPr>
-              <a:t>callers leave</a:t>
+              <a:t>leave</a:t>
             </a:r>
             <a:endParaRPr lang="en-US" sz="1250" dirty="0"/>
           </a:p>
@@ -2621,6 +4114,920 @@
 <file path=ppt/slides/slide3.xml><?xml version="1.0" encoding="utf-8"?>
 <p:sld xmlns:a="http://schemas.openxmlformats.org/drawingml/2006/main" xmlns:r="http://schemas.openxmlformats.org/officeDocument/2006/relationships" xmlns:p="http://schemas.openxmlformats.org/presentationml/2006/main">
   <p:cSld name="Slide 3">
+    <p:bg>
+      <p:bgPr>
+        <a:solidFill>
+          <a:srgbClr val="FFFFFF"/>
+        </a:solidFill>
+      </p:bgPr>
+    </p:bg>
+    <p:spTree>
+      <p:nvGrpSpPr>
+        <p:cNvPr id="1" name=""/>
+        <p:cNvGrpSpPr/>
+        <p:nvPr/>
+      </p:nvGrpSpPr>
+      <p:grpSpPr>
+        <a:xfrm>
+          <a:off x="0" y="0"/>
+          <a:ext cx="0" cy="0"/>
+          <a:chOff x="0" y="0"/>
+          <a:chExt cx="0" cy="0"/>
+        </a:xfrm>
+      </p:grpSpPr>
+      <p:pic>
+        <p:nvPicPr>
+          <p:cNvPr id="2" name="Image 0" descr="preencoded.png">    </p:cNvPr>
+          <p:cNvPicPr>
+            <a:picLocks noChangeAspect="1"/>
+          </p:cNvPicPr>
+          <p:nvPr/>
+        </p:nvPicPr>
+        <p:blipFill>
+          <a:blip r:embed="rId1"/>
+          <a:stretch>
+            <a:fillRect/>
+          </a:stretch>
+        </p:blipFill>
+        <p:spPr>
+          <a:xfrm>
+            <a:off x="640080" y="384048"/>
+            <a:ext cx="365760" cy="365760"/>
+          </a:xfrm>
+          <a:prstGeom prst="rect">
+            <a:avLst/>
+          </a:prstGeom>
+        </p:spPr>
+      </p:pic>
+      <p:sp>
+        <p:nvSpPr>
+          <p:cNvPr id="3" name="Text 0"/>
+          <p:cNvSpPr/>
+          <p:nvPr/>
+        </p:nvSpPr>
+        <p:spPr>
+          <a:xfrm>
+            <a:off x="1097280" y="365760"/>
+            <a:ext cx="2743200" cy="402336"/>
+          </a:xfrm>
+          <a:prstGeom prst="rect">
+            <a:avLst/>
+          </a:prstGeom>
+          <a:noFill/>
+          <a:ln/>
+        </p:spPr>
+        <p:txBody>
+          <a:bodyPr wrap="square" lIns="0" tIns="0" rIns="0" bIns="0" rtlCol="0" anchor="ctr"/>
+          <a:lstStyle/>
+          <a:p>
+            <a:pPr indent="0" marL="0">
+              <a:buNone/>
+            </a:pPr>
+            <a:r>
+              <a:rPr lang="en-US" sz="1500" b="1" dirty="0">
+                <a:solidFill>
+                  <a:srgbClr val="0C1726"/>
+                </a:solidFill>
+                <a:latin typeface="Arial" pitchFamily="34" charset="0"/>
+                <a:ea typeface="Arial" pitchFamily="34" charset="-122"/>
+                <a:cs typeface="Arial" pitchFamily="34" charset="-120"/>
+              </a:rPr>
+              <a:t>Dispango</a:t>
+            </a:r>
+            <a:endParaRPr lang="en-US" sz="1500" dirty="0"/>
+          </a:p>
+        </p:txBody>
+      </p:sp>
+      <p:sp>
+        <p:nvSpPr>
+          <p:cNvPr id="4" name="Text 1"/>
+          <p:cNvSpPr/>
+          <p:nvPr/>
+        </p:nvSpPr>
+        <p:spPr>
+          <a:xfrm>
+            <a:off x="640080" y="1051560"/>
+            <a:ext cx="10911535" cy="914400"/>
+          </a:xfrm>
+          <a:prstGeom prst="rect">
+            <a:avLst/>
+          </a:prstGeom>
+          <a:noFill/>
+          <a:ln/>
+        </p:spPr>
+        <p:txBody>
+          <a:bodyPr wrap="square" lIns="0" tIns="0" rIns="0" bIns="0" rtlCol="0" anchor="ctr"/>
+          <a:lstStyle/>
+          <a:p>
+            <a:pPr indent="0" marL="0">
+              <a:buNone/>
+            </a:pPr>
+            <a:r>
+              <a:rPr lang="en-US" sz="3400" b="1" dirty="0">
+                <a:solidFill>
+                  <a:srgbClr val="0C1726"/>
+                </a:solidFill>
+                <a:latin typeface="Arial" pitchFamily="34" charset="0"/>
+                <a:ea typeface="Arial" pitchFamily="34" charset="-122"/>
+                <a:cs typeface="Arial" pitchFamily="34" charset="-120"/>
+              </a:rPr>
+              <a:t>The difference is who answers</a:t>
+            </a:r>
+            <a:endParaRPr lang="en-US" sz="3400" dirty="0"/>
+          </a:p>
+        </p:txBody>
+      </p:sp>
+      <p:sp>
+        <p:nvSpPr>
+          <p:cNvPr id="5" name="Shape 2"/>
+          <p:cNvSpPr/>
+          <p:nvPr/>
+        </p:nvSpPr>
+        <p:spPr>
+          <a:xfrm>
+            <a:off x="640080" y="2331720"/>
+            <a:ext cx="5257800" cy="3886200"/>
+          </a:xfrm>
+          <a:prstGeom prst="roundRect">
+            <a:avLst>
+              <a:gd name="adj" fmla="val 3294"/>
+            </a:avLst>
+          </a:prstGeom>
+          <a:solidFill>
+            <a:srgbClr val="FBF1EF"/>
+          </a:solidFill>
+          <a:ln w="12700">
+            <a:solidFill>
+              <a:srgbClr val="F0D9D3"/>
+            </a:solidFill>
+            <a:prstDash val="solid"/>
+          </a:ln>
+        </p:spPr>
+      </p:sp>
+      <p:sp>
+        <p:nvSpPr>
+          <p:cNvPr id="6" name="Text 3"/>
+          <p:cNvSpPr/>
+          <p:nvPr/>
+        </p:nvSpPr>
+        <p:spPr>
+          <a:xfrm>
+            <a:off x="1051560" y="2651760"/>
+            <a:ext cx="4572000" cy="457200"/>
+          </a:xfrm>
+          <a:prstGeom prst="rect">
+            <a:avLst/>
+          </a:prstGeom>
+          <a:noFill/>
+          <a:ln/>
+        </p:spPr>
+        <p:txBody>
+          <a:bodyPr wrap="square" lIns="0" tIns="0" rIns="0" bIns="0" rtlCol="0" anchor="ctr"/>
+          <a:lstStyle/>
+          <a:p>
+            <a:pPr indent="0" marL="0">
+              <a:buNone/>
+            </a:pPr>
+            <a:r>
+              <a:rPr lang="en-US" sz="1800" b="1" dirty="0">
+                <a:solidFill>
+                  <a:srgbClr val="B4432E"/>
+                </a:solidFill>
+                <a:latin typeface="Arial" pitchFamily="34" charset="0"/>
+                <a:ea typeface="Arial" pitchFamily="34" charset="-122"/>
+                <a:cs typeface="Arial" pitchFamily="34" charset="-120"/>
+              </a:rPr>
+              <a:t>Without Dispango</a:t>
+            </a:r>
+            <a:endParaRPr lang="en-US" sz="1800" dirty="0"/>
+          </a:p>
+        </p:txBody>
+      </p:sp>
+      <p:sp>
+        <p:nvSpPr>
+          <p:cNvPr id="7" name="Text 4"/>
+          <p:cNvSpPr/>
+          <p:nvPr/>
+        </p:nvSpPr>
+        <p:spPr>
+          <a:xfrm>
+            <a:off x="1051560" y="3291840"/>
+            <a:ext cx="365760" cy="548640"/>
+          </a:xfrm>
+          <a:prstGeom prst="rect">
+            <a:avLst/>
+          </a:prstGeom>
+          <a:noFill/>
+          <a:ln/>
+        </p:spPr>
+        <p:txBody>
+          <a:bodyPr wrap="square" lIns="0" tIns="0" rIns="0" bIns="0" rtlCol="0" anchor="ctr"/>
+          <a:lstStyle/>
+          <a:p>
+            <a:pPr algn="ctr" indent="0" marL="0">
+              <a:buNone/>
+            </a:pPr>
+            <a:r>
+              <a:rPr lang="en-US" sz="1500" b="1" dirty="0">
+                <a:solidFill>
+                  <a:srgbClr val="C0503A"/>
+                </a:solidFill>
+                <a:latin typeface="Arial" pitchFamily="34" charset="0"/>
+                <a:ea typeface="Arial" pitchFamily="34" charset="-122"/>
+                <a:cs typeface="Arial" pitchFamily="34" charset="-120"/>
+              </a:rPr>
+              <a:t>✕</a:t>
+            </a:r>
+            <a:endParaRPr lang="en-US" sz="1500" dirty="0"/>
+          </a:p>
+        </p:txBody>
+      </p:sp>
+      <p:sp>
+        <p:nvSpPr>
+          <p:cNvPr id="8" name="Text 5"/>
+          <p:cNvSpPr/>
+          <p:nvPr/>
+        </p:nvSpPr>
+        <p:spPr>
+          <a:xfrm>
+            <a:off x="1508760" y="3291840"/>
+            <a:ext cx="4114800" cy="594360"/>
+          </a:xfrm>
+          <a:prstGeom prst="rect">
+            <a:avLst/>
+          </a:prstGeom>
+          <a:noFill/>
+          <a:ln/>
+        </p:spPr>
+        <p:txBody>
+          <a:bodyPr wrap="square" lIns="0" tIns="0" rIns="0" bIns="0" rtlCol="0" anchor="ctr"/>
+          <a:lstStyle/>
+          <a:p>
+            <a:pPr indent="0" marL="0">
+              <a:lnSpc>
+                <a:spcPct val="110000"/>
+              </a:lnSpc>
+              <a:buNone/>
+            </a:pPr>
+            <a:r>
+              <a:rPr lang="en-US" sz="1300" dirty="0">
+                <a:solidFill>
+                  <a:srgbClr val="44505F"/>
+                </a:solidFill>
+                <a:latin typeface="Arial" pitchFamily="34" charset="0"/>
+                <a:ea typeface="Arial" pitchFamily="34" charset="-122"/>
+                <a:cs typeface="Arial" pitchFamily="34" charset="-120"/>
+              </a:rPr>
+              <a:t>The call rings out or hits voicemail</a:t>
+            </a:r>
+            <a:endParaRPr lang="en-US" sz="1300" dirty="0"/>
+          </a:p>
+        </p:txBody>
+      </p:sp>
+      <p:sp>
+        <p:nvSpPr>
+          <p:cNvPr id="9" name="Text 6"/>
+          <p:cNvSpPr/>
+          <p:nvPr/>
+        </p:nvSpPr>
+        <p:spPr>
+          <a:xfrm>
+            <a:off x="1051560" y="3950208"/>
+            <a:ext cx="365760" cy="548640"/>
+          </a:xfrm>
+          <a:prstGeom prst="rect">
+            <a:avLst/>
+          </a:prstGeom>
+          <a:noFill/>
+          <a:ln/>
+        </p:spPr>
+        <p:txBody>
+          <a:bodyPr wrap="square" lIns="0" tIns="0" rIns="0" bIns="0" rtlCol="0" anchor="ctr"/>
+          <a:lstStyle/>
+          <a:p>
+            <a:pPr algn="ctr" indent="0" marL="0">
+              <a:buNone/>
+            </a:pPr>
+            <a:r>
+              <a:rPr lang="en-US" sz="1500" b="1" dirty="0">
+                <a:solidFill>
+                  <a:srgbClr val="C0503A"/>
+                </a:solidFill>
+                <a:latin typeface="Arial" pitchFamily="34" charset="0"/>
+                <a:ea typeface="Arial" pitchFamily="34" charset="-122"/>
+                <a:cs typeface="Arial" pitchFamily="34" charset="-120"/>
+              </a:rPr>
+              <a:t>✕</a:t>
+            </a:r>
+            <a:endParaRPr lang="en-US" sz="1500" dirty="0"/>
+          </a:p>
+        </p:txBody>
+      </p:sp>
+      <p:sp>
+        <p:nvSpPr>
+          <p:cNvPr id="10" name="Text 7"/>
+          <p:cNvSpPr/>
+          <p:nvPr/>
+        </p:nvSpPr>
+        <p:spPr>
+          <a:xfrm>
+            <a:off x="1508760" y="3950208"/>
+            <a:ext cx="4114800" cy="594360"/>
+          </a:xfrm>
+          <a:prstGeom prst="rect">
+            <a:avLst/>
+          </a:prstGeom>
+          <a:noFill/>
+          <a:ln/>
+        </p:spPr>
+        <p:txBody>
+          <a:bodyPr wrap="square" lIns="0" tIns="0" rIns="0" bIns="0" rtlCol="0" anchor="ctr"/>
+          <a:lstStyle/>
+          <a:p>
+            <a:pPr indent="0" marL="0">
+              <a:lnSpc>
+                <a:spcPct val="110000"/>
+              </a:lnSpc>
+              <a:buNone/>
+            </a:pPr>
+            <a:r>
+              <a:rPr lang="en-US" sz="1300" dirty="0">
+                <a:solidFill>
+                  <a:srgbClr val="44505F"/>
+                </a:solidFill>
+                <a:latin typeface="Arial" pitchFamily="34" charset="0"/>
+                <a:ea typeface="Arial" pitchFamily="34" charset="-122"/>
+                <a:cs typeface="Arial" pitchFamily="34" charset="-120"/>
+              </a:rPr>
+              <a:t>The caller won't wait — they dial the next shop</a:t>
+            </a:r>
+            <a:endParaRPr lang="en-US" sz="1300" dirty="0"/>
+          </a:p>
+        </p:txBody>
+      </p:sp>
+      <p:sp>
+        <p:nvSpPr>
+          <p:cNvPr id="11" name="Text 8"/>
+          <p:cNvSpPr/>
+          <p:nvPr/>
+        </p:nvSpPr>
+        <p:spPr>
+          <a:xfrm>
+            <a:off x="1051560" y="4608576"/>
+            <a:ext cx="365760" cy="548640"/>
+          </a:xfrm>
+          <a:prstGeom prst="rect">
+            <a:avLst/>
+          </a:prstGeom>
+          <a:noFill/>
+          <a:ln/>
+        </p:spPr>
+        <p:txBody>
+          <a:bodyPr wrap="square" lIns="0" tIns="0" rIns="0" bIns="0" rtlCol="0" anchor="ctr"/>
+          <a:lstStyle/>
+          <a:p>
+            <a:pPr algn="ctr" indent="0" marL="0">
+              <a:buNone/>
+            </a:pPr>
+            <a:r>
+              <a:rPr lang="en-US" sz="1500" b="1" dirty="0">
+                <a:solidFill>
+                  <a:srgbClr val="C0503A"/>
+                </a:solidFill>
+                <a:latin typeface="Arial" pitchFamily="34" charset="0"/>
+                <a:ea typeface="Arial" pitchFamily="34" charset="-122"/>
+                <a:cs typeface="Arial" pitchFamily="34" charset="-120"/>
+              </a:rPr>
+              <a:t>✕</a:t>
+            </a:r>
+            <a:endParaRPr lang="en-US" sz="1500" dirty="0"/>
+          </a:p>
+        </p:txBody>
+      </p:sp>
+      <p:sp>
+        <p:nvSpPr>
+          <p:cNvPr id="12" name="Text 9"/>
+          <p:cNvSpPr/>
+          <p:nvPr/>
+        </p:nvSpPr>
+        <p:spPr>
+          <a:xfrm>
+            <a:off x="1508760" y="4608576"/>
+            <a:ext cx="4114800" cy="594360"/>
+          </a:xfrm>
+          <a:prstGeom prst="rect">
+            <a:avLst/>
+          </a:prstGeom>
+          <a:noFill/>
+          <a:ln/>
+        </p:spPr>
+        <p:txBody>
+          <a:bodyPr wrap="square" lIns="0" tIns="0" rIns="0" bIns="0" rtlCol="0" anchor="ctr"/>
+          <a:lstStyle/>
+          <a:p>
+            <a:pPr indent="0" marL="0">
+              <a:lnSpc>
+                <a:spcPct val="110000"/>
+              </a:lnSpc>
+              <a:buNone/>
+            </a:pPr>
+            <a:r>
+              <a:rPr lang="en-US" sz="1300" dirty="0">
+                <a:solidFill>
+                  <a:srgbClr val="44505F"/>
+                </a:solidFill>
+                <a:latin typeface="Arial" pitchFamily="34" charset="0"/>
+                <a:ea typeface="Arial" pitchFamily="34" charset="-122"/>
+                <a:cs typeface="Arial" pitchFamily="34" charset="-120"/>
+              </a:rPr>
+              <a:t>That job, and the customer, is gone for good</a:t>
+            </a:r>
+            <a:endParaRPr lang="en-US" sz="1300" dirty="0"/>
+          </a:p>
+        </p:txBody>
+      </p:sp>
+      <p:sp>
+        <p:nvSpPr>
+          <p:cNvPr id="13" name="Text 10"/>
+          <p:cNvSpPr/>
+          <p:nvPr/>
+        </p:nvSpPr>
+        <p:spPr>
+          <a:xfrm>
+            <a:off x="1051560" y="5266944"/>
+            <a:ext cx="365760" cy="548640"/>
+          </a:xfrm>
+          <a:prstGeom prst="rect">
+            <a:avLst/>
+          </a:prstGeom>
+          <a:noFill/>
+          <a:ln/>
+        </p:spPr>
+        <p:txBody>
+          <a:bodyPr wrap="square" lIns="0" tIns="0" rIns="0" bIns="0" rtlCol="0" anchor="ctr"/>
+          <a:lstStyle/>
+          <a:p>
+            <a:pPr algn="ctr" indent="0" marL="0">
+              <a:buNone/>
+            </a:pPr>
+            <a:r>
+              <a:rPr lang="en-US" sz="1500" b="1" dirty="0">
+                <a:solidFill>
+                  <a:srgbClr val="C0503A"/>
+                </a:solidFill>
+                <a:latin typeface="Arial" pitchFamily="34" charset="0"/>
+                <a:ea typeface="Arial" pitchFamily="34" charset="-122"/>
+                <a:cs typeface="Arial" pitchFamily="34" charset="-120"/>
+              </a:rPr>
+              <a:t>✕</a:t>
+            </a:r>
+            <a:endParaRPr lang="en-US" sz="1500" dirty="0"/>
+          </a:p>
+        </p:txBody>
+      </p:sp>
+      <p:sp>
+        <p:nvSpPr>
+          <p:cNvPr id="14" name="Text 11"/>
+          <p:cNvSpPr/>
+          <p:nvPr/>
+        </p:nvSpPr>
+        <p:spPr>
+          <a:xfrm>
+            <a:off x="1508760" y="5266944"/>
+            <a:ext cx="4114800" cy="594360"/>
+          </a:xfrm>
+          <a:prstGeom prst="rect">
+            <a:avLst/>
+          </a:prstGeom>
+          <a:noFill/>
+          <a:ln/>
+        </p:spPr>
+        <p:txBody>
+          <a:bodyPr wrap="square" lIns="0" tIns="0" rIns="0" bIns="0" rtlCol="0" anchor="ctr"/>
+          <a:lstStyle/>
+          <a:p>
+            <a:pPr indent="0" marL="0">
+              <a:lnSpc>
+                <a:spcPct val="110000"/>
+              </a:lnSpc>
+              <a:buNone/>
+            </a:pPr>
+            <a:r>
+              <a:rPr lang="en-US" sz="1300" dirty="0">
+                <a:solidFill>
+                  <a:srgbClr val="44505F"/>
+                </a:solidFill>
+                <a:latin typeface="Arial" pitchFamily="34" charset="0"/>
+                <a:ea typeface="Arial" pitchFamily="34" charset="-122"/>
+                <a:cs typeface="Arial" pitchFamily="34" charset="-120"/>
+              </a:rPr>
+              <a:t>An answering service just takes a message, and bills per call</a:t>
+            </a:r>
+            <a:endParaRPr lang="en-US" sz="1300" dirty="0"/>
+          </a:p>
+        </p:txBody>
+      </p:sp>
+      <p:sp>
+        <p:nvSpPr>
+          <p:cNvPr id="15" name="Shape 12"/>
+          <p:cNvSpPr/>
+          <p:nvPr/>
+        </p:nvSpPr>
+        <p:spPr>
+          <a:xfrm>
+            <a:off x="6263640" y="2331720"/>
+            <a:ext cx="5257800" cy="3886200"/>
+          </a:xfrm>
+          <a:prstGeom prst="roundRect">
+            <a:avLst>
+              <a:gd name="adj" fmla="val 3294"/>
+            </a:avLst>
+          </a:prstGeom>
+          <a:solidFill>
+            <a:srgbClr val="EEF3FE"/>
+          </a:solidFill>
+          <a:ln w="12700">
+            <a:solidFill>
+              <a:srgbClr val="CADCFC"/>
+            </a:solidFill>
+            <a:prstDash val="solid"/>
+          </a:ln>
+        </p:spPr>
+      </p:sp>
+      <p:sp>
+        <p:nvSpPr>
+          <p:cNvPr id="16" name="Text 13"/>
+          <p:cNvSpPr/>
+          <p:nvPr/>
+        </p:nvSpPr>
+        <p:spPr>
+          <a:xfrm>
+            <a:off x="6675120" y="2651760"/>
+            <a:ext cx="4572000" cy="457200"/>
+          </a:xfrm>
+          <a:prstGeom prst="rect">
+            <a:avLst/>
+          </a:prstGeom>
+          <a:noFill/>
+          <a:ln/>
+        </p:spPr>
+        <p:txBody>
+          <a:bodyPr wrap="square" lIns="0" tIns="0" rIns="0" bIns="0" rtlCol="0" anchor="ctr"/>
+          <a:lstStyle/>
+          <a:p>
+            <a:pPr indent="0" marL="0">
+              <a:buNone/>
+            </a:pPr>
+            <a:r>
+              <a:rPr lang="en-US" sz="1800" b="1" dirty="0">
+                <a:solidFill>
+                  <a:srgbClr val="1F51C4"/>
+                </a:solidFill>
+                <a:latin typeface="Arial" pitchFamily="34" charset="0"/>
+                <a:ea typeface="Arial" pitchFamily="34" charset="-122"/>
+                <a:cs typeface="Arial" pitchFamily="34" charset="-120"/>
+              </a:rPr>
+              <a:t>With Dispango</a:t>
+            </a:r>
+            <a:endParaRPr lang="en-US" sz="1800" dirty="0"/>
+          </a:p>
+        </p:txBody>
+      </p:sp>
+      <p:sp>
+        <p:nvSpPr>
+          <p:cNvPr id="17" name="Text 14"/>
+          <p:cNvSpPr/>
+          <p:nvPr/>
+        </p:nvSpPr>
+        <p:spPr>
+          <a:xfrm>
+            <a:off x="6675120" y="3291840"/>
+            <a:ext cx="365760" cy="548640"/>
+          </a:xfrm>
+          <a:prstGeom prst="rect">
+            <a:avLst/>
+          </a:prstGeom>
+          <a:noFill/>
+          <a:ln/>
+        </p:spPr>
+        <p:txBody>
+          <a:bodyPr wrap="square" lIns="0" tIns="0" rIns="0" bIns="0" rtlCol="0" anchor="ctr"/>
+          <a:lstStyle/>
+          <a:p>
+            <a:pPr algn="ctr" indent="0" marL="0">
+              <a:buNone/>
+            </a:pPr>
+            <a:r>
+              <a:rPr lang="en-US" sz="1500" b="1" dirty="0">
+                <a:solidFill>
+                  <a:srgbClr val="0FAE7A"/>
+                </a:solidFill>
+                <a:latin typeface="Arial" pitchFamily="34" charset="0"/>
+                <a:ea typeface="Arial" pitchFamily="34" charset="-122"/>
+                <a:cs typeface="Arial" pitchFamily="34" charset="-120"/>
+              </a:rPr>
+              <a:t>✓</a:t>
+            </a:r>
+            <a:endParaRPr lang="en-US" sz="1500" dirty="0"/>
+          </a:p>
+        </p:txBody>
+      </p:sp>
+      <p:sp>
+        <p:nvSpPr>
+          <p:cNvPr id="18" name="Text 15"/>
+          <p:cNvSpPr/>
+          <p:nvPr/>
+        </p:nvSpPr>
+        <p:spPr>
+          <a:xfrm>
+            <a:off x="7132320" y="3291840"/>
+            <a:ext cx="4114800" cy="594360"/>
+          </a:xfrm>
+          <a:prstGeom prst="rect">
+            <a:avLst/>
+          </a:prstGeom>
+          <a:noFill/>
+          <a:ln/>
+        </p:spPr>
+        <p:txBody>
+          <a:bodyPr wrap="square" lIns="0" tIns="0" rIns="0" bIns="0" rtlCol="0" anchor="ctr"/>
+          <a:lstStyle/>
+          <a:p>
+            <a:pPr indent="0" marL="0">
+              <a:lnSpc>
+                <a:spcPct val="110000"/>
+              </a:lnSpc>
+              <a:buNone/>
+            </a:pPr>
+            <a:r>
+              <a:rPr lang="en-US" sz="1300" dirty="0">
+                <a:solidFill>
+                  <a:srgbClr val="44505F"/>
+                </a:solidFill>
+                <a:latin typeface="Arial" pitchFamily="34" charset="0"/>
+                <a:ea typeface="Arial" pitchFamily="34" charset="-122"/>
+                <a:cs typeface="Arial" pitchFamily="34" charset="-120"/>
+              </a:rPr>
+              <a:t>Answered in your shop's name, 24/7</a:t>
+            </a:r>
+            <a:endParaRPr lang="en-US" sz="1300" dirty="0"/>
+          </a:p>
+        </p:txBody>
+      </p:sp>
+      <p:sp>
+        <p:nvSpPr>
+          <p:cNvPr id="19" name="Text 16"/>
+          <p:cNvSpPr/>
+          <p:nvPr/>
+        </p:nvSpPr>
+        <p:spPr>
+          <a:xfrm>
+            <a:off x="6675120" y="3950208"/>
+            <a:ext cx="365760" cy="548640"/>
+          </a:xfrm>
+          <a:prstGeom prst="rect">
+            <a:avLst/>
+          </a:prstGeom>
+          <a:noFill/>
+          <a:ln/>
+        </p:spPr>
+        <p:txBody>
+          <a:bodyPr wrap="square" lIns="0" tIns="0" rIns="0" bIns="0" rtlCol="0" anchor="ctr"/>
+          <a:lstStyle/>
+          <a:p>
+            <a:pPr algn="ctr" indent="0" marL="0">
+              <a:buNone/>
+            </a:pPr>
+            <a:r>
+              <a:rPr lang="en-US" sz="1500" b="1" dirty="0">
+                <a:solidFill>
+                  <a:srgbClr val="0FAE7A"/>
+                </a:solidFill>
+                <a:latin typeface="Arial" pitchFamily="34" charset="0"/>
+                <a:ea typeface="Arial" pitchFamily="34" charset="-122"/>
+                <a:cs typeface="Arial" pitchFamily="34" charset="-120"/>
+              </a:rPr>
+              <a:t>✓</a:t>
+            </a:r>
+            <a:endParaRPr lang="en-US" sz="1500" dirty="0"/>
+          </a:p>
+        </p:txBody>
+      </p:sp>
+      <p:sp>
+        <p:nvSpPr>
+          <p:cNvPr id="20" name="Text 17"/>
+          <p:cNvSpPr/>
+          <p:nvPr/>
+        </p:nvSpPr>
+        <p:spPr>
+          <a:xfrm>
+            <a:off x="7132320" y="3950208"/>
+            <a:ext cx="4114800" cy="594360"/>
+          </a:xfrm>
+          <a:prstGeom prst="rect">
+            <a:avLst/>
+          </a:prstGeom>
+          <a:noFill/>
+          <a:ln/>
+        </p:spPr>
+        <p:txBody>
+          <a:bodyPr wrap="square" lIns="0" tIns="0" rIns="0" bIns="0" rtlCol="0" anchor="ctr"/>
+          <a:lstStyle/>
+          <a:p>
+            <a:pPr indent="0" marL="0">
+              <a:lnSpc>
+                <a:spcPct val="110000"/>
+              </a:lnSpc>
+              <a:buNone/>
+            </a:pPr>
+            <a:r>
+              <a:rPr lang="en-US" sz="1300" dirty="0">
+                <a:solidFill>
+                  <a:srgbClr val="44505F"/>
+                </a:solidFill>
+                <a:latin typeface="Arial" pitchFamily="34" charset="0"/>
+                <a:ea typeface="Arial" pitchFamily="34" charset="-122"/>
+                <a:cs typeface="Arial" pitchFamily="34" charset="-120"/>
+              </a:rPr>
+              <a:t>The job is captured in a natural conversation</a:t>
+            </a:r>
+            <a:endParaRPr lang="en-US" sz="1300" dirty="0"/>
+          </a:p>
+        </p:txBody>
+      </p:sp>
+      <p:sp>
+        <p:nvSpPr>
+          <p:cNvPr id="21" name="Text 18"/>
+          <p:cNvSpPr/>
+          <p:nvPr/>
+        </p:nvSpPr>
+        <p:spPr>
+          <a:xfrm>
+            <a:off x="6675120" y="4608576"/>
+            <a:ext cx="365760" cy="548640"/>
+          </a:xfrm>
+          <a:prstGeom prst="rect">
+            <a:avLst/>
+          </a:prstGeom>
+          <a:noFill/>
+          <a:ln/>
+        </p:spPr>
+        <p:txBody>
+          <a:bodyPr wrap="square" lIns="0" tIns="0" rIns="0" bIns="0" rtlCol="0" anchor="ctr"/>
+          <a:lstStyle/>
+          <a:p>
+            <a:pPr algn="ctr" indent="0" marL="0">
+              <a:buNone/>
+            </a:pPr>
+            <a:r>
+              <a:rPr lang="en-US" sz="1500" b="1" dirty="0">
+                <a:solidFill>
+                  <a:srgbClr val="0FAE7A"/>
+                </a:solidFill>
+                <a:latin typeface="Arial" pitchFamily="34" charset="0"/>
+                <a:ea typeface="Arial" pitchFamily="34" charset="-122"/>
+                <a:cs typeface="Arial" pitchFamily="34" charset="-120"/>
+              </a:rPr>
+              <a:t>✓</a:t>
+            </a:r>
+            <a:endParaRPr lang="en-US" sz="1500" dirty="0"/>
+          </a:p>
+        </p:txBody>
+      </p:sp>
+      <p:sp>
+        <p:nvSpPr>
+          <p:cNvPr id="22" name="Text 19"/>
+          <p:cNvSpPr/>
+          <p:nvPr/>
+        </p:nvSpPr>
+        <p:spPr>
+          <a:xfrm>
+            <a:off x="7132320" y="4608576"/>
+            <a:ext cx="4114800" cy="594360"/>
+          </a:xfrm>
+          <a:prstGeom prst="rect">
+            <a:avLst/>
+          </a:prstGeom>
+          <a:noFill/>
+          <a:ln/>
+        </p:spPr>
+        <p:txBody>
+          <a:bodyPr wrap="square" lIns="0" tIns="0" rIns="0" bIns="0" rtlCol="0" anchor="ctr"/>
+          <a:lstStyle/>
+          <a:p>
+            <a:pPr indent="0" marL="0">
+              <a:lnSpc>
+                <a:spcPct val="110000"/>
+              </a:lnSpc>
+              <a:buNone/>
+            </a:pPr>
+            <a:r>
+              <a:rPr lang="en-US" sz="1300" dirty="0">
+                <a:solidFill>
+                  <a:srgbClr val="44505F"/>
+                </a:solidFill>
+                <a:latin typeface="Arial" pitchFamily="34" charset="0"/>
+                <a:ea typeface="Arial" pitchFamily="34" charset="-122"/>
+                <a:cs typeface="Arial" pitchFamily="34" charset="-120"/>
+              </a:rPr>
+              <a:t>The full lead is texted to you in seconds</a:t>
+            </a:r>
+            <a:endParaRPr lang="en-US" sz="1300" dirty="0"/>
+          </a:p>
+        </p:txBody>
+      </p:sp>
+      <p:sp>
+        <p:nvSpPr>
+          <p:cNvPr id="23" name="Text 20"/>
+          <p:cNvSpPr/>
+          <p:nvPr/>
+        </p:nvSpPr>
+        <p:spPr>
+          <a:xfrm>
+            <a:off x="6675120" y="5266944"/>
+            <a:ext cx="365760" cy="548640"/>
+          </a:xfrm>
+          <a:prstGeom prst="rect">
+            <a:avLst/>
+          </a:prstGeom>
+          <a:noFill/>
+          <a:ln/>
+        </p:spPr>
+        <p:txBody>
+          <a:bodyPr wrap="square" lIns="0" tIns="0" rIns="0" bIns="0" rtlCol="0" anchor="ctr"/>
+          <a:lstStyle/>
+          <a:p>
+            <a:pPr algn="ctr" indent="0" marL="0">
+              <a:buNone/>
+            </a:pPr>
+            <a:r>
+              <a:rPr lang="en-US" sz="1500" b="1" dirty="0">
+                <a:solidFill>
+                  <a:srgbClr val="0FAE7A"/>
+                </a:solidFill>
+                <a:latin typeface="Arial" pitchFamily="34" charset="0"/>
+                <a:ea typeface="Arial" pitchFamily="34" charset="-122"/>
+                <a:cs typeface="Arial" pitchFamily="34" charset="-120"/>
+              </a:rPr>
+              <a:t>✓</a:t>
+            </a:r>
+            <a:endParaRPr lang="en-US" sz="1500" dirty="0"/>
+          </a:p>
+        </p:txBody>
+      </p:sp>
+      <p:sp>
+        <p:nvSpPr>
+          <p:cNvPr id="24" name="Text 21"/>
+          <p:cNvSpPr/>
+          <p:nvPr/>
+        </p:nvSpPr>
+        <p:spPr>
+          <a:xfrm>
+            <a:off x="7132320" y="5266944"/>
+            <a:ext cx="4114800" cy="594360"/>
+          </a:xfrm>
+          <a:prstGeom prst="rect">
+            <a:avLst/>
+          </a:prstGeom>
+          <a:noFill/>
+          <a:ln/>
+        </p:spPr>
+        <p:txBody>
+          <a:bodyPr wrap="square" lIns="0" tIns="0" rIns="0" bIns="0" rtlCol="0" anchor="ctr"/>
+          <a:lstStyle/>
+          <a:p>
+            <a:pPr indent="0" marL="0">
+              <a:lnSpc>
+                <a:spcPct val="110000"/>
+              </a:lnSpc>
+              <a:buNone/>
+            </a:pPr>
+            <a:r>
+              <a:rPr lang="en-US" sz="1300" dirty="0">
+                <a:solidFill>
+                  <a:srgbClr val="44505F"/>
+                </a:solidFill>
+                <a:latin typeface="Arial" pitchFamily="34" charset="0"/>
+                <a:ea typeface="Arial" pitchFamily="34" charset="-122"/>
+                <a:cs typeface="Arial" pitchFamily="34" charset="-120"/>
+              </a:rPr>
+              <a:t>You call back a warm lead — and win it</a:t>
+            </a:r>
+            <a:endParaRPr lang="en-US" sz="1300" dirty="0"/>
+          </a:p>
+        </p:txBody>
+      </p:sp>
+    </p:spTree>
+  </p:cSld>
+  <p:clrMapOvr>
+    <a:masterClrMapping/>
+  </p:clrMapOvr>
+</p:sld>
+</file>
+
+<file path=ppt/slides/slide4.xml><?xml version="1.0" encoding="utf-8"?>
+<p:sld xmlns:a="http://schemas.openxmlformats.org/drawingml/2006/main" xmlns:r="http://schemas.openxmlformats.org/officeDocument/2006/relationships" xmlns:p="http://schemas.openxmlformats.org/presentationml/2006/main">
+  <p:cSld name="Slide 4">
     <p:bg>
       <p:bgPr>
         <a:solidFill>
@@ -2789,9 +5196,9 @@
 </p:sld>
 </file>
 
-<file path=ppt/slides/slide4.xml><?xml version="1.0" encoding="utf-8"?>
+<file path=ppt/slides/slide5.xml><?xml version="1.0" encoding="utf-8"?>
 <p:sld xmlns:a="http://schemas.openxmlformats.org/drawingml/2006/main" xmlns:r="http://schemas.openxmlformats.org/officeDocument/2006/relationships" xmlns:p="http://schemas.openxmlformats.org/presentationml/2006/main">
-  <p:cSld name="Slide 4">
+  <p:cSld name="Slide 5">
     <p:bg>
       <p:bgPr>
         <a:solidFill>
@@ -3715,9 +6122,9 @@
 </p:sld>
 </file>
 
-<file path=ppt/slides/slide5.xml><?xml version="1.0" encoding="utf-8"?>
+<file path=ppt/slides/slide6.xml><?xml version="1.0" encoding="utf-8"?>
 <p:sld xmlns:a="http://schemas.openxmlformats.org/drawingml/2006/main" xmlns:r="http://schemas.openxmlformats.org/officeDocument/2006/relationships" xmlns:p="http://schemas.openxmlformats.org/presentationml/2006/main">
-  <p:cSld name="Slide 5">
+  <p:cSld name="Slide 6">
     <p:bg>
       <p:bgPr>
         <a:solidFill>
@@ -4506,1082 +6913,6 @@
               <a:t>Notes: keys locked in running car, toddler inside.</a:t>
             </a:r>
             <a:endParaRPr lang="en-US" sz="1100" dirty="0"/>
-          </a:p>
-        </p:txBody>
-      </p:sp>
-    </p:spTree>
-  </p:cSld>
-  <p:clrMapOvr>
-    <a:masterClrMapping/>
-  </p:clrMapOvr>
-</p:sld>
-</file>
-
-<file path=ppt/slides/slide6.xml><?xml version="1.0" encoding="utf-8"?>
-<p:sld xmlns:a="http://schemas.openxmlformats.org/drawingml/2006/main" xmlns:r="http://schemas.openxmlformats.org/officeDocument/2006/relationships" xmlns:p="http://schemas.openxmlformats.org/presentationml/2006/main">
-  <p:cSld name="Slide 6">
-    <p:bg>
-      <p:bgPr>
-        <a:solidFill>
-          <a:srgbClr val="FFFFFF"/>
-        </a:solidFill>
-      </p:bgPr>
-    </p:bg>
-    <p:spTree>
-      <p:nvGrpSpPr>
-        <p:cNvPr id="1" name=""/>
-        <p:cNvGrpSpPr/>
-        <p:nvPr/>
-      </p:nvGrpSpPr>
-      <p:grpSpPr>
-        <a:xfrm>
-          <a:off x="0" y="0"/>
-          <a:ext cx="0" cy="0"/>
-          <a:chOff x="0" y="0"/>
-          <a:chExt cx="0" cy="0"/>
-        </a:xfrm>
-      </p:grpSpPr>
-      <p:pic>
-        <p:nvPicPr>
-          <p:cNvPr id="2" name="Image 0" descr="preencoded.png">    </p:cNvPr>
-          <p:cNvPicPr>
-            <a:picLocks noChangeAspect="1"/>
-          </p:cNvPicPr>
-          <p:nvPr/>
-        </p:nvPicPr>
-        <p:blipFill>
-          <a:blip r:embed="rId1"/>
-          <a:stretch>
-            <a:fillRect/>
-          </a:stretch>
-        </p:blipFill>
-        <p:spPr>
-          <a:xfrm>
-            <a:off x="640080" y="384048"/>
-            <a:ext cx="365760" cy="365760"/>
-          </a:xfrm>
-          <a:prstGeom prst="rect">
-            <a:avLst/>
-          </a:prstGeom>
-        </p:spPr>
-      </p:pic>
-      <p:sp>
-        <p:nvSpPr>
-          <p:cNvPr id="3" name="Text 0"/>
-          <p:cNvSpPr/>
-          <p:nvPr/>
-        </p:nvSpPr>
-        <p:spPr>
-          <a:xfrm>
-            <a:off x="1097280" y="365760"/>
-            <a:ext cx="2743200" cy="402336"/>
-          </a:xfrm>
-          <a:prstGeom prst="rect">
-            <a:avLst/>
-          </a:prstGeom>
-          <a:noFill/>
-          <a:ln/>
-        </p:spPr>
-        <p:txBody>
-          <a:bodyPr wrap="square" lIns="0" tIns="0" rIns="0" bIns="0" rtlCol="0" anchor="ctr"/>
-          <a:lstStyle/>
-          <a:p>
-            <a:pPr indent="0" marL="0">
-              <a:buNone/>
-            </a:pPr>
-            <a:r>
-              <a:rPr lang="en-US" sz="1500" b="1" dirty="0">
-                <a:solidFill>
-                  <a:srgbClr val="0C1726"/>
-                </a:solidFill>
-                <a:latin typeface="Arial" pitchFamily="34" charset="0"/>
-                <a:ea typeface="Arial" pitchFamily="34" charset="-122"/>
-                <a:cs typeface="Arial" pitchFamily="34" charset="-120"/>
-              </a:rPr>
-              <a:t>Dispango</a:t>
-            </a:r>
-            <a:endParaRPr lang="en-US" sz="1500" dirty="0"/>
-          </a:p>
-        </p:txBody>
-      </p:sp>
-      <p:sp>
-        <p:nvSpPr>
-          <p:cNvPr id="4" name="Text 1"/>
-          <p:cNvSpPr/>
-          <p:nvPr/>
-        </p:nvSpPr>
-        <p:spPr>
-          <a:xfrm>
-            <a:off x="640080" y="1051560"/>
-            <a:ext cx="10911535" cy="914400"/>
-          </a:xfrm>
-          <a:prstGeom prst="rect">
-            <a:avLst/>
-          </a:prstGeom>
-          <a:noFill/>
-          <a:ln/>
-        </p:spPr>
-        <p:txBody>
-          <a:bodyPr wrap="square" lIns="0" tIns="0" rIns="0" bIns="0" rtlCol="0" anchor="ctr"/>
-          <a:lstStyle/>
-          <a:p>
-            <a:pPr indent="0" marL="0">
-              <a:buNone/>
-            </a:pPr>
-            <a:r>
-              <a:rPr lang="en-US" sz="3400" b="1" dirty="0">
-                <a:solidFill>
-                  <a:srgbClr val="0C1726"/>
-                </a:solidFill>
-                <a:latin typeface="Arial" pitchFamily="34" charset="0"/>
-                <a:ea typeface="Arial" pitchFamily="34" charset="-122"/>
-                <a:cs typeface="Arial" pitchFamily="34" charset="-120"/>
-              </a:rPr>
-              <a:t>Why locksmiths choose Dispango</a:t>
-            </a:r>
-            <a:endParaRPr lang="en-US" sz="3400" dirty="0"/>
-          </a:p>
-        </p:txBody>
-      </p:sp>
-      <p:sp>
-        <p:nvSpPr>
-          <p:cNvPr id="5" name="Shape 2"/>
-          <p:cNvSpPr/>
-          <p:nvPr/>
-        </p:nvSpPr>
-        <p:spPr>
-          <a:xfrm>
-            <a:off x="640080" y="2331720"/>
-            <a:ext cx="3474720" cy="1600200"/>
-          </a:xfrm>
-          <a:prstGeom prst="roundRect">
-            <a:avLst>
-              <a:gd name="adj" fmla="val 5714"/>
-            </a:avLst>
-          </a:prstGeom>
-          <a:solidFill>
-            <a:srgbClr val="F4F8FD"/>
-          </a:solidFill>
-          <a:ln w="12700">
-            <a:solidFill>
-              <a:srgbClr val="E7EDF6"/>
-            </a:solidFill>
-            <a:prstDash val="solid"/>
-          </a:ln>
-        </p:spPr>
-      </p:sp>
-      <p:sp>
-        <p:nvSpPr>
-          <p:cNvPr id="6" name="Shape 3"/>
-          <p:cNvSpPr/>
-          <p:nvPr/>
-        </p:nvSpPr>
-        <p:spPr>
-          <a:xfrm>
-            <a:off x="896112" y="2624328"/>
-            <a:ext cx="621792" cy="621792"/>
-          </a:xfrm>
-          <a:prstGeom prst="ellipse">
-            <a:avLst/>
-          </a:prstGeom>
-          <a:solidFill>
-            <a:srgbClr val="FFFFFF"/>
-          </a:solidFill>
-          <a:ln w="12700">
-            <a:solidFill>
-              <a:srgbClr val="E7EDF6"/>
-            </a:solidFill>
-            <a:prstDash val="solid"/>
-          </a:ln>
-        </p:spPr>
-      </p:sp>
-      <p:pic>
-        <p:nvPicPr>
-          <p:cNvPr id="7" name="Image 1" descr="preencoded.png">    </p:cNvPr>
-          <p:cNvPicPr>
-            <a:picLocks noChangeAspect="1"/>
-          </p:cNvPicPr>
-          <p:nvPr/>
-        </p:nvPicPr>
-        <p:blipFill>
-          <a:blip r:embed="rId2"/>
-          <a:stretch>
-            <a:fillRect/>
-          </a:stretch>
-        </p:blipFill>
-        <p:spPr>
-          <a:xfrm>
-            <a:off x="1042416" y="2770632"/>
-            <a:ext cx="329184" cy="329184"/>
-          </a:xfrm>
-          <a:prstGeom prst="rect">
-            <a:avLst/>
-          </a:prstGeom>
-        </p:spPr>
-      </p:pic>
-      <p:sp>
-        <p:nvSpPr>
-          <p:cNvPr id="8" name="Text 4"/>
-          <p:cNvSpPr/>
-          <p:nvPr/>
-        </p:nvSpPr>
-        <p:spPr>
-          <a:xfrm>
-            <a:off x="1691640" y="2587752"/>
-            <a:ext cx="2286000" cy="365760"/>
-          </a:xfrm>
-          <a:prstGeom prst="rect">
-            <a:avLst/>
-          </a:prstGeom>
-          <a:noFill/>
-          <a:ln/>
-        </p:spPr>
-        <p:txBody>
-          <a:bodyPr wrap="square" lIns="0" tIns="0" rIns="0" bIns="0" rtlCol="0" anchor="ctr"/>
-          <a:lstStyle/>
-          <a:p>
-            <a:pPr indent="0" marL="0">
-              <a:buNone/>
-            </a:pPr>
-            <a:r>
-              <a:rPr lang="en-US" sz="1500" b="1" dirty="0">
-                <a:solidFill>
-                  <a:srgbClr val="0C1726"/>
-                </a:solidFill>
-                <a:latin typeface="Arial" pitchFamily="34" charset="0"/>
-                <a:ea typeface="Arial" pitchFamily="34" charset="-122"/>
-                <a:cs typeface="Arial" pitchFamily="34" charset="-120"/>
-              </a:rPr>
-              <a:t>Catch every lead</a:t>
-            </a:r>
-            <a:endParaRPr lang="en-US" sz="1500" dirty="0"/>
-          </a:p>
-        </p:txBody>
-      </p:sp>
-      <p:sp>
-        <p:nvSpPr>
-          <p:cNvPr id="9" name="Text 5"/>
-          <p:cNvSpPr/>
-          <p:nvPr/>
-        </p:nvSpPr>
-        <p:spPr>
-          <a:xfrm>
-            <a:off x="1691640" y="2971800"/>
-            <a:ext cx="2286000" cy="822960"/>
-          </a:xfrm>
-          <a:prstGeom prst="rect">
-            <a:avLst/>
-          </a:prstGeom>
-          <a:noFill/>
-          <a:ln/>
-        </p:spPr>
-        <p:txBody>
-          <a:bodyPr wrap="square" lIns="0" tIns="0" rIns="0" bIns="0" rtlCol="0" anchor="ctr"/>
-          <a:lstStyle/>
-          <a:p>
-            <a:pPr indent="0" marL="0">
-              <a:lnSpc>
-                <a:spcPct val="115000"/>
-              </a:lnSpc>
-              <a:buNone/>
-            </a:pPr>
-            <a:r>
-              <a:rPr lang="en-US" sz="1150" dirty="0">
-                <a:solidFill>
-                  <a:srgbClr val="44505F"/>
-                </a:solidFill>
-                <a:latin typeface="Arial" pitchFamily="34" charset="0"/>
-                <a:ea typeface="Arial" pitchFamily="34" charset="-122"/>
-                <a:cs typeface="Arial" pitchFamily="34" charset="-120"/>
-              </a:rPr>
-              <a:t>Answer at 2am, on a job, or while driving — without picking up.</a:t>
-            </a:r>
-            <a:endParaRPr lang="en-US" sz="1150" dirty="0"/>
-          </a:p>
-        </p:txBody>
-      </p:sp>
-      <p:sp>
-        <p:nvSpPr>
-          <p:cNvPr id="10" name="Shape 6"/>
-          <p:cNvSpPr/>
-          <p:nvPr/>
-        </p:nvSpPr>
-        <p:spPr>
-          <a:xfrm>
-            <a:off x="4343400" y="2331720"/>
-            <a:ext cx="3474720" cy="1600200"/>
-          </a:xfrm>
-          <a:prstGeom prst="roundRect">
-            <a:avLst>
-              <a:gd name="adj" fmla="val 5714"/>
-            </a:avLst>
-          </a:prstGeom>
-          <a:solidFill>
-            <a:srgbClr val="F4F8FD"/>
-          </a:solidFill>
-          <a:ln w="12700">
-            <a:solidFill>
-              <a:srgbClr val="E7EDF6"/>
-            </a:solidFill>
-            <a:prstDash val="solid"/>
-          </a:ln>
-        </p:spPr>
-      </p:sp>
-      <p:sp>
-        <p:nvSpPr>
-          <p:cNvPr id="11" name="Shape 7"/>
-          <p:cNvSpPr/>
-          <p:nvPr/>
-        </p:nvSpPr>
-        <p:spPr>
-          <a:xfrm>
-            <a:off x="4599432" y="2624328"/>
-            <a:ext cx="621792" cy="621792"/>
-          </a:xfrm>
-          <a:prstGeom prst="ellipse">
-            <a:avLst/>
-          </a:prstGeom>
-          <a:solidFill>
-            <a:srgbClr val="FFFFFF"/>
-          </a:solidFill>
-          <a:ln w="12700">
-            <a:solidFill>
-              <a:srgbClr val="E7EDF6"/>
-            </a:solidFill>
-            <a:prstDash val="solid"/>
-          </a:ln>
-        </p:spPr>
-      </p:sp>
-      <p:pic>
-        <p:nvPicPr>
-          <p:cNvPr id="12" name="Image 2" descr="preencoded.png">    </p:cNvPr>
-          <p:cNvPicPr>
-            <a:picLocks noChangeAspect="1"/>
-          </p:cNvPicPr>
-          <p:nvPr/>
-        </p:nvPicPr>
-        <p:blipFill>
-          <a:blip r:embed="rId3"/>
-          <a:stretch>
-            <a:fillRect/>
-          </a:stretch>
-        </p:blipFill>
-        <p:spPr>
-          <a:xfrm>
-            <a:off x="4745736" y="2770632"/>
-            <a:ext cx="329184" cy="329184"/>
-          </a:xfrm>
-          <a:prstGeom prst="rect">
-            <a:avLst/>
-          </a:prstGeom>
-        </p:spPr>
-      </p:pic>
-      <p:sp>
-        <p:nvSpPr>
-          <p:cNvPr id="13" name="Text 8"/>
-          <p:cNvSpPr/>
-          <p:nvPr/>
-        </p:nvSpPr>
-        <p:spPr>
-          <a:xfrm>
-            <a:off x="5394960" y="2587752"/>
-            <a:ext cx="2286000" cy="365760"/>
-          </a:xfrm>
-          <a:prstGeom prst="rect">
-            <a:avLst/>
-          </a:prstGeom>
-          <a:noFill/>
-          <a:ln/>
-        </p:spPr>
-        <p:txBody>
-          <a:bodyPr wrap="square" lIns="0" tIns="0" rIns="0" bIns="0" rtlCol="0" anchor="ctr"/>
-          <a:lstStyle/>
-          <a:p>
-            <a:pPr indent="0" marL="0">
-              <a:buNone/>
-            </a:pPr>
-            <a:r>
-              <a:rPr lang="en-US" sz="1500" b="1" dirty="0">
-                <a:solidFill>
-                  <a:srgbClr val="0C1726"/>
-                </a:solidFill>
-                <a:latin typeface="Arial" pitchFamily="34" charset="0"/>
-                <a:ea typeface="Arial" pitchFamily="34" charset="-122"/>
-                <a:cs typeface="Arial" pitchFamily="34" charset="-120"/>
-              </a:rPr>
-              <a:t>Keeps your number</a:t>
-            </a:r>
-            <a:endParaRPr lang="en-US" sz="1500" dirty="0"/>
-          </a:p>
-        </p:txBody>
-      </p:sp>
-      <p:sp>
-        <p:nvSpPr>
-          <p:cNvPr id="14" name="Text 9"/>
-          <p:cNvSpPr/>
-          <p:nvPr/>
-        </p:nvSpPr>
-        <p:spPr>
-          <a:xfrm>
-            <a:off x="5394960" y="2971800"/>
-            <a:ext cx="2286000" cy="822960"/>
-          </a:xfrm>
-          <a:prstGeom prst="rect">
-            <a:avLst/>
-          </a:prstGeom>
-          <a:noFill/>
-          <a:ln/>
-        </p:spPr>
-        <p:txBody>
-          <a:bodyPr wrap="square" lIns="0" tIns="0" rIns="0" bIns="0" rtlCol="0" anchor="ctr"/>
-          <a:lstStyle/>
-          <a:p>
-            <a:pPr indent="0" marL="0">
-              <a:lnSpc>
-                <a:spcPct val="115000"/>
-              </a:lnSpc>
-              <a:buNone/>
-            </a:pPr>
-            <a:r>
-              <a:rPr lang="en-US" sz="1150" dirty="0">
-                <a:solidFill>
-                  <a:srgbClr val="44505F"/>
-                </a:solidFill>
-                <a:latin typeface="Arial" pitchFamily="34" charset="0"/>
-                <a:ea typeface="Arial" pitchFamily="34" charset="-122"/>
-                <a:cs typeface="Arial" pitchFamily="34" charset="-120"/>
-              </a:rPr>
-              <a:t>Works with the number already on your truck and your ads.</a:t>
-            </a:r>
-            <a:endParaRPr lang="en-US" sz="1150" dirty="0"/>
-          </a:p>
-        </p:txBody>
-      </p:sp>
-      <p:sp>
-        <p:nvSpPr>
-          <p:cNvPr id="15" name="Shape 10"/>
-          <p:cNvSpPr/>
-          <p:nvPr/>
-        </p:nvSpPr>
-        <p:spPr>
-          <a:xfrm>
-            <a:off x="8046720" y="2331720"/>
-            <a:ext cx="3474720" cy="1600200"/>
-          </a:xfrm>
-          <a:prstGeom prst="roundRect">
-            <a:avLst>
-              <a:gd name="adj" fmla="val 5714"/>
-            </a:avLst>
-          </a:prstGeom>
-          <a:solidFill>
-            <a:srgbClr val="F4F8FD"/>
-          </a:solidFill>
-          <a:ln w="12700">
-            <a:solidFill>
-              <a:srgbClr val="E7EDF6"/>
-            </a:solidFill>
-            <a:prstDash val="solid"/>
-          </a:ln>
-        </p:spPr>
-      </p:sp>
-      <p:sp>
-        <p:nvSpPr>
-          <p:cNvPr id="16" name="Shape 11"/>
-          <p:cNvSpPr/>
-          <p:nvPr/>
-        </p:nvSpPr>
-        <p:spPr>
-          <a:xfrm>
-            <a:off x="8302752" y="2624328"/>
-            <a:ext cx="621792" cy="621792"/>
-          </a:xfrm>
-          <a:prstGeom prst="ellipse">
-            <a:avLst/>
-          </a:prstGeom>
-          <a:solidFill>
-            <a:srgbClr val="FFFFFF"/>
-          </a:solidFill>
-          <a:ln w="12700">
-            <a:solidFill>
-              <a:srgbClr val="E7EDF6"/>
-            </a:solidFill>
-            <a:prstDash val="solid"/>
-          </a:ln>
-        </p:spPr>
-      </p:sp>
-      <p:pic>
-        <p:nvPicPr>
-          <p:cNvPr id="17" name="Image 3" descr="preencoded.png">    </p:cNvPr>
-          <p:cNvPicPr>
-            <a:picLocks noChangeAspect="1"/>
-          </p:cNvPicPr>
-          <p:nvPr/>
-        </p:nvPicPr>
-        <p:blipFill>
-          <a:blip r:embed="rId4"/>
-          <a:stretch>
-            <a:fillRect/>
-          </a:stretch>
-        </p:blipFill>
-        <p:spPr>
-          <a:xfrm>
-            <a:off x="8449056" y="2770632"/>
-            <a:ext cx="329184" cy="329184"/>
-          </a:xfrm>
-          <a:prstGeom prst="rect">
-            <a:avLst/>
-          </a:prstGeom>
-        </p:spPr>
-      </p:pic>
-      <p:sp>
-        <p:nvSpPr>
-          <p:cNvPr id="18" name="Text 12"/>
-          <p:cNvSpPr/>
-          <p:nvPr/>
-        </p:nvSpPr>
-        <p:spPr>
-          <a:xfrm>
-            <a:off x="9098280" y="2587752"/>
-            <a:ext cx="2286000" cy="365760"/>
-          </a:xfrm>
-          <a:prstGeom prst="rect">
-            <a:avLst/>
-          </a:prstGeom>
-          <a:noFill/>
-          <a:ln/>
-        </p:spPr>
-        <p:txBody>
-          <a:bodyPr wrap="square" lIns="0" tIns="0" rIns="0" bIns="0" rtlCol="0" anchor="ctr"/>
-          <a:lstStyle/>
-          <a:p>
-            <a:pPr indent="0" marL="0">
-              <a:buNone/>
-            </a:pPr>
-            <a:r>
-              <a:rPr lang="en-US" sz="1500" b="1" dirty="0">
-                <a:solidFill>
-                  <a:srgbClr val="0C1726"/>
-                </a:solidFill>
-                <a:latin typeface="Arial" pitchFamily="34" charset="0"/>
-                <a:ea typeface="Arial" pitchFamily="34" charset="-122"/>
-                <a:cs typeface="Arial" pitchFamily="34" charset="-120"/>
-              </a:rPr>
-              <a:t>Sounds human</a:t>
-            </a:r>
-            <a:endParaRPr lang="en-US" sz="1500" dirty="0"/>
-          </a:p>
-        </p:txBody>
-      </p:sp>
-      <p:sp>
-        <p:nvSpPr>
-          <p:cNvPr id="19" name="Text 13"/>
-          <p:cNvSpPr/>
-          <p:nvPr/>
-        </p:nvSpPr>
-        <p:spPr>
-          <a:xfrm>
-            <a:off x="9098280" y="2971800"/>
-            <a:ext cx="2286000" cy="822960"/>
-          </a:xfrm>
-          <a:prstGeom prst="rect">
-            <a:avLst/>
-          </a:prstGeom>
-          <a:noFill/>
-          <a:ln/>
-        </p:spPr>
-        <p:txBody>
-          <a:bodyPr wrap="square" lIns="0" tIns="0" rIns="0" bIns="0" rtlCol="0" anchor="ctr"/>
-          <a:lstStyle/>
-          <a:p>
-            <a:pPr indent="0" marL="0">
-              <a:lnSpc>
-                <a:spcPct val="115000"/>
-              </a:lnSpc>
-              <a:buNone/>
-            </a:pPr>
-            <a:r>
-              <a:rPr lang="en-US" sz="1150" dirty="0">
-                <a:solidFill>
-                  <a:srgbClr val="44505F"/>
-                </a:solidFill>
-                <a:latin typeface="Arial" pitchFamily="34" charset="0"/>
-                <a:ea typeface="Arial" pitchFamily="34" charset="-122"/>
-                <a:cs typeface="Arial" pitchFamily="34" charset="-120"/>
-              </a:rPr>
-              <a:t>A natural voice that asks the right questions, not a robot.</a:t>
-            </a:r>
-            <a:endParaRPr lang="en-US" sz="1150" dirty="0"/>
-          </a:p>
-        </p:txBody>
-      </p:sp>
-      <p:sp>
-        <p:nvSpPr>
-          <p:cNvPr id="20" name="Shape 14"/>
-          <p:cNvSpPr/>
-          <p:nvPr/>
-        </p:nvSpPr>
-        <p:spPr>
-          <a:xfrm>
-            <a:off x="640080" y="4114800"/>
-            <a:ext cx="3474720" cy="1600200"/>
-          </a:xfrm>
-          <a:prstGeom prst="roundRect">
-            <a:avLst>
-              <a:gd name="adj" fmla="val 5714"/>
-            </a:avLst>
-          </a:prstGeom>
-          <a:solidFill>
-            <a:srgbClr val="F4F8FD"/>
-          </a:solidFill>
-          <a:ln w="12700">
-            <a:solidFill>
-              <a:srgbClr val="E7EDF6"/>
-            </a:solidFill>
-            <a:prstDash val="solid"/>
-          </a:ln>
-        </p:spPr>
-      </p:sp>
-      <p:sp>
-        <p:nvSpPr>
-          <p:cNvPr id="21" name="Shape 15"/>
-          <p:cNvSpPr/>
-          <p:nvPr/>
-        </p:nvSpPr>
-        <p:spPr>
-          <a:xfrm>
-            <a:off x="896112" y="4407408"/>
-            <a:ext cx="621792" cy="621792"/>
-          </a:xfrm>
-          <a:prstGeom prst="ellipse">
-            <a:avLst/>
-          </a:prstGeom>
-          <a:solidFill>
-            <a:srgbClr val="FFFFFF"/>
-          </a:solidFill>
-          <a:ln w="12700">
-            <a:solidFill>
-              <a:srgbClr val="E7EDF6"/>
-            </a:solidFill>
-            <a:prstDash val="solid"/>
-          </a:ln>
-        </p:spPr>
-      </p:sp>
-      <p:pic>
-        <p:nvPicPr>
-          <p:cNvPr id="22" name="Image 4" descr="preencoded.png">    </p:cNvPr>
-          <p:cNvPicPr>
-            <a:picLocks noChangeAspect="1"/>
-          </p:cNvPicPr>
-          <p:nvPr/>
-        </p:nvPicPr>
-        <p:blipFill>
-          <a:blip r:embed="rId5"/>
-          <a:stretch>
-            <a:fillRect/>
-          </a:stretch>
-        </p:blipFill>
-        <p:spPr>
-          <a:xfrm>
-            <a:off x="1042416" y="4553712"/>
-            <a:ext cx="329184" cy="329184"/>
-          </a:xfrm>
-          <a:prstGeom prst="rect">
-            <a:avLst/>
-          </a:prstGeom>
-        </p:spPr>
-      </p:pic>
-      <p:sp>
-        <p:nvSpPr>
-          <p:cNvPr id="23" name="Text 16"/>
-          <p:cNvSpPr/>
-          <p:nvPr/>
-        </p:nvSpPr>
-        <p:spPr>
-          <a:xfrm>
-            <a:off x="1691640" y="4370832"/>
-            <a:ext cx="2286000" cy="365760"/>
-          </a:xfrm>
-          <a:prstGeom prst="rect">
-            <a:avLst/>
-          </a:prstGeom>
-          <a:noFill/>
-          <a:ln/>
-        </p:spPr>
-        <p:txBody>
-          <a:bodyPr wrap="square" lIns="0" tIns="0" rIns="0" bIns="0" rtlCol="0" anchor="ctr"/>
-          <a:lstStyle/>
-          <a:p>
-            <a:pPr indent="0" marL="0">
-              <a:buNone/>
-            </a:pPr>
-            <a:r>
-              <a:rPr lang="en-US" sz="1500" b="1" dirty="0">
-                <a:solidFill>
-                  <a:srgbClr val="0C1726"/>
-                </a:solidFill>
-                <a:latin typeface="Arial" pitchFamily="34" charset="0"/>
-                <a:ea typeface="Arial" pitchFamily="34" charset="-122"/>
-                <a:cs typeface="Arial" pitchFamily="34" charset="-120"/>
-              </a:rPr>
-              <a:t>Filters the junk</a:t>
-            </a:r>
-            <a:endParaRPr lang="en-US" sz="1500" dirty="0"/>
-          </a:p>
-        </p:txBody>
-      </p:sp>
-      <p:sp>
-        <p:nvSpPr>
-          <p:cNvPr id="24" name="Text 17"/>
-          <p:cNvSpPr/>
-          <p:nvPr/>
-        </p:nvSpPr>
-        <p:spPr>
-          <a:xfrm>
-            <a:off x="1691640" y="4754880"/>
-            <a:ext cx="2286000" cy="822960"/>
-          </a:xfrm>
-          <a:prstGeom prst="rect">
-            <a:avLst/>
-          </a:prstGeom>
-          <a:noFill/>
-          <a:ln/>
-        </p:spPr>
-        <p:txBody>
-          <a:bodyPr wrap="square" lIns="0" tIns="0" rIns="0" bIns="0" rtlCol="0" anchor="ctr"/>
-          <a:lstStyle/>
-          <a:p>
-            <a:pPr indent="0" marL="0">
-              <a:lnSpc>
-                <a:spcPct val="115000"/>
-              </a:lnSpc>
-              <a:buNone/>
-            </a:pPr>
-            <a:r>
-              <a:rPr lang="en-US" sz="1150" dirty="0">
-                <a:solidFill>
-                  <a:srgbClr val="44505F"/>
-                </a:solidFill>
-                <a:latin typeface="Arial" pitchFamily="34" charset="0"/>
-                <a:ea typeface="Arial" pitchFamily="34" charset="-122"/>
-                <a:cs typeface="Arial" pitchFamily="34" charset="-120"/>
-              </a:rPr>
-              <a:t>Wrong numbers and robocalls handled — you only hear real jobs.</a:t>
-            </a:r>
-            <a:endParaRPr lang="en-US" sz="1150" dirty="0"/>
-          </a:p>
-        </p:txBody>
-      </p:sp>
-      <p:sp>
-        <p:nvSpPr>
-          <p:cNvPr id="25" name="Shape 18"/>
-          <p:cNvSpPr/>
-          <p:nvPr/>
-        </p:nvSpPr>
-        <p:spPr>
-          <a:xfrm>
-            <a:off x="4343400" y="4114800"/>
-            <a:ext cx="3474720" cy="1600200"/>
-          </a:xfrm>
-          <a:prstGeom prst="roundRect">
-            <a:avLst>
-              <a:gd name="adj" fmla="val 5714"/>
-            </a:avLst>
-          </a:prstGeom>
-          <a:solidFill>
-            <a:srgbClr val="F4F8FD"/>
-          </a:solidFill>
-          <a:ln w="12700">
-            <a:solidFill>
-              <a:srgbClr val="E7EDF6"/>
-            </a:solidFill>
-            <a:prstDash val="solid"/>
-          </a:ln>
-        </p:spPr>
-      </p:sp>
-      <p:sp>
-        <p:nvSpPr>
-          <p:cNvPr id="26" name="Shape 19"/>
-          <p:cNvSpPr/>
-          <p:nvPr/>
-        </p:nvSpPr>
-        <p:spPr>
-          <a:xfrm>
-            <a:off x="4599432" y="4407408"/>
-            <a:ext cx="621792" cy="621792"/>
-          </a:xfrm>
-          <a:prstGeom prst="ellipse">
-            <a:avLst/>
-          </a:prstGeom>
-          <a:solidFill>
-            <a:srgbClr val="FFFFFF"/>
-          </a:solidFill>
-          <a:ln w="12700">
-            <a:solidFill>
-              <a:srgbClr val="E7EDF6"/>
-            </a:solidFill>
-            <a:prstDash val="solid"/>
-          </a:ln>
-        </p:spPr>
-      </p:sp>
-      <p:pic>
-        <p:nvPicPr>
-          <p:cNvPr id="27" name="Image 5" descr="preencoded.png">    </p:cNvPr>
-          <p:cNvPicPr>
-            <a:picLocks noChangeAspect="1"/>
-          </p:cNvPicPr>
-          <p:nvPr/>
-        </p:nvPicPr>
-        <p:blipFill>
-          <a:blip r:embed="rId6"/>
-          <a:stretch>
-            <a:fillRect/>
-          </a:stretch>
-        </p:blipFill>
-        <p:spPr>
-          <a:xfrm>
-            <a:off x="4745736" y="4553712"/>
-            <a:ext cx="329184" cy="329184"/>
-          </a:xfrm>
-          <a:prstGeom prst="rect">
-            <a:avLst/>
-          </a:prstGeom>
-        </p:spPr>
-      </p:pic>
-      <p:sp>
-        <p:nvSpPr>
-          <p:cNvPr id="28" name="Text 20"/>
-          <p:cNvSpPr/>
-          <p:nvPr/>
-        </p:nvSpPr>
-        <p:spPr>
-          <a:xfrm>
-            <a:off x="5394960" y="4370832"/>
-            <a:ext cx="2286000" cy="365760"/>
-          </a:xfrm>
-          <a:prstGeom prst="rect">
-            <a:avLst/>
-          </a:prstGeom>
-          <a:noFill/>
-          <a:ln/>
-        </p:spPr>
-        <p:txBody>
-          <a:bodyPr wrap="square" lIns="0" tIns="0" rIns="0" bIns="0" rtlCol="0" anchor="ctr"/>
-          <a:lstStyle/>
-          <a:p>
-            <a:pPr indent="0" marL="0">
-              <a:buNone/>
-            </a:pPr>
-            <a:r>
-              <a:rPr lang="en-US" sz="1500" b="1" dirty="0">
-                <a:solidFill>
-                  <a:srgbClr val="0C1726"/>
-                </a:solidFill>
-                <a:latin typeface="Arial" pitchFamily="34" charset="0"/>
-                <a:ea typeface="Arial" pitchFamily="34" charset="-122"/>
-                <a:cs typeface="Arial" pitchFamily="34" charset="-120"/>
-              </a:rPr>
-              <a:t>Cheaper than a service</a:t>
-            </a:r>
-            <a:endParaRPr lang="en-US" sz="1500" dirty="0"/>
-          </a:p>
-        </p:txBody>
-      </p:sp>
-      <p:sp>
-        <p:nvSpPr>
-          <p:cNvPr id="29" name="Text 21"/>
-          <p:cNvSpPr/>
-          <p:nvPr/>
-        </p:nvSpPr>
-        <p:spPr>
-          <a:xfrm>
-            <a:off x="5394960" y="4754880"/>
-            <a:ext cx="2286000" cy="822960"/>
-          </a:xfrm>
-          <a:prstGeom prst="rect">
-            <a:avLst/>
-          </a:prstGeom>
-          <a:noFill/>
-          <a:ln/>
-        </p:spPr>
-        <p:txBody>
-          <a:bodyPr wrap="square" lIns="0" tIns="0" rIns="0" bIns="0" rtlCol="0" anchor="ctr"/>
-          <a:lstStyle/>
-          <a:p>
-            <a:pPr indent="0" marL="0">
-              <a:lnSpc>
-                <a:spcPct val="115000"/>
-              </a:lnSpc>
-              <a:buNone/>
-            </a:pPr>
-            <a:r>
-              <a:rPr lang="en-US" sz="1150" dirty="0">
-                <a:solidFill>
-                  <a:srgbClr val="44505F"/>
-                </a:solidFill>
-                <a:latin typeface="Arial" pitchFamily="34" charset="0"/>
-                <a:ea typeface="Arial" pitchFamily="34" charset="-122"/>
-                <a:cs typeface="Arial" pitchFamily="34" charset="-120"/>
-              </a:rPr>
-              <a:t>Flat monthly rate. No per-minute operators, no voicemail tag.</a:t>
-            </a:r>
-            <a:endParaRPr lang="en-US" sz="1150" dirty="0"/>
-          </a:p>
-        </p:txBody>
-      </p:sp>
-      <p:sp>
-        <p:nvSpPr>
-          <p:cNvPr id="30" name="Shape 22"/>
-          <p:cNvSpPr/>
-          <p:nvPr/>
-        </p:nvSpPr>
-        <p:spPr>
-          <a:xfrm>
-            <a:off x="8046720" y="4114800"/>
-            <a:ext cx="3474720" cy="1600200"/>
-          </a:xfrm>
-          <a:prstGeom prst="roundRect">
-            <a:avLst>
-              <a:gd name="adj" fmla="val 5714"/>
-            </a:avLst>
-          </a:prstGeom>
-          <a:solidFill>
-            <a:srgbClr val="F4F8FD"/>
-          </a:solidFill>
-          <a:ln w="12700">
-            <a:solidFill>
-              <a:srgbClr val="E7EDF6"/>
-            </a:solidFill>
-            <a:prstDash val="solid"/>
-          </a:ln>
-        </p:spPr>
-      </p:sp>
-      <p:sp>
-        <p:nvSpPr>
-          <p:cNvPr id="31" name="Shape 23"/>
-          <p:cNvSpPr/>
-          <p:nvPr/>
-        </p:nvSpPr>
-        <p:spPr>
-          <a:xfrm>
-            <a:off x="8302752" y="4407408"/>
-            <a:ext cx="621792" cy="621792"/>
-          </a:xfrm>
-          <a:prstGeom prst="ellipse">
-            <a:avLst/>
-          </a:prstGeom>
-          <a:solidFill>
-            <a:srgbClr val="FFFFFF"/>
-          </a:solidFill>
-          <a:ln w="12700">
-            <a:solidFill>
-              <a:srgbClr val="E7EDF6"/>
-            </a:solidFill>
-            <a:prstDash val="solid"/>
-          </a:ln>
-        </p:spPr>
-      </p:sp>
-      <p:pic>
-        <p:nvPicPr>
-          <p:cNvPr id="32" name="Image 6" descr="preencoded.png">    </p:cNvPr>
-          <p:cNvPicPr>
-            <a:picLocks noChangeAspect="1"/>
-          </p:cNvPicPr>
-          <p:nvPr/>
-        </p:nvPicPr>
-        <p:blipFill>
-          <a:blip r:embed="rId7"/>
-          <a:stretch>
-            <a:fillRect/>
-          </a:stretch>
-        </p:blipFill>
-        <p:spPr>
-          <a:xfrm>
-            <a:off x="8449056" y="4553712"/>
-            <a:ext cx="329184" cy="329184"/>
-          </a:xfrm>
-          <a:prstGeom prst="rect">
-            <a:avLst/>
-          </a:prstGeom>
-        </p:spPr>
-      </p:pic>
-      <p:sp>
-        <p:nvSpPr>
-          <p:cNvPr id="33" name="Text 24"/>
-          <p:cNvSpPr/>
-          <p:nvPr/>
-        </p:nvSpPr>
-        <p:spPr>
-          <a:xfrm>
-            <a:off x="9098280" y="4370832"/>
-            <a:ext cx="2286000" cy="365760"/>
-          </a:xfrm>
-          <a:prstGeom prst="rect">
-            <a:avLst/>
-          </a:prstGeom>
-          <a:noFill/>
-          <a:ln/>
-        </p:spPr>
-        <p:txBody>
-          <a:bodyPr wrap="square" lIns="0" tIns="0" rIns="0" bIns="0" rtlCol="0" anchor="ctr"/>
-          <a:lstStyle/>
-          <a:p>
-            <a:pPr indent="0" marL="0">
-              <a:buNone/>
-            </a:pPr>
-            <a:r>
-              <a:rPr lang="en-US" sz="1500" b="1" dirty="0">
-                <a:solidFill>
-                  <a:srgbClr val="0C1726"/>
-                </a:solidFill>
-                <a:latin typeface="Arial" pitchFamily="34" charset="0"/>
-                <a:ea typeface="Arial" pitchFamily="34" charset="-122"/>
-                <a:cs typeface="Arial" pitchFamily="34" charset="-120"/>
-              </a:rPr>
-              <a:t>Live in a day</a:t>
-            </a:r>
-            <a:endParaRPr lang="en-US" sz="1500" dirty="0"/>
-          </a:p>
-        </p:txBody>
-      </p:sp>
-      <p:sp>
-        <p:nvSpPr>
-          <p:cNvPr id="34" name="Text 25"/>
-          <p:cNvSpPr/>
-          <p:nvPr/>
-        </p:nvSpPr>
-        <p:spPr>
-          <a:xfrm>
-            <a:off x="9098280" y="4754880"/>
-            <a:ext cx="2286000" cy="822960"/>
-          </a:xfrm>
-          <a:prstGeom prst="rect">
-            <a:avLst/>
-          </a:prstGeom>
-          <a:noFill/>
-          <a:ln/>
-        </p:spPr>
-        <p:txBody>
-          <a:bodyPr wrap="square" lIns="0" tIns="0" rIns="0" bIns="0" rtlCol="0" anchor="ctr"/>
-          <a:lstStyle/>
-          <a:p>
-            <a:pPr indent="0" marL="0">
-              <a:lnSpc>
-                <a:spcPct val="115000"/>
-              </a:lnSpc>
-              <a:buNone/>
-            </a:pPr>
-            <a:r>
-              <a:rPr lang="en-US" sz="1150" dirty="0">
-                <a:solidFill>
-                  <a:srgbClr val="44505F"/>
-                </a:solidFill>
-                <a:latin typeface="Arial" pitchFamily="34" charset="0"/>
-                <a:ea typeface="Arial" pitchFamily="34" charset="-122"/>
-                <a:cs typeface="Arial" pitchFamily="34" charset="-120"/>
-              </a:rPr>
-              <a:t>We handle setup. Forward your calls and leads start arriving.</a:t>
-            </a:r>
-            <a:endParaRPr lang="en-US" sz="1150" dirty="0"/>
           </a:p>
         </p:txBody>
       </p:sp>
@@ -5713,7 +7044,7 @@
                 <a:ea typeface="Arial" pitchFamily="34" charset="-122"/>
                 <a:cs typeface="Arial" pitchFamily="34" charset="-120"/>
               </a:rPr>
-              <a:t>Simple, flat monthly pricing</a:t>
+              <a:t>Why locksmiths choose Dispango</a:t>
             </a:r>
             <a:endParaRPr lang="en-US" sz="3400" dirty="0"/>
           </a:p>
@@ -5721,49 +7052,59 @@
       </p:sp>
       <p:sp>
         <p:nvSpPr>
-          <p:cNvPr id="5" name="Text 2"/>
-          <p:cNvSpPr/>
-          <p:nvPr/>
-        </p:nvSpPr>
-        <p:spPr>
-          <a:xfrm>
-            <a:off x="640080" y="2103120"/>
-            <a:ext cx="5486400" cy="1463040"/>
-          </a:xfrm>
-          <a:prstGeom prst="rect">
-            <a:avLst/>
-          </a:prstGeom>
-          <a:noFill/>
-          <a:ln/>
-        </p:spPr>
-        <p:txBody>
-          <a:bodyPr wrap="square" lIns="0" tIns="0" rIns="0" bIns="0" rtlCol="0" anchor="ctr"/>
-          <a:lstStyle/>
-          <a:p>
-            <a:pPr indent="0" marL="0">
-              <a:lnSpc>
-                <a:spcPct val="130000"/>
-              </a:lnSpc>
-              <a:buNone/>
-            </a:pPr>
-            <a:r>
-              <a:rPr lang="en-US" sz="1600" dirty="0">
-                <a:solidFill>
-                  <a:srgbClr val="44505F"/>
-                </a:solidFill>
-                <a:latin typeface="Arial" pitchFamily="34" charset="0"/>
-                <a:ea typeface="Arial" pitchFamily="34" charset="-122"/>
-                <a:cs typeface="Arial" pitchFamily="34" charset="-120"/>
-              </a:rPr>
-              <a:t>No per-call charges. No long contracts. One predictable price — and a single missed job usually covers the month.</a:t>
-            </a:r>
-            <a:endParaRPr lang="en-US" sz="1600" dirty="0"/>
-          </a:p>
-        </p:txBody>
+          <p:cNvPr id="5" name="Shape 2"/>
+          <p:cNvSpPr/>
+          <p:nvPr/>
+        </p:nvSpPr>
+        <p:spPr>
+          <a:xfrm>
+            <a:off x="640080" y="2331720"/>
+            <a:ext cx="3474720" cy="1600200"/>
+          </a:xfrm>
+          <a:prstGeom prst="roundRect">
+            <a:avLst>
+              <a:gd name="adj" fmla="val 5714"/>
+            </a:avLst>
+          </a:prstGeom>
+          <a:solidFill>
+            <a:srgbClr val="F4F8FD"/>
+          </a:solidFill>
+          <a:ln w="12700">
+            <a:solidFill>
+              <a:srgbClr val="E7EDF6"/>
+            </a:solidFill>
+            <a:prstDash val="solid"/>
+          </a:ln>
+        </p:spPr>
+      </p:sp>
+      <p:sp>
+        <p:nvSpPr>
+          <p:cNvPr id="6" name="Shape 3"/>
+          <p:cNvSpPr/>
+          <p:nvPr/>
+        </p:nvSpPr>
+        <p:spPr>
+          <a:xfrm>
+            <a:off x="896112" y="2624328"/>
+            <a:ext cx="621792" cy="621792"/>
+          </a:xfrm>
+          <a:prstGeom prst="ellipse">
+            <a:avLst/>
+          </a:prstGeom>
+          <a:solidFill>
+            <a:srgbClr val="FFFFFF"/>
+          </a:solidFill>
+          <a:ln w="12700">
+            <a:solidFill>
+              <a:srgbClr val="E7EDF6"/>
+            </a:solidFill>
+            <a:prstDash val="solid"/>
+          </a:ln>
+        </p:spPr>
       </p:sp>
       <p:pic>
         <p:nvPicPr>
-          <p:cNvPr id="6" name="Image 1" descr="preencoded.png">    </p:cNvPr>
+          <p:cNvPr id="7" name="Image 1" descr="preencoded.png">    </p:cNvPr>
           <p:cNvPicPr>
             <a:picLocks noChangeAspect="1"/>
           </p:cNvPicPr>
@@ -5777,8 +7118,8 @@
         </p:blipFill>
         <p:spPr>
           <a:xfrm>
-            <a:off x="640080" y="3703320"/>
-            <a:ext cx="274320" cy="274320"/>
+            <a:off x="1042416" y="2770632"/>
+            <a:ext cx="329184" cy="329184"/>
           </a:xfrm>
           <a:prstGeom prst="rect">
             <a:avLst/>
@@ -5787,14 +7128,14 @@
       </p:pic>
       <p:sp>
         <p:nvSpPr>
-          <p:cNvPr id="7" name="Text 3"/>
-          <p:cNvSpPr/>
-          <p:nvPr/>
-        </p:nvSpPr>
-        <p:spPr>
-          <a:xfrm>
-            <a:off x="1051560" y="3657600"/>
-            <a:ext cx="4937760" cy="411480"/>
+          <p:cNvPr id="8" name="Text 4"/>
+          <p:cNvSpPr/>
+          <p:nvPr/>
+        </p:nvSpPr>
+        <p:spPr>
+          <a:xfrm>
+            <a:off x="1691640" y="2587752"/>
+            <a:ext cx="2286000" cy="365760"/>
           </a:xfrm>
           <a:prstGeom prst="rect">
             <a:avLst/>
@@ -5810,7 +7151,7 @@
               <a:buNone/>
             </a:pPr>
             <a:r>
-              <a:rPr lang="en-US" sz="1450" dirty="0">
+              <a:rPr lang="en-US" sz="1500" b="1" dirty="0">
                 <a:solidFill>
                   <a:srgbClr val="0C1726"/>
                 </a:solidFill>
@@ -5818,15 +7159,109 @@
                 <a:ea typeface="Arial" pitchFamily="34" charset="-122"/>
                 <a:cs typeface="Arial" pitchFamily="34" charset="-120"/>
               </a:rPr>
-              <a:t>Answers your calls 24/7</a:t>
-            </a:r>
-            <a:endParaRPr lang="en-US" sz="1450" dirty="0"/>
-          </a:p>
-        </p:txBody>
+              <a:t>Catch every lead</a:t>
+            </a:r>
+            <a:endParaRPr lang="en-US" sz="1500" dirty="0"/>
+          </a:p>
+        </p:txBody>
+      </p:sp>
+      <p:sp>
+        <p:nvSpPr>
+          <p:cNvPr id="9" name="Text 5"/>
+          <p:cNvSpPr/>
+          <p:nvPr/>
+        </p:nvSpPr>
+        <p:spPr>
+          <a:xfrm>
+            <a:off x="1691640" y="2971800"/>
+            <a:ext cx="2286000" cy="822960"/>
+          </a:xfrm>
+          <a:prstGeom prst="rect">
+            <a:avLst/>
+          </a:prstGeom>
+          <a:noFill/>
+          <a:ln/>
+        </p:spPr>
+        <p:txBody>
+          <a:bodyPr wrap="square" lIns="0" tIns="0" rIns="0" bIns="0" rtlCol="0" anchor="ctr"/>
+          <a:lstStyle/>
+          <a:p>
+            <a:pPr indent="0" marL="0">
+              <a:lnSpc>
+                <a:spcPct val="115000"/>
+              </a:lnSpc>
+              <a:buNone/>
+            </a:pPr>
+            <a:r>
+              <a:rPr lang="en-US" sz="1150" dirty="0">
+                <a:solidFill>
+                  <a:srgbClr val="44505F"/>
+                </a:solidFill>
+                <a:latin typeface="Arial" pitchFamily="34" charset="0"/>
+                <a:ea typeface="Arial" pitchFamily="34" charset="-122"/>
+                <a:cs typeface="Arial" pitchFamily="34" charset="-120"/>
+              </a:rPr>
+              <a:t>Answer at 2am, on a job, or while driving — without picking up.</a:t>
+            </a:r>
+            <a:endParaRPr lang="en-US" sz="1150" dirty="0"/>
+          </a:p>
+        </p:txBody>
+      </p:sp>
+      <p:sp>
+        <p:nvSpPr>
+          <p:cNvPr id="10" name="Shape 6"/>
+          <p:cNvSpPr/>
+          <p:nvPr/>
+        </p:nvSpPr>
+        <p:spPr>
+          <a:xfrm>
+            <a:off x="4343400" y="2331720"/>
+            <a:ext cx="3474720" cy="1600200"/>
+          </a:xfrm>
+          <a:prstGeom prst="roundRect">
+            <a:avLst>
+              <a:gd name="adj" fmla="val 5714"/>
+            </a:avLst>
+          </a:prstGeom>
+          <a:solidFill>
+            <a:srgbClr val="F4F8FD"/>
+          </a:solidFill>
+          <a:ln w="12700">
+            <a:solidFill>
+              <a:srgbClr val="E7EDF6"/>
+            </a:solidFill>
+            <a:prstDash val="solid"/>
+          </a:ln>
+        </p:spPr>
+      </p:sp>
+      <p:sp>
+        <p:nvSpPr>
+          <p:cNvPr id="11" name="Shape 7"/>
+          <p:cNvSpPr/>
+          <p:nvPr/>
+        </p:nvSpPr>
+        <p:spPr>
+          <a:xfrm>
+            <a:off x="4599432" y="2624328"/>
+            <a:ext cx="621792" cy="621792"/>
+          </a:xfrm>
+          <a:prstGeom prst="ellipse">
+            <a:avLst/>
+          </a:prstGeom>
+          <a:solidFill>
+            <a:srgbClr val="FFFFFF"/>
+          </a:solidFill>
+          <a:ln w="12700">
+            <a:solidFill>
+              <a:srgbClr val="E7EDF6"/>
+            </a:solidFill>
+            <a:prstDash val="solid"/>
+          </a:ln>
+        </p:spPr>
       </p:sp>
       <p:pic>
         <p:nvPicPr>
-          <p:cNvPr id="8" name="Image 2" descr="preencoded.png">    </p:cNvPr>
+          <p:cNvPr id="12" name="Image 2" descr="preencoded.png">    </p:cNvPr>
           <p:cNvPicPr>
             <a:picLocks noChangeAspect="1"/>
           </p:cNvPicPr>
@@ -5840,8 +7275,8 @@
         </p:blipFill>
         <p:spPr>
           <a:xfrm>
-            <a:off x="640080" y="4206240"/>
-            <a:ext cx="274320" cy="274320"/>
+            <a:off x="4745736" y="2770632"/>
+            <a:ext cx="329184" cy="329184"/>
           </a:xfrm>
           <a:prstGeom prst="rect">
             <a:avLst/>
@@ -5850,14 +7285,14 @@
       </p:pic>
       <p:sp>
         <p:nvSpPr>
-          <p:cNvPr id="9" name="Text 4"/>
-          <p:cNvSpPr/>
-          <p:nvPr/>
-        </p:nvSpPr>
-        <p:spPr>
-          <a:xfrm>
-            <a:off x="1051560" y="4160520"/>
-            <a:ext cx="4937760" cy="411480"/>
+          <p:cNvPr id="13" name="Text 8"/>
+          <p:cNvSpPr/>
+          <p:nvPr/>
+        </p:nvSpPr>
+        <p:spPr>
+          <a:xfrm>
+            <a:off x="5394960" y="2587752"/>
+            <a:ext cx="2286000" cy="365760"/>
           </a:xfrm>
           <a:prstGeom prst="rect">
             <a:avLst/>
@@ -5873,7 +7308,7 @@
               <a:buNone/>
             </a:pPr>
             <a:r>
-              <a:rPr lang="en-US" sz="1450" dirty="0">
+              <a:rPr lang="en-US" sz="1500" b="1" dirty="0">
                 <a:solidFill>
                   <a:srgbClr val="0C1726"/>
                 </a:solidFill>
@@ -5881,15 +7316,109 @@
                 <a:ea typeface="Arial" pitchFamily="34" charset="-122"/>
                 <a:cs typeface="Arial" pitchFamily="34" charset="-120"/>
               </a:rPr>
-              <a:t>Captures &amp; texts every lead</a:t>
-            </a:r>
-            <a:endParaRPr lang="en-US" sz="1450" dirty="0"/>
-          </a:p>
-        </p:txBody>
+              <a:t>Keeps your number</a:t>
+            </a:r>
+            <a:endParaRPr lang="en-US" sz="1500" dirty="0"/>
+          </a:p>
+        </p:txBody>
+      </p:sp>
+      <p:sp>
+        <p:nvSpPr>
+          <p:cNvPr id="14" name="Text 9"/>
+          <p:cNvSpPr/>
+          <p:nvPr/>
+        </p:nvSpPr>
+        <p:spPr>
+          <a:xfrm>
+            <a:off x="5394960" y="2971800"/>
+            <a:ext cx="2286000" cy="822960"/>
+          </a:xfrm>
+          <a:prstGeom prst="rect">
+            <a:avLst/>
+          </a:prstGeom>
+          <a:noFill/>
+          <a:ln/>
+        </p:spPr>
+        <p:txBody>
+          <a:bodyPr wrap="square" lIns="0" tIns="0" rIns="0" bIns="0" rtlCol="0" anchor="ctr"/>
+          <a:lstStyle/>
+          <a:p>
+            <a:pPr indent="0" marL="0">
+              <a:lnSpc>
+                <a:spcPct val="115000"/>
+              </a:lnSpc>
+              <a:buNone/>
+            </a:pPr>
+            <a:r>
+              <a:rPr lang="en-US" sz="1150" dirty="0">
+                <a:solidFill>
+                  <a:srgbClr val="44505F"/>
+                </a:solidFill>
+                <a:latin typeface="Arial" pitchFamily="34" charset="0"/>
+                <a:ea typeface="Arial" pitchFamily="34" charset="-122"/>
+                <a:cs typeface="Arial" pitchFamily="34" charset="-120"/>
+              </a:rPr>
+              <a:t>Works with the number already on your truck and your ads.</a:t>
+            </a:r>
+            <a:endParaRPr lang="en-US" sz="1150" dirty="0"/>
+          </a:p>
+        </p:txBody>
+      </p:sp>
+      <p:sp>
+        <p:nvSpPr>
+          <p:cNvPr id="15" name="Shape 10"/>
+          <p:cNvSpPr/>
+          <p:nvPr/>
+        </p:nvSpPr>
+        <p:spPr>
+          <a:xfrm>
+            <a:off x="8046720" y="2331720"/>
+            <a:ext cx="3474720" cy="1600200"/>
+          </a:xfrm>
+          <a:prstGeom prst="roundRect">
+            <a:avLst>
+              <a:gd name="adj" fmla="val 5714"/>
+            </a:avLst>
+          </a:prstGeom>
+          <a:solidFill>
+            <a:srgbClr val="F4F8FD"/>
+          </a:solidFill>
+          <a:ln w="12700">
+            <a:solidFill>
+              <a:srgbClr val="E7EDF6"/>
+            </a:solidFill>
+            <a:prstDash val="solid"/>
+          </a:ln>
+        </p:spPr>
+      </p:sp>
+      <p:sp>
+        <p:nvSpPr>
+          <p:cNvPr id="16" name="Shape 11"/>
+          <p:cNvSpPr/>
+          <p:nvPr/>
+        </p:nvSpPr>
+        <p:spPr>
+          <a:xfrm>
+            <a:off x="8302752" y="2624328"/>
+            <a:ext cx="621792" cy="621792"/>
+          </a:xfrm>
+          <a:prstGeom prst="ellipse">
+            <a:avLst/>
+          </a:prstGeom>
+          <a:solidFill>
+            <a:srgbClr val="FFFFFF"/>
+          </a:solidFill>
+          <a:ln w="12700">
+            <a:solidFill>
+              <a:srgbClr val="E7EDF6"/>
+            </a:solidFill>
+            <a:prstDash val="solid"/>
+          </a:ln>
+        </p:spPr>
       </p:sp>
       <p:pic>
         <p:nvPicPr>
-          <p:cNvPr id="10" name="Image 3" descr="preencoded.png">    </p:cNvPr>
+          <p:cNvPr id="17" name="Image 3" descr="preencoded.png">    </p:cNvPr>
           <p:cNvPicPr>
             <a:picLocks noChangeAspect="1"/>
           </p:cNvPicPr>
@@ -5903,8 +7432,8 @@
         </p:blipFill>
         <p:spPr>
           <a:xfrm>
-            <a:off x="640080" y="4709160"/>
-            <a:ext cx="274320" cy="274320"/>
+            <a:off x="8449056" y="2770632"/>
+            <a:ext cx="329184" cy="329184"/>
           </a:xfrm>
           <a:prstGeom prst="rect">
             <a:avLst/>
@@ -5913,14 +7442,14 @@
       </p:pic>
       <p:sp>
         <p:nvSpPr>
-          <p:cNvPr id="11" name="Text 5"/>
-          <p:cNvSpPr/>
-          <p:nvPr/>
-        </p:nvSpPr>
-        <p:spPr>
-          <a:xfrm>
-            <a:off x="1051560" y="4663440"/>
-            <a:ext cx="4937760" cy="411480"/>
+          <p:cNvPr id="18" name="Text 12"/>
+          <p:cNvSpPr/>
+          <p:nvPr/>
+        </p:nvSpPr>
+        <p:spPr>
+          <a:xfrm>
+            <a:off x="9098280" y="2587752"/>
+            <a:ext cx="2286000" cy="365760"/>
           </a:xfrm>
           <a:prstGeom prst="rect">
             <a:avLst/>
@@ -5936,7 +7465,7 @@
               <a:buNone/>
             </a:pPr>
             <a:r>
-              <a:rPr lang="en-US" sz="1450" dirty="0">
+              <a:rPr lang="en-US" sz="1500" b="1" dirty="0">
                 <a:solidFill>
                   <a:srgbClr val="0C1726"/>
                 </a:solidFill>
@@ -5944,15 +7473,109 @@
                 <a:ea typeface="Arial" pitchFamily="34" charset="-122"/>
                 <a:cs typeface="Arial" pitchFamily="34" charset="-120"/>
               </a:rPr>
-              <a:t>Returning-caller memory</a:t>
-            </a:r>
-            <a:endParaRPr lang="en-US" sz="1450" dirty="0"/>
-          </a:p>
-        </p:txBody>
+              <a:t>Sounds human</a:t>
+            </a:r>
+            <a:endParaRPr lang="en-US" sz="1500" dirty="0"/>
+          </a:p>
+        </p:txBody>
+      </p:sp>
+      <p:sp>
+        <p:nvSpPr>
+          <p:cNvPr id="19" name="Text 13"/>
+          <p:cNvSpPr/>
+          <p:nvPr/>
+        </p:nvSpPr>
+        <p:spPr>
+          <a:xfrm>
+            <a:off x="9098280" y="2971800"/>
+            <a:ext cx="2286000" cy="822960"/>
+          </a:xfrm>
+          <a:prstGeom prst="rect">
+            <a:avLst/>
+          </a:prstGeom>
+          <a:noFill/>
+          <a:ln/>
+        </p:spPr>
+        <p:txBody>
+          <a:bodyPr wrap="square" lIns="0" tIns="0" rIns="0" bIns="0" rtlCol="0" anchor="ctr"/>
+          <a:lstStyle/>
+          <a:p>
+            <a:pPr indent="0" marL="0">
+              <a:lnSpc>
+                <a:spcPct val="115000"/>
+              </a:lnSpc>
+              <a:buNone/>
+            </a:pPr>
+            <a:r>
+              <a:rPr lang="en-US" sz="1150" dirty="0">
+                <a:solidFill>
+                  <a:srgbClr val="44505F"/>
+                </a:solidFill>
+                <a:latin typeface="Arial" pitchFamily="34" charset="0"/>
+                <a:ea typeface="Arial" pitchFamily="34" charset="-122"/>
+                <a:cs typeface="Arial" pitchFamily="34" charset="-120"/>
+              </a:rPr>
+              <a:t>A natural voice that asks the right questions, not a robot.</a:t>
+            </a:r>
+            <a:endParaRPr lang="en-US" sz="1150" dirty="0"/>
+          </a:p>
+        </p:txBody>
+      </p:sp>
+      <p:sp>
+        <p:nvSpPr>
+          <p:cNvPr id="20" name="Shape 14"/>
+          <p:cNvSpPr/>
+          <p:nvPr/>
+        </p:nvSpPr>
+        <p:spPr>
+          <a:xfrm>
+            <a:off x="640080" y="4114800"/>
+            <a:ext cx="3474720" cy="1600200"/>
+          </a:xfrm>
+          <a:prstGeom prst="roundRect">
+            <a:avLst>
+              <a:gd name="adj" fmla="val 5714"/>
+            </a:avLst>
+          </a:prstGeom>
+          <a:solidFill>
+            <a:srgbClr val="F4F8FD"/>
+          </a:solidFill>
+          <a:ln w="12700">
+            <a:solidFill>
+              <a:srgbClr val="E7EDF6"/>
+            </a:solidFill>
+            <a:prstDash val="solid"/>
+          </a:ln>
+        </p:spPr>
+      </p:sp>
+      <p:sp>
+        <p:nvSpPr>
+          <p:cNvPr id="21" name="Shape 15"/>
+          <p:cNvSpPr/>
+          <p:nvPr/>
+        </p:nvSpPr>
+        <p:spPr>
+          <a:xfrm>
+            <a:off x="896112" y="4407408"/>
+            <a:ext cx="621792" cy="621792"/>
+          </a:xfrm>
+          <a:prstGeom prst="ellipse">
+            <a:avLst/>
+          </a:prstGeom>
+          <a:solidFill>
+            <a:srgbClr val="FFFFFF"/>
+          </a:solidFill>
+          <a:ln w="12700">
+            <a:solidFill>
+              <a:srgbClr val="E7EDF6"/>
+            </a:solidFill>
+            <a:prstDash val="solid"/>
+          </a:ln>
+        </p:spPr>
       </p:sp>
       <p:pic>
         <p:nvPicPr>
-          <p:cNvPr id="12" name="Image 4" descr="preencoded.png">    </p:cNvPr>
+          <p:cNvPr id="22" name="Image 4" descr="preencoded.png">    </p:cNvPr>
           <p:cNvPicPr>
             <a:picLocks noChangeAspect="1"/>
           </p:cNvPicPr>
@@ -5966,8 +7589,8 @@
         </p:blipFill>
         <p:spPr>
           <a:xfrm>
-            <a:off x="640080" y="5212080"/>
-            <a:ext cx="274320" cy="274320"/>
+            <a:off x="1042416" y="4553712"/>
+            <a:ext cx="329184" cy="329184"/>
           </a:xfrm>
           <a:prstGeom prst="rect">
             <a:avLst/>
@@ -5976,14 +7599,14 @@
       </p:pic>
       <p:sp>
         <p:nvSpPr>
-          <p:cNvPr id="13" name="Text 6"/>
-          <p:cNvSpPr/>
-          <p:nvPr/>
-        </p:nvSpPr>
-        <p:spPr>
-          <a:xfrm>
-            <a:off x="1051560" y="5166360"/>
-            <a:ext cx="4937760" cy="411480"/>
+          <p:cNvPr id="23" name="Text 16"/>
+          <p:cNvSpPr/>
+          <p:nvPr/>
+        </p:nvSpPr>
+        <p:spPr>
+          <a:xfrm>
+            <a:off x="1691640" y="4370832"/>
+            <a:ext cx="2286000" cy="365760"/>
           </a:xfrm>
           <a:prstGeom prst="rect">
             <a:avLst/>
@@ -5999,7 +7622,7 @@
               <a:buNone/>
             </a:pPr>
             <a:r>
-              <a:rPr lang="en-US" sz="1450" dirty="0">
+              <a:rPr lang="en-US" sz="1500" b="1" dirty="0">
                 <a:solidFill>
                   <a:srgbClr val="0C1726"/>
                 </a:solidFill>
@@ -6007,51 +7630,140 @@
                 <a:ea typeface="Arial" pitchFamily="34" charset="-122"/>
                 <a:cs typeface="Arial" pitchFamily="34" charset="-120"/>
               </a:rPr>
-              <a:t>Setup &amp; support included</a:t>
-            </a:r>
-            <a:endParaRPr lang="en-US" sz="1450" dirty="0"/>
-          </a:p>
-        </p:txBody>
-      </p:sp>
-      <p:sp>
-        <p:nvSpPr>
-          <p:cNvPr id="14" name="Shape 7"/>
-          <p:cNvSpPr/>
-          <p:nvPr/>
-        </p:nvSpPr>
-        <p:spPr>
-          <a:xfrm>
-            <a:off x="7315200" y="2194560"/>
-            <a:ext cx="3840480" cy="3566160"/>
+              <a:t>Filters the junk</a:t>
+            </a:r>
+            <a:endParaRPr lang="en-US" sz="1500" dirty="0"/>
+          </a:p>
+        </p:txBody>
+      </p:sp>
+      <p:sp>
+        <p:nvSpPr>
+          <p:cNvPr id="24" name="Text 17"/>
+          <p:cNvSpPr/>
+          <p:nvPr/>
+        </p:nvSpPr>
+        <p:spPr>
+          <a:xfrm>
+            <a:off x="1691640" y="4754880"/>
+            <a:ext cx="2286000" cy="822960"/>
+          </a:xfrm>
+          <a:prstGeom prst="rect">
+            <a:avLst/>
+          </a:prstGeom>
+          <a:noFill/>
+          <a:ln/>
+        </p:spPr>
+        <p:txBody>
+          <a:bodyPr wrap="square" lIns="0" tIns="0" rIns="0" bIns="0" rtlCol="0" anchor="ctr"/>
+          <a:lstStyle/>
+          <a:p>
+            <a:pPr indent="0" marL="0">
+              <a:lnSpc>
+                <a:spcPct val="115000"/>
+              </a:lnSpc>
+              <a:buNone/>
+            </a:pPr>
+            <a:r>
+              <a:rPr lang="en-US" sz="1150" dirty="0">
+                <a:solidFill>
+                  <a:srgbClr val="44505F"/>
+                </a:solidFill>
+                <a:latin typeface="Arial" pitchFamily="34" charset="0"/>
+                <a:ea typeface="Arial" pitchFamily="34" charset="-122"/>
+                <a:cs typeface="Arial" pitchFamily="34" charset="-120"/>
+              </a:rPr>
+              <a:t>Wrong numbers and robocalls handled — you only hear real jobs.</a:t>
+            </a:r>
+            <a:endParaRPr lang="en-US" sz="1150" dirty="0"/>
+          </a:p>
+        </p:txBody>
+      </p:sp>
+      <p:sp>
+        <p:nvSpPr>
+          <p:cNvPr id="25" name="Shape 18"/>
+          <p:cNvSpPr/>
+          <p:nvPr/>
+        </p:nvSpPr>
+        <p:spPr>
+          <a:xfrm>
+            <a:off x="4343400" y="4114800"/>
+            <a:ext cx="3474720" cy="1600200"/>
           </a:xfrm>
           <a:prstGeom prst="roundRect">
             <a:avLst>
-              <a:gd name="adj" fmla="val 4103"/>
+              <a:gd name="adj" fmla="val 5714"/>
             </a:avLst>
           </a:prstGeom>
           <a:solidFill>
-            <a:srgbClr val="0C1726"/>
+            <a:srgbClr val="F4F8FD"/>
           </a:solidFill>
-          <a:ln/>
-          <a:effectLst>
-            <a:outerShdw sx="100000" sy="100000" kx="0" ky="0" algn="bl" rotWithShape="0" blurRad="114300" dist="38100" dir="5400000">
-              <a:srgbClr val="0C1726">
-                <a:alpha val="10000"/>
-              </a:srgbClr>
-            </a:outerShdw>
-          </a:effectLst>
-        </p:spPr>
-      </p:sp>
-      <p:sp>
-        <p:nvSpPr>
-          <p:cNvPr id="15" name="Text 8"/>
-          <p:cNvSpPr/>
-          <p:nvPr/>
-        </p:nvSpPr>
-        <p:spPr>
-          <a:xfrm>
-            <a:off x="7680960" y="2560320"/>
-            <a:ext cx="3108960" cy="365760"/>
+          <a:ln w="12700">
+            <a:solidFill>
+              <a:srgbClr val="E7EDF6"/>
+            </a:solidFill>
+            <a:prstDash val="solid"/>
+          </a:ln>
+        </p:spPr>
+      </p:sp>
+      <p:sp>
+        <p:nvSpPr>
+          <p:cNvPr id="26" name="Shape 19"/>
+          <p:cNvSpPr/>
+          <p:nvPr/>
+        </p:nvSpPr>
+        <p:spPr>
+          <a:xfrm>
+            <a:off x="4599432" y="4407408"/>
+            <a:ext cx="621792" cy="621792"/>
+          </a:xfrm>
+          <a:prstGeom prst="ellipse">
+            <a:avLst/>
+          </a:prstGeom>
+          <a:solidFill>
+            <a:srgbClr val="FFFFFF"/>
+          </a:solidFill>
+          <a:ln w="12700">
+            <a:solidFill>
+              <a:srgbClr val="E7EDF6"/>
+            </a:solidFill>
+            <a:prstDash val="solid"/>
+          </a:ln>
+        </p:spPr>
+      </p:sp>
+      <p:pic>
+        <p:nvPicPr>
+          <p:cNvPr id="27" name="Image 5" descr="preencoded.png">    </p:cNvPr>
+          <p:cNvPicPr>
+            <a:picLocks noChangeAspect="1"/>
+          </p:cNvPicPr>
+          <p:nvPr/>
+        </p:nvPicPr>
+        <p:blipFill>
+          <a:blip r:embed="rId6"/>
+          <a:stretch>
+            <a:fillRect/>
+          </a:stretch>
+        </p:blipFill>
+        <p:spPr>
+          <a:xfrm>
+            <a:off x="4745736" y="4553712"/>
+            <a:ext cx="329184" cy="329184"/>
+          </a:xfrm>
+          <a:prstGeom prst="rect">
+            <a:avLst/>
+          </a:prstGeom>
+        </p:spPr>
+      </p:pic>
+      <p:sp>
+        <p:nvSpPr>
+          <p:cNvPr id="28" name="Text 20"/>
+          <p:cNvSpPr/>
+          <p:nvPr/>
+        </p:nvSpPr>
+        <p:spPr>
+          <a:xfrm>
+            <a:off x="5394960" y="4370832"/>
+            <a:ext cx="2286000" cy="365760"/>
           </a:xfrm>
           <a:prstGeom prst="rect">
             <a:avLst/>
@@ -6067,30 +7779,30 @@
               <a:buNone/>
             </a:pPr>
             <a:r>
-              <a:rPr lang="en-US" sz="1400" b="1" dirty="0">
-                <a:solidFill>
-                  <a:srgbClr val="CADCFC"/>
-                </a:solidFill>
-                <a:latin typeface="Arial" pitchFamily="34" charset="0"/>
-                <a:ea typeface="Arial" pitchFamily="34" charset="-122"/>
-                <a:cs typeface="Arial" pitchFamily="34" charset="-120"/>
-              </a:rPr>
-              <a:t>Locksmith plan</a:t>
-            </a:r>
-            <a:endParaRPr lang="en-US" sz="1400" dirty="0"/>
-          </a:p>
-        </p:txBody>
-      </p:sp>
-      <p:sp>
-        <p:nvSpPr>
-          <p:cNvPr id="16" name="Text 9"/>
-          <p:cNvSpPr/>
-          <p:nvPr/>
-        </p:nvSpPr>
-        <p:spPr>
-          <a:xfrm>
-            <a:off x="7680960" y="2971800"/>
-            <a:ext cx="3108960" cy="914400"/>
+              <a:rPr lang="en-US" sz="1500" b="1" dirty="0">
+                <a:solidFill>
+                  <a:srgbClr val="0C1726"/>
+                </a:solidFill>
+                <a:latin typeface="Arial" pitchFamily="34" charset="0"/>
+                <a:ea typeface="Arial" pitchFamily="34" charset="-122"/>
+                <a:cs typeface="Arial" pitchFamily="34" charset="-120"/>
+              </a:rPr>
+              <a:t>Cheaper than a service</a:t>
+            </a:r>
+            <a:endParaRPr lang="en-US" sz="1500" dirty="0"/>
+          </a:p>
+        </p:txBody>
+      </p:sp>
+      <p:sp>
+        <p:nvSpPr>
+          <p:cNvPr id="29" name="Text 21"/>
+          <p:cNvSpPr/>
+          <p:nvPr/>
+        </p:nvSpPr>
+        <p:spPr>
+          <a:xfrm>
+            <a:off x="5394960" y="4754880"/>
+            <a:ext cx="2286000" cy="822960"/>
           </a:xfrm>
           <a:prstGeom prst="rect">
             <a:avLst/>
@@ -6103,134 +7815,180 @@
           <a:lstStyle/>
           <a:p>
             <a:pPr indent="0" marL="0">
-              <a:buNone/>
-            </a:pPr>
-            <a:r>
-              <a:rPr lang="en-US" sz="4600" b="1" dirty="0">
-                <a:solidFill>
-                  <a:srgbClr val="FFFFFF"/>
-                </a:solidFill>
-                <a:latin typeface="Arial" pitchFamily="34" charset="0"/>
-                <a:ea typeface="Arial" pitchFamily="34" charset="-122"/>
-                <a:cs typeface="Arial" pitchFamily="34" charset="-120"/>
-              </a:rPr>
-              <a:t>$XXX</a:t>
-            </a:r>
-            <a:pPr indent="0" marL="0">
-              <a:buNone/>
-            </a:pPr>
-            <a:r>
-              <a:rPr lang="en-US" sz="1800" dirty="0">
-                <a:solidFill>
-                  <a:srgbClr val="8A97A8"/>
-                </a:solidFill>
-                <a:latin typeface="Arial" pitchFamily="34" charset="0"/>
-                <a:ea typeface="Arial" pitchFamily="34" charset="-122"/>
-                <a:cs typeface="Arial" pitchFamily="34" charset="-120"/>
-              </a:rPr>
-              <a:t> /mo</a:t>
-            </a:r>
-            <a:endParaRPr lang="en-US" sz="4600" dirty="0"/>
-          </a:p>
-        </p:txBody>
-      </p:sp>
-      <p:sp>
-        <p:nvSpPr>
-          <p:cNvPr id="17" name="Text 10"/>
-          <p:cNvSpPr/>
-          <p:nvPr/>
-        </p:nvSpPr>
-        <p:spPr>
-          <a:xfrm>
-            <a:off x="7680960" y="3977640"/>
-            <a:ext cx="3108960" cy="548640"/>
-          </a:xfrm>
-          <a:prstGeom prst="rect">
-            <a:avLst/>
-          </a:prstGeom>
-          <a:noFill/>
-          <a:ln/>
-        </p:spPr>
-        <p:txBody>
-          <a:bodyPr wrap="square" lIns="0" tIns="0" rIns="0" bIns="0" rtlCol="0" anchor="ctr"/>
-          <a:lstStyle/>
-          <a:p>
-            <a:pPr indent="0" marL="0">
-              <a:buNone/>
-            </a:pPr>
-            <a:r>
-              <a:rPr lang="en-US" sz="1100" i="1" dirty="0">
-                <a:solidFill>
-                  <a:srgbClr val="8A97A8"/>
-                </a:solidFill>
-                <a:latin typeface="Arial" pitchFamily="34" charset="0"/>
-                <a:ea typeface="Arial" pitchFamily="34" charset="-122"/>
-                <a:cs typeface="Arial" pitchFamily="34" charset="-120"/>
-              </a:rPr>
-              <a:t>Set your price here — replace before presenting.</a:t>
-            </a:r>
-            <a:endParaRPr lang="en-US" sz="1100" dirty="0"/>
-          </a:p>
-        </p:txBody>
-      </p:sp>
-      <p:sp>
-        <p:nvSpPr>
-          <p:cNvPr id="18" name="Shape 11"/>
-          <p:cNvSpPr/>
-          <p:nvPr/>
-        </p:nvSpPr>
-        <p:spPr>
-          <a:xfrm>
-            <a:off x="7680960" y="4754880"/>
-            <a:ext cx="3108960" cy="640080"/>
+              <a:lnSpc>
+                <a:spcPct val="115000"/>
+              </a:lnSpc>
+              <a:buNone/>
+            </a:pPr>
+            <a:r>
+              <a:rPr lang="en-US" sz="1150" dirty="0">
+                <a:solidFill>
+                  <a:srgbClr val="44505F"/>
+                </a:solidFill>
+                <a:latin typeface="Arial" pitchFamily="34" charset="0"/>
+                <a:ea typeface="Arial" pitchFamily="34" charset="-122"/>
+                <a:cs typeface="Arial" pitchFamily="34" charset="-120"/>
+              </a:rPr>
+              <a:t>Flat monthly rate. No per-minute operators, no voicemail tag.</a:t>
+            </a:r>
+            <a:endParaRPr lang="en-US" sz="1150" dirty="0"/>
+          </a:p>
+        </p:txBody>
+      </p:sp>
+      <p:sp>
+        <p:nvSpPr>
+          <p:cNvPr id="30" name="Shape 22"/>
+          <p:cNvSpPr/>
+          <p:nvPr/>
+        </p:nvSpPr>
+        <p:spPr>
+          <a:xfrm>
+            <a:off x="8046720" y="4114800"/>
+            <a:ext cx="3474720" cy="1600200"/>
           </a:xfrm>
           <a:prstGeom prst="roundRect">
             <a:avLst>
-              <a:gd name="adj" fmla="val 14286"/>
+              <a:gd name="adj" fmla="val 5714"/>
             </a:avLst>
           </a:prstGeom>
           <a:solidFill>
-            <a:srgbClr val="2F6BED"/>
+            <a:srgbClr val="F4F8FD"/>
           </a:solidFill>
-          <a:ln/>
-        </p:spPr>
-      </p:sp>
-      <p:sp>
-        <p:nvSpPr>
-          <p:cNvPr id="19" name="Text 12"/>
-          <p:cNvSpPr/>
-          <p:nvPr/>
-        </p:nvSpPr>
-        <p:spPr>
-          <a:xfrm>
-            <a:off x="7680960" y="4754880"/>
-            <a:ext cx="3108960" cy="640080"/>
-          </a:xfrm>
-          <a:prstGeom prst="rect">
-            <a:avLst/>
-          </a:prstGeom>
-          <a:noFill/>
-          <a:ln/>
-        </p:spPr>
-        <p:txBody>
-          <a:bodyPr wrap="square" lIns="0" tIns="0" rIns="0" bIns="0" rtlCol="0" anchor="ctr"/>
-          <a:lstStyle/>
-          <a:p>
-            <a:pPr algn="ctr" indent="0" marL="0">
+          <a:ln w="12700">
+            <a:solidFill>
+              <a:srgbClr val="E7EDF6"/>
+            </a:solidFill>
+            <a:prstDash val="solid"/>
+          </a:ln>
+        </p:spPr>
+      </p:sp>
+      <p:sp>
+        <p:nvSpPr>
+          <p:cNvPr id="31" name="Shape 23"/>
+          <p:cNvSpPr/>
+          <p:nvPr/>
+        </p:nvSpPr>
+        <p:spPr>
+          <a:xfrm>
+            <a:off x="8302752" y="4407408"/>
+            <a:ext cx="621792" cy="621792"/>
+          </a:xfrm>
+          <a:prstGeom prst="ellipse">
+            <a:avLst/>
+          </a:prstGeom>
+          <a:solidFill>
+            <a:srgbClr val="FFFFFF"/>
+          </a:solidFill>
+          <a:ln w="12700">
+            <a:solidFill>
+              <a:srgbClr val="E7EDF6"/>
+            </a:solidFill>
+            <a:prstDash val="solid"/>
+          </a:ln>
+        </p:spPr>
+      </p:sp>
+      <p:pic>
+        <p:nvPicPr>
+          <p:cNvPr id="32" name="Image 6" descr="preencoded.png">    </p:cNvPr>
+          <p:cNvPicPr>
+            <a:picLocks noChangeAspect="1"/>
+          </p:cNvPicPr>
+          <p:nvPr/>
+        </p:nvPicPr>
+        <p:blipFill>
+          <a:blip r:embed="rId7"/>
+          <a:stretch>
+            <a:fillRect/>
+          </a:stretch>
+        </p:blipFill>
+        <p:spPr>
+          <a:xfrm>
+            <a:off x="8449056" y="4553712"/>
+            <a:ext cx="329184" cy="329184"/>
+          </a:xfrm>
+          <a:prstGeom prst="rect">
+            <a:avLst/>
+          </a:prstGeom>
+        </p:spPr>
+      </p:pic>
+      <p:sp>
+        <p:nvSpPr>
+          <p:cNvPr id="33" name="Text 24"/>
+          <p:cNvSpPr/>
+          <p:nvPr/>
+        </p:nvSpPr>
+        <p:spPr>
+          <a:xfrm>
+            <a:off x="9098280" y="4370832"/>
+            <a:ext cx="2286000" cy="365760"/>
+          </a:xfrm>
+          <a:prstGeom prst="rect">
+            <a:avLst/>
+          </a:prstGeom>
+          <a:noFill/>
+          <a:ln/>
+        </p:spPr>
+        <p:txBody>
+          <a:bodyPr wrap="square" lIns="0" tIns="0" rIns="0" bIns="0" rtlCol="0" anchor="ctr"/>
+          <a:lstStyle/>
+          <a:p>
+            <a:pPr indent="0" marL="0">
               <a:buNone/>
             </a:pPr>
             <a:r>
               <a:rPr lang="en-US" sz="1500" b="1" dirty="0">
                 <a:solidFill>
-                  <a:srgbClr val="FFFFFF"/>
-                </a:solidFill>
-                <a:latin typeface="Arial" pitchFamily="34" charset="0"/>
-                <a:ea typeface="Arial" pitchFamily="34" charset="-122"/>
-                <a:cs typeface="Arial" pitchFamily="34" charset="-120"/>
-              </a:rPr>
-              <a:t>Book a demo</a:t>
+                  <a:srgbClr val="0C1726"/>
+                </a:solidFill>
+                <a:latin typeface="Arial" pitchFamily="34" charset="0"/>
+                <a:ea typeface="Arial" pitchFamily="34" charset="-122"/>
+                <a:cs typeface="Arial" pitchFamily="34" charset="-120"/>
+              </a:rPr>
+              <a:t>Live in a day</a:t>
             </a:r>
             <a:endParaRPr lang="en-US" sz="1500" dirty="0"/>
+          </a:p>
+        </p:txBody>
+      </p:sp>
+      <p:sp>
+        <p:nvSpPr>
+          <p:cNvPr id="34" name="Text 25"/>
+          <p:cNvSpPr/>
+          <p:nvPr/>
+        </p:nvSpPr>
+        <p:spPr>
+          <a:xfrm>
+            <a:off x="9098280" y="4754880"/>
+            <a:ext cx="2286000" cy="822960"/>
+          </a:xfrm>
+          <a:prstGeom prst="rect">
+            <a:avLst/>
+          </a:prstGeom>
+          <a:noFill/>
+          <a:ln/>
+        </p:spPr>
+        <p:txBody>
+          <a:bodyPr wrap="square" lIns="0" tIns="0" rIns="0" bIns="0" rtlCol="0" anchor="ctr"/>
+          <a:lstStyle/>
+          <a:p>
+            <a:pPr indent="0" marL="0">
+              <a:lnSpc>
+                <a:spcPct val="115000"/>
+              </a:lnSpc>
+              <a:buNone/>
+            </a:pPr>
+            <a:r>
+              <a:rPr lang="en-US" sz="1150" dirty="0">
+                <a:solidFill>
+                  <a:srgbClr val="44505F"/>
+                </a:solidFill>
+                <a:latin typeface="Arial" pitchFamily="34" charset="0"/>
+                <a:ea typeface="Arial" pitchFamily="34" charset="-122"/>
+                <a:cs typeface="Arial" pitchFamily="34" charset="-120"/>
+              </a:rPr>
+              <a:t>We handle setup. Forward your calls and leads start arriving.</a:t>
+            </a:r>
+            <a:endParaRPr lang="en-US" sz="1150" dirty="0"/>
           </a:p>
         </p:txBody>
       </p:sp>
@@ -6362,7 +8120,7 @@
                 <a:ea typeface="Arial" pitchFamily="34" charset="-122"/>
                 <a:cs typeface="Arial" pitchFamily="34" charset="-120"/>
               </a:rPr>
-              <a:t>Built for working locksmiths</a:t>
+              <a:t>One caught job pays for the month</a:t>
             </a:r>
             <a:endParaRPr lang="en-US" sz="3400" dirty="0"/>
           </a:p>
@@ -6376,8 +8134,8 @@
         </p:nvSpPr>
         <p:spPr>
           <a:xfrm>
-            <a:off x="640080" y="1874520"/>
-            <a:ext cx="8686800" cy="548640"/>
+            <a:off x="640080" y="2103120"/>
+            <a:ext cx="10911535" cy="640080"/>
           </a:xfrm>
           <a:prstGeom prst="rect">
             <a:avLst/>
@@ -6390,20 +8148,23 @@
           <a:lstStyle/>
           <a:p>
             <a:pPr indent="0" marL="0">
-              <a:buNone/>
-            </a:pPr>
-            <a:r>
-              <a:rPr lang="en-US" sz="1300" i="1" dirty="0">
-                <a:solidFill>
-                  <a:srgbClr val="8A97A8"/>
-                </a:solidFill>
-                <a:latin typeface="Arial" pitchFamily="34" charset="0"/>
-                <a:ea typeface="Arial" pitchFamily="34" charset="-122"/>
-                <a:cs typeface="Arial" pitchFamily="34" charset="-120"/>
-              </a:rPr>
-              <a:t>Placeholder — drop in real customer quotes once a few shops are live. Social proof is the strongest trust lever on a sales call.</a:t>
-            </a:r>
-            <a:endParaRPr lang="en-US" sz="1300" dirty="0"/>
+              <a:lnSpc>
+                <a:spcPct val="125000"/>
+              </a:lnSpc>
+              <a:buNone/>
+            </a:pPr>
+            <a:r>
+              <a:rPr lang="en-US" sz="1600" dirty="0">
+                <a:solidFill>
+                  <a:srgbClr val="44505F"/>
+                </a:solidFill>
+                <a:latin typeface="Arial" pitchFamily="34" charset="0"/>
+                <a:ea typeface="Arial" pitchFamily="34" charset="-122"/>
+                <a:cs typeface="Arial" pitchFamily="34" charset="-120"/>
+              </a:rPr>
+              <a:t>It doesn't have to catch every call — just a few you'd have lost. The math works on the first one.</a:t>
+            </a:r>
+            <a:endParaRPr lang="en-US" sz="1600" dirty="0"/>
           </a:p>
         </p:txBody>
       </p:sp>
@@ -6415,12 +8176,12 @@
         </p:nvSpPr>
         <p:spPr>
           <a:xfrm>
-            <a:off x="640080" y="2697480"/>
-            <a:ext cx="3474720" cy="3108960"/>
+            <a:off x="640080" y="3063240"/>
+            <a:ext cx="3383280" cy="2331720"/>
           </a:xfrm>
           <a:prstGeom prst="roundRect">
             <a:avLst>
-              <a:gd name="adj" fmla="val 3529"/>
+              <a:gd name="adj" fmla="val 4706"/>
             </a:avLst>
           </a:prstGeom>
           <a:solidFill>
@@ -6449,34 +8210,34 @@
         </p:nvSpPr>
         <p:spPr>
           <a:xfrm>
-            <a:off x="960120" y="2971800"/>
-            <a:ext cx="2834640" cy="365760"/>
-          </a:xfrm>
-          <a:prstGeom prst="rect">
-            <a:avLst/>
-          </a:prstGeom>
-          <a:noFill/>
-          <a:ln/>
-        </p:spPr>
-        <p:txBody>
-          <a:bodyPr wrap="square" lIns="0" tIns="0" rIns="0" bIns="0" rtlCol="0" anchor="ctr"/>
-          <a:lstStyle/>
-          <a:p>
-            <a:pPr indent="0" marL="0">
-              <a:buNone/>
-            </a:pPr>
-            <a:r>
-              <a:rPr lang="en-US" sz="1600" dirty="0">
-                <a:solidFill>
-                  <a:srgbClr val="F5B301"/>
-                </a:solidFill>
-                <a:latin typeface="Arial" pitchFamily="34" charset="0"/>
-                <a:ea typeface="Arial" pitchFamily="34" charset="-122"/>
-                <a:cs typeface="Arial" pitchFamily="34" charset="-120"/>
-              </a:rPr>
-              <a:t>★★★★★</a:t>
-            </a:r>
-            <a:endParaRPr lang="en-US" sz="1600" dirty="0"/>
+            <a:off x="822960" y="3429000"/>
+            <a:ext cx="3017520" cy="914400"/>
+          </a:xfrm>
+          <a:prstGeom prst="rect">
+            <a:avLst/>
+          </a:prstGeom>
+          <a:noFill/>
+          <a:ln/>
+        </p:spPr>
+        <p:txBody>
+          <a:bodyPr wrap="square" lIns="0" tIns="0" rIns="0" bIns="0" rtlCol="0" anchor="ctr"/>
+          <a:lstStyle/>
+          <a:p>
+            <a:pPr algn="ctr" indent="0" marL="0">
+              <a:buNone/>
+            </a:pPr>
+            <a:r>
+              <a:rPr lang="en-US" sz="3300" b="1" dirty="0">
+                <a:solidFill>
+                  <a:srgbClr val="2F6BED"/>
+                </a:solidFill>
+                <a:latin typeface="Arial" pitchFamily="34" charset="0"/>
+                <a:ea typeface="Arial" pitchFamily="34" charset="-122"/>
+                <a:cs typeface="Arial" pitchFamily="34" charset="-120"/>
+              </a:rPr>
+              <a:t>$150–$250</a:t>
+            </a:r>
+            <a:endParaRPr lang="en-US" sz="3300" dirty="0"/>
           </a:p>
         </p:txBody>
       </p:sp>
@@ -6488,37 +8249,57 @@
         </p:nvSpPr>
         <p:spPr>
           <a:xfrm>
-            <a:off x="960120" y="3383280"/>
-            <a:ext cx="2834640" cy="1554480"/>
-          </a:xfrm>
-          <a:prstGeom prst="rect">
-            <a:avLst/>
-          </a:prstGeom>
-          <a:noFill/>
-          <a:ln/>
-        </p:spPr>
-        <p:txBody>
-          <a:bodyPr wrap="square" lIns="0" tIns="0" rIns="0" bIns="0" rtlCol="0" anchor="ctr"/>
-          <a:lstStyle/>
-          <a:p>
-            <a:pPr indent="0" marL="0">
+            <a:off x="914400" y="4389120"/>
+            <a:ext cx="2834640" cy="868680"/>
+          </a:xfrm>
+          <a:prstGeom prst="rect">
+            <a:avLst/>
+          </a:prstGeom>
+          <a:noFill/>
+          <a:ln/>
+        </p:spPr>
+        <p:txBody>
+          <a:bodyPr wrap="square" lIns="0" tIns="0" rIns="0" bIns="0" rtlCol="0" anchor="ctr"/>
+          <a:lstStyle/>
+          <a:p>
+            <a:pPr algn="ctr" indent="0" marL="0">
               <a:lnSpc>
-                <a:spcPct val="125000"/>
+                <a:spcPct val="115000"/>
               </a:lnSpc>
               <a:buNone/>
             </a:pPr>
             <a:r>
-              <a:rPr lang="en-US" sz="1350" dirty="0">
-                <a:solidFill>
-                  <a:srgbClr val="0C1726"/>
-                </a:solidFill>
-                <a:latin typeface="Arial" pitchFamily="34" charset="0"/>
-                <a:ea typeface="Arial" pitchFamily="34" charset="-122"/>
-                <a:cs typeface="Arial" pitchFamily="34" charset="-120"/>
-              </a:rPr>
-              <a:t>“Replace with a real customer quote — ideally a specific result, like jobs won after hours.”</a:t>
-            </a:r>
-            <a:endParaRPr lang="en-US" sz="1350" dirty="0"/>
+              <a:rPr lang="en-US" sz="1250" dirty="0">
+                <a:solidFill>
+                  <a:srgbClr val="44505F"/>
+                </a:solidFill>
+                <a:latin typeface="Arial" pitchFamily="34" charset="0"/>
+                <a:ea typeface="Arial" pitchFamily="34" charset="-122"/>
+                <a:cs typeface="Arial" pitchFamily="34" charset="-120"/>
+              </a:rPr>
+              <a:t>the value of one</a:t>
+            </a:r>
+            <a:endParaRPr lang="en-US" sz="1250" dirty="0"/>
+          </a:p>
+          <a:p>
+            <a:pPr algn="ctr" indent="0" marL="0">
+              <a:lnSpc>
+                <a:spcPct val="115000"/>
+              </a:lnSpc>
+              <a:buNone/>
+            </a:pPr>
+            <a:r>
+              <a:rPr lang="en-US" sz="1250" dirty="0">
+                <a:solidFill>
+                  <a:srgbClr val="44505F"/>
+                </a:solidFill>
+                <a:latin typeface="Arial" pitchFamily="34" charset="0"/>
+                <a:ea typeface="Arial" pitchFamily="34" charset="-122"/>
+                <a:cs typeface="Arial" pitchFamily="34" charset="-120"/>
+              </a:rPr>
+              <a:t>after-hours lockout</a:t>
+            </a:r>
+            <a:endParaRPr lang="en-US" sz="1250" dirty="0"/>
           </a:p>
         </p:txBody>
       </p:sp>
@@ -6530,125 +8311,12 @@
         </p:nvSpPr>
         <p:spPr>
           <a:xfrm>
-            <a:off x="960120" y="5029200"/>
-            <a:ext cx="548640" cy="548640"/>
-          </a:xfrm>
-          <a:prstGeom prst="ellipse">
-            <a:avLst/>
-          </a:prstGeom>
-          <a:solidFill>
-            <a:srgbClr val="EEF3FE"/>
-          </a:solidFill>
-          <a:ln/>
-        </p:spPr>
-      </p:sp>
-      <p:sp>
-        <p:nvSpPr>
-          <p:cNvPr id="10" name="Text 7"/>
-          <p:cNvSpPr/>
-          <p:nvPr/>
-        </p:nvSpPr>
-        <p:spPr>
-          <a:xfrm>
-            <a:off x="960120" y="5029200"/>
-            <a:ext cx="548640" cy="548640"/>
-          </a:xfrm>
-          <a:prstGeom prst="rect">
-            <a:avLst/>
-          </a:prstGeom>
-          <a:noFill/>
-          <a:ln/>
-        </p:spPr>
-        <p:txBody>
-          <a:bodyPr wrap="square" lIns="0" tIns="0" rIns="0" bIns="0" rtlCol="0" anchor="ctr"/>
-          <a:lstStyle/>
-          <a:p>
-            <a:pPr algn="ctr" indent="0" marL="0">
-              <a:buNone/>
-            </a:pPr>
-            <a:r>
-              <a:rPr lang="en-US" sz="1300" b="1" dirty="0">
-                <a:solidFill>
-                  <a:srgbClr val="1F51C4"/>
-                </a:solidFill>
-                <a:latin typeface="Arial" pitchFamily="34" charset="0"/>
-                <a:ea typeface="Arial" pitchFamily="34" charset="-122"/>
-                <a:cs typeface="Arial" pitchFamily="34" charset="-120"/>
-              </a:rPr>
-              <a:t>AB</a:t>
-            </a:r>
-            <a:endParaRPr lang="en-US" sz="1300" dirty="0"/>
-          </a:p>
-        </p:txBody>
-      </p:sp>
-      <p:sp>
-        <p:nvSpPr>
-          <p:cNvPr id="11" name="Text 8"/>
-          <p:cNvSpPr/>
-          <p:nvPr/>
-        </p:nvSpPr>
-        <p:spPr>
-          <a:xfrm>
-            <a:off x="1645920" y="5029200"/>
-            <a:ext cx="2286000" cy="548640"/>
-          </a:xfrm>
-          <a:prstGeom prst="rect">
-            <a:avLst/>
-          </a:prstGeom>
-          <a:noFill/>
-          <a:ln/>
-        </p:spPr>
-        <p:txBody>
-          <a:bodyPr wrap="square" lIns="0" tIns="0" rIns="0" bIns="0" rtlCol="0" anchor="ctr"/>
-          <a:lstStyle/>
-          <a:p>
-            <a:pPr indent="0" marL="0">
-              <a:buNone/>
-            </a:pPr>
-            <a:r>
-              <a:rPr lang="en-US" sz="1250" b="1" dirty="0">
-                <a:solidFill>
-                  <a:srgbClr val="0C1726"/>
-                </a:solidFill>
-                <a:latin typeface="Arial" pitchFamily="34" charset="0"/>
-                <a:ea typeface="Arial" pitchFamily="34" charset="-122"/>
-                <a:cs typeface="Arial" pitchFamily="34" charset="-120"/>
-              </a:rPr>
-              <a:t>Add customer name
-</a:t>
-            </a:r>
-            <a:pPr indent="0" marL="0">
-              <a:buNone/>
-            </a:pPr>
-            <a:r>
-              <a:rPr lang="en-US" sz="1100" dirty="0">
-                <a:solidFill>
-                  <a:srgbClr val="8A97A8"/>
-                </a:solidFill>
-                <a:latin typeface="Arial" pitchFamily="34" charset="0"/>
-                <a:ea typeface="Arial" pitchFamily="34" charset="-122"/>
-                <a:cs typeface="Arial" pitchFamily="34" charset="-120"/>
-              </a:rPr>
-              <a:t>Shop name · City</a:t>
-            </a:r>
-            <a:endParaRPr lang="en-US" sz="1250" dirty="0"/>
-          </a:p>
-        </p:txBody>
-      </p:sp>
-      <p:sp>
-        <p:nvSpPr>
-          <p:cNvPr id="12" name="Shape 9"/>
-          <p:cNvSpPr/>
-          <p:nvPr/>
-        </p:nvSpPr>
-        <p:spPr>
-          <a:xfrm>
-            <a:off x="4343400" y="2697480"/>
-            <a:ext cx="3474720" cy="3108960"/>
+            <a:off x="4251960" y="3063240"/>
+            <a:ext cx="3383280" cy="2331720"/>
           </a:xfrm>
           <a:prstGeom prst="roundRect">
             <a:avLst>
-              <a:gd name="adj" fmla="val 3529"/>
+              <a:gd name="adj" fmla="val 4706"/>
             </a:avLst>
           </a:prstGeom>
           <a:solidFill>
@@ -6671,193 +8339,100 @@
       </p:sp>
       <p:sp>
         <p:nvSpPr>
-          <p:cNvPr id="13" name="Text 10"/>
-          <p:cNvSpPr/>
-          <p:nvPr/>
-        </p:nvSpPr>
-        <p:spPr>
-          <a:xfrm>
-            <a:off x="4663440" y="2971800"/>
-            <a:ext cx="2834640" cy="365760"/>
-          </a:xfrm>
-          <a:prstGeom prst="rect">
-            <a:avLst/>
-          </a:prstGeom>
-          <a:noFill/>
-          <a:ln/>
-        </p:spPr>
-        <p:txBody>
-          <a:bodyPr wrap="square" lIns="0" tIns="0" rIns="0" bIns="0" rtlCol="0" anchor="ctr"/>
-          <a:lstStyle/>
-          <a:p>
-            <a:pPr indent="0" marL="0">
-              <a:buNone/>
-            </a:pPr>
-            <a:r>
-              <a:rPr lang="en-US" sz="1600" dirty="0">
-                <a:solidFill>
-                  <a:srgbClr val="F5B301"/>
-                </a:solidFill>
-                <a:latin typeface="Arial" pitchFamily="34" charset="0"/>
-                <a:ea typeface="Arial" pitchFamily="34" charset="-122"/>
-                <a:cs typeface="Arial" pitchFamily="34" charset="-120"/>
-              </a:rPr>
-              <a:t>★★★★★</a:t>
-            </a:r>
-            <a:endParaRPr lang="en-US" sz="1600" dirty="0"/>
-          </a:p>
-        </p:txBody>
-      </p:sp>
-      <p:sp>
-        <p:nvSpPr>
-          <p:cNvPr id="14" name="Text 11"/>
-          <p:cNvSpPr/>
-          <p:nvPr/>
-        </p:nvSpPr>
-        <p:spPr>
-          <a:xfrm>
-            <a:off x="4663440" y="3383280"/>
-            <a:ext cx="2834640" cy="1554480"/>
-          </a:xfrm>
-          <a:prstGeom prst="rect">
-            <a:avLst/>
-          </a:prstGeom>
-          <a:noFill/>
-          <a:ln/>
-        </p:spPr>
-        <p:txBody>
-          <a:bodyPr wrap="square" lIns="0" tIns="0" rIns="0" bIns="0" rtlCol="0" anchor="ctr"/>
-          <a:lstStyle/>
-          <a:p>
-            <a:pPr indent="0" marL="0">
+          <p:cNvPr id="10" name="Text 7"/>
+          <p:cNvSpPr/>
+          <p:nvPr/>
+        </p:nvSpPr>
+        <p:spPr>
+          <a:xfrm>
+            <a:off x="4434840" y="3429000"/>
+            <a:ext cx="3017520" cy="914400"/>
+          </a:xfrm>
+          <a:prstGeom prst="rect">
+            <a:avLst/>
+          </a:prstGeom>
+          <a:noFill/>
+          <a:ln/>
+        </p:spPr>
+        <p:txBody>
+          <a:bodyPr wrap="square" lIns="0" tIns="0" rIns="0" bIns="0" rtlCol="0" anchor="ctr"/>
+          <a:lstStyle/>
+          <a:p>
+            <a:pPr algn="ctr" indent="0" marL="0">
+              <a:buNone/>
+            </a:pPr>
+            <a:r>
+              <a:rPr lang="en-US" sz="3300" b="1" dirty="0">
+                <a:solidFill>
+                  <a:srgbClr val="2F6BED"/>
+                </a:solidFill>
+                <a:latin typeface="Arial" pitchFamily="34" charset="0"/>
+                <a:ea typeface="Arial" pitchFamily="34" charset="-122"/>
+                <a:cs typeface="Arial" pitchFamily="34" charset="-120"/>
+              </a:rPr>
+              <a:t>2–3 jobs</a:t>
+            </a:r>
+            <a:endParaRPr lang="en-US" sz="3300" dirty="0"/>
+          </a:p>
+        </p:txBody>
+      </p:sp>
+      <p:sp>
+        <p:nvSpPr>
+          <p:cNvPr id="11" name="Text 8"/>
+          <p:cNvSpPr/>
+          <p:nvPr/>
+        </p:nvSpPr>
+        <p:spPr>
+          <a:xfrm>
+            <a:off x="4526280" y="4389120"/>
+            <a:ext cx="2834640" cy="868680"/>
+          </a:xfrm>
+          <a:prstGeom prst="rect">
+            <a:avLst/>
+          </a:prstGeom>
+          <a:noFill/>
+          <a:ln/>
+        </p:spPr>
+        <p:txBody>
+          <a:bodyPr wrap="square" lIns="0" tIns="0" rIns="0" bIns="0" rtlCol="0" anchor="ctr"/>
+          <a:lstStyle/>
+          <a:p>
+            <a:pPr algn="ctr" indent="0" marL="0">
               <a:lnSpc>
-                <a:spcPct val="125000"/>
+                <a:spcPct val="115000"/>
               </a:lnSpc>
               <a:buNone/>
             </a:pPr>
             <a:r>
-              <a:rPr lang="en-US" sz="1350" dirty="0">
-                <a:solidFill>
-                  <a:srgbClr val="0C1726"/>
-                </a:solidFill>
-                <a:latin typeface="Arial" pitchFamily="34" charset="0"/>
-                <a:ea typeface="Arial" pitchFamily="34" charset="-122"/>
-                <a:cs typeface="Arial" pitchFamily="34" charset="-120"/>
-              </a:rPr>
-              <a:t>“Replace with a real customer quote — ideally a specific result, like jobs won after hours.”</a:t>
-            </a:r>
-            <a:endParaRPr lang="en-US" sz="1350" dirty="0"/>
-          </a:p>
-        </p:txBody>
-      </p:sp>
-      <p:sp>
-        <p:nvSpPr>
-          <p:cNvPr id="15" name="Shape 12"/>
-          <p:cNvSpPr/>
-          <p:nvPr/>
-        </p:nvSpPr>
-        <p:spPr>
-          <a:xfrm>
-            <a:off x="4663440" y="5029200"/>
-            <a:ext cx="548640" cy="548640"/>
-          </a:xfrm>
-          <a:prstGeom prst="ellipse">
-            <a:avLst/>
-          </a:prstGeom>
-          <a:solidFill>
-            <a:srgbClr val="EEF3FE"/>
-          </a:solidFill>
-          <a:ln/>
-        </p:spPr>
-      </p:sp>
-      <p:sp>
-        <p:nvSpPr>
-          <p:cNvPr id="16" name="Text 13"/>
-          <p:cNvSpPr/>
-          <p:nvPr/>
-        </p:nvSpPr>
-        <p:spPr>
-          <a:xfrm>
-            <a:off x="4663440" y="5029200"/>
-            <a:ext cx="548640" cy="548640"/>
-          </a:xfrm>
-          <a:prstGeom prst="rect">
-            <a:avLst/>
-          </a:prstGeom>
-          <a:noFill/>
-          <a:ln/>
-        </p:spPr>
-        <p:txBody>
-          <a:bodyPr wrap="square" lIns="0" tIns="0" rIns="0" bIns="0" rtlCol="0" anchor="ctr"/>
-          <a:lstStyle/>
+              <a:rPr lang="en-US" sz="1250" dirty="0">
+                <a:solidFill>
+                  <a:srgbClr val="44505F"/>
+                </a:solidFill>
+                <a:latin typeface="Arial" pitchFamily="34" charset="0"/>
+                <a:ea typeface="Arial" pitchFamily="34" charset="-122"/>
+                <a:cs typeface="Arial" pitchFamily="34" charset="-120"/>
+              </a:rPr>
+              <a:t>a month is all it takes</a:t>
+            </a:r>
+            <a:endParaRPr lang="en-US" sz="1250" dirty="0"/>
+          </a:p>
           <a:p>
             <a:pPr algn="ctr" indent="0" marL="0">
-              <a:buNone/>
-            </a:pPr>
-            <a:r>
-              <a:rPr lang="en-US" sz="1300" b="1" dirty="0">
-                <a:solidFill>
-                  <a:srgbClr val="1F51C4"/>
-                </a:solidFill>
-                <a:latin typeface="Arial" pitchFamily="34" charset="0"/>
-                <a:ea typeface="Arial" pitchFamily="34" charset="-122"/>
-                <a:cs typeface="Arial" pitchFamily="34" charset="-120"/>
-              </a:rPr>
-              <a:t>CD</a:t>
-            </a:r>
-            <a:endParaRPr lang="en-US" sz="1300" dirty="0"/>
-          </a:p>
-        </p:txBody>
-      </p:sp>
-      <p:sp>
-        <p:nvSpPr>
-          <p:cNvPr id="17" name="Text 14"/>
-          <p:cNvSpPr/>
-          <p:nvPr/>
-        </p:nvSpPr>
-        <p:spPr>
-          <a:xfrm>
-            <a:off x="5349240" y="5029200"/>
-            <a:ext cx="2286000" cy="548640"/>
-          </a:xfrm>
-          <a:prstGeom prst="rect">
-            <a:avLst/>
-          </a:prstGeom>
-          <a:noFill/>
-          <a:ln/>
-        </p:spPr>
-        <p:txBody>
-          <a:bodyPr wrap="square" lIns="0" tIns="0" rIns="0" bIns="0" rtlCol="0" anchor="ctr"/>
-          <a:lstStyle/>
-          <a:p>
-            <a:pPr indent="0" marL="0">
-              <a:buNone/>
-            </a:pPr>
-            <a:r>
-              <a:rPr lang="en-US" sz="1250" b="1" dirty="0">
-                <a:solidFill>
-                  <a:srgbClr val="0C1726"/>
-                </a:solidFill>
-                <a:latin typeface="Arial" pitchFamily="34" charset="0"/>
-                <a:ea typeface="Arial" pitchFamily="34" charset="-122"/>
-                <a:cs typeface="Arial" pitchFamily="34" charset="-120"/>
-              </a:rPr>
-              <a:t>Add customer name
-</a:t>
-            </a:r>
-            <a:pPr indent="0" marL="0">
-              <a:buNone/>
-            </a:pPr>
-            <a:r>
-              <a:rPr lang="en-US" sz="1100" dirty="0">
-                <a:solidFill>
-                  <a:srgbClr val="8A97A8"/>
-                </a:solidFill>
-                <a:latin typeface="Arial" pitchFamily="34" charset="0"/>
-                <a:ea typeface="Arial" pitchFamily="34" charset="-122"/>
-                <a:cs typeface="Arial" pitchFamily="34" charset="-120"/>
-              </a:rPr>
-              <a:t>Shop name · City</a:t>
+              <a:lnSpc>
+                <a:spcPct val="115000"/>
+              </a:lnSpc>
+              <a:buNone/>
+            </a:pPr>
+            <a:r>
+              <a:rPr lang="en-US" sz="1250" dirty="0">
+                <a:solidFill>
+                  <a:srgbClr val="44505F"/>
+                </a:solidFill>
+                <a:latin typeface="Arial" pitchFamily="34" charset="0"/>
+                <a:ea typeface="Arial" pitchFamily="34" charset="-122"/>
+                <a:cs typeface="Arial" pitchFamily="34" charset="-120"/>
+              </a:rPr>
+              <a:t>to pay for itself</a:t>
             </a:r>
             <a:endParaRPr lang="en-US" sz="1250" dirty="0"/>
           </a:p>
@@ -6865,18 +8440,18 @@
       </p:sp>
       <p:sp>
         <p:nvSpPr>
-          <p:cNvPr id="18" name="Shape 15"/>
-          <p:cNvSpPr/>
-          <p:nvPr/>
-        </p:nvSpPr>
-        <p:spPr>
-          <a:xfrm>
-            <a:off x="8046720" y="2697480"/>
-            <a:ext cx="3474720" cy="3108960"/>
+          <p:cNvPr id="12" name="Shape 9"/>
+          <p:cNvSpPr/>
+          <p:nvPr/>
+        </p:nvSpPr>
+        <p:spPr>
+          <a:xfrm>
+            <a:off x="7863840" y="3063240"/>
+            <a:ext cx="3383280" cy="2331720"/>
           </a:xfrm>
           <a:prstGeom prst="roundRect">
             <a:avLst>
-              <a:gd name="adj" fmla="val 3529"/>
+              <a:gd name="adj" fmla="val 4706"/>
             </a:avLst>
           </a:prstGeom>
           <a:solidFill>
@@ -6899,193 +8474,100 @@
       </p:sp>
       <p:sp>
         <p:nvSpPr>
-          <p:cNvPr id="19" name="Text 16"/>
-          <p:cNvSpPr/>
-          <p:nvPr/>
-        </p:nvSpPr>
-        <p:spPr>
-          <a:xfrm>
-            <a:off x="8366760" y="2971800"/>
-            <a:ext cx="2834640" cy="365760"/>
-          </a:xfrm>
-          <a:prstGeom prst="rect">
-            <a:avLst/>
-          </a:prstGeom>
-          <a:noFill/>
-          <a:ln/>
-        </p:spPr>
-        <p:txBody>
-          <a:bodyPr wrap="square" lIns="0" tIns="0" rIns="0" bIns="0" rtlCol="0" anchor="ctr"/>
-          <a:lstStyle/>
-          <a:p>
-            <a:pPr indent="0" marL="0">
-              <a:buNone/>
-            </a:pPr>
-            <a:r>
-              <a:rPr lang="en-US" sz="1600" dirty="0">
-                <a:solidFill>
-                  <a:srgbClr val="F5B301"/>
-                </a:solidFill>
-                <a:latin typeface="Arial" pitchFamily="34" charset="0"/>
-                <a:ea typeface="Arial" pitchFamily="34" charset="-122"/>
-                <a:cs typeface="Arial" pitchFamily="34" charset="-120"/>
-              </a:rPr>
-              <a:t>★★★★★</a:t>
-            </a:r>
-            <a:endParaRPr lang="en-US" sz="1600" dirty="0"/>
-          </a:p>
-        </p:txBody>
-      </p:sp>
-      <p:sp>
-        <p:nvSpPr>
-          <p:cNvPr id="20" name="Text 17"/>
-          <p:cNvSpPr/>
-          <p:nvPr/>
-        </p:nvSpPr>
-        <p:spPr>
-          <a:xfrm>
-            <a:off x="8366760" y="3383280"/>
-            <a:ext cx="2834640" cy="1554480"/>
-          </a:xfrm>
-          <a:prstGeom prst="rect">
-            <a:avLst/>
-          </a:prstGeom>
-          <a:noFill/>
-          <a:ln/>
-        </p:spPr>
-        <p:txBody>
-          <a:bodyPr wrap="square" lIns="0" tIns="0" rIns="0" bIns="0" rtlCol="0" anchor="ctr"/>
-          <a:lstStyle/>
-          <a:p>
-            <a:pPr indent="0" marL="0">
+          <p:cNvPr id="13" name="Text 10"/>
+          <p:cNvSpPr/>
+          <p:nvPr/>
+        </p:nvSpPr>
+        <p:spPr>
+          <a:xfrm>
+            <a:off x="8046720" y="3429000"/>
+            <a:ext cx="3017520" cy="914400"/>
+          </a:xfrm>
+          <a:prstGeom prst="rect">
+            <a:avLst/>
+          </a:prstGeom>
+          <a:noFill/>
+          <a:ln/>
+        </p:spPr>
+        <p:txBody>
+          <a:bodyPr wrap="square" lIns="0" tIns="0" rIns="0" bIns="0" rtlCol="0" anchor="ctr"/>
+          <a:lstStyle/>
+          <a:p>
+            <a:pPr algn="ctr" indent="0" marL="0">
+              <a:buNone/>
+            </a:pPr>
+            <a:r>
+              <a:rPr lang="en-US" sz="3300" b="1" dirty="0">
+                <a:solidFill>
+                  <a:srgbClr val="2F6BED"/>
+                </a:solidFill>
+                <a:latin typeface="Arial" pitchFamily="34" charset="0"/>
+                <a:ea typeface="Arial" pitchFamily="34" charset="-122"/>
+                <a:cs typeface="Arial" pitchFamily="34" charset="-120"/>
+              </a:rPr>
+              <a:t>the rest</a:t>
+            </a:r>
+            <a:endParaRPr lang="en-US" sz="3300" dirty="0"/>
+          </a:p>
+        </p:txBody>
+      </p:sp>
+      <p:sp>
+        <p:nvSpPr>
+          <p:cNvPr id="14" name="Text 11"/>
+          <p:cNvSpPr/>
+          <p:nvPr/>
+        </p:nvSpPr>
+        <p:spPr>
+          <a:xfrm>
+            <a:off x="8138160" y="4389120"/>
+            <a:ext cx="2834640" cy="868680"/>
+          </a:xfrm>
+          <a:prstGeom prst="rect">
+            <a:avLst/>
+          </a:prstGeom>
+          <a:noFill/>
+          <a:ln/>
+        </p:spPr>
+        <p:txBody>
+          <a:bodyPr wrap="square" lIns="0" tIns="0" rIns="0" bIns="0" rtlCol="0" anchor="ctr"/>
+          <a:lstStyle/>
+          <a:p>
+            <a:pPr algn="ctr" indent="0" marL="0">
               <a:lnSpc>
-                <a:spcPct val="125000"/>
+                <a:spcPct val="115000"/>
               </a:lnSpc>
               <a:buNone/>
             </a:pPr>
             <a:r>
-              <a:rPr lang="en-US" sz="1350" dirty="0">
-                <a:solidFill>
-                  <a:srgbClr val="0C1726"/>
-                </a:solidFill>
-                <a:latin typeface="Arial" pitchFamily="34" charset="0"/>
-                <a:ea typeface="Arial" pitchFamily="34" charset="-122"/>
-                <a:cs typeface="Arial" pitchFamily="34" charset="-120"/>
-              </a:rPr>
-              <a:t>“Replace with a real customer quote — ideally a specific result, like jobs won after hours.”</a:t>
-            </a:r>
-            <a:endParaRPr lang="en-US" sz="1350" dirty="0"/>
-          </a:p>
-        </p:txBody>
-      </p:sp>
-      <p:sp>
-        <p:nvSpPr>
-          <p:cNvPr id="21" name="Shape 18"/>
-          <p:cNvSpPr/>
-          <p:nvPr/>
-        </p:nvSpPr>
-        <p:spPr>
-          <a:xfrm>
-            <a:off x="8366760" y="5029200"/>
-            <a:ext cx="548640" cy="548640"/>
-          </a:xfrm>
-          <a:prstGeom prst="ellipse">
-            <a:avLst/>
-          </a:prstGeom>
-          <a:solidFill>
-            <a:srgbClr val="EEF3FE"/>
-          </a:solidFill>
-          <a:ln/>
-        </p:spPr>
-      </p:sp>
-      <p:sp>
-        <p:nvSpPr>
-          <p:cNvPr id="22" name="Text 19"/>
-          <p:cNvSpPr/>
-          <p:nvPr/>
-        </p:nvSpPr>
-        <p:spPr>
-          <a:xfrm>
-            <a:off x="8366760" y="5029200"/>
-            <a:ext cx="548640" cy="548640"/>
-          </a:xfrm>
-          <a:prstGeom prst="rect">
-            <a:avLst/>
-          </a:prstGeom>
-          <a:noFill/>
-          <a:ln/>
-        </p:spPr>
-        <p:txBody>
-          <a:bodyPr wrap="square" lIns="0" tIns="0" rIns="0" bIns="0" rtlCol="0" anchor="ctr"/>
-          <a:lstStyle/>
+              <a:rPr lang="en-US" sz="1250" dirty="0">
+                <a:solidFill>
+                  <a:srgbClr val="44505F"/>
+                </a:solidFill>
+                <a:latin typeface="Arial" pitchFamily="34" charset="0"/>
+                <a:ea typeface="Arial" pitchFamily="34" charset="-122"/>
+                <a:cs typeface="Arial" pitchFamily="34" charset="-120"/>
+              </a:rPr>
+              <a:t>is profit you were</a:t>
+            </a:r>
+            <a:endParaRPr lang="en-US" sz="1250" dirty="0"/>
+          </a:p>
           <a:p>
             <a:pPr algn="ctr" indent="0" marL="0">
-              <a:buNone/>
-            </a:pPr>
-            <a:r>
-              <a:rPr lang="en-US" sz="1300" b="1" dirty="0">
-                <a:solidFill>
-                  <a:srgbClr val="1F51C4"/>
-                </a:solidFill>
-                <a:latin typeface="Arial" pitchFamily="34" charset="0"/>
-                <a:ea typeface="Arial" pitchFamily="34" charset="-122"/>
-                <a:cs typeface="Arial" pitchFamily="34" charset="-120"/>
-              </a:rPr>
-              <a:t>EF</a:t>
-            </a:r>
-            <a:endParaRPr lang="en-US" sz="1300" dirty="0"/>
-          </a:p>
-        </p:txBody>
-      </p:sp>
-      <p:sp>
-        <p:nvSpPr>
-          <p:cNvPr id="23" name="Text 20"/>
-          <p:cNvSpPr/>
-          <p:nvPr/>
-        </p:nvSpPr>
-        <p:spPr>
-          <a:xfrm>
-            <a:off x="9052560" y="5029200"/>
-            <a:ext cx="2286000" cy="548640"/>
-          </a:xfrm>
-          <a:prstGeom prst="rect">
-            <a:avLst/>
-          </a:prstGeom>
-          <a:noFill/>
-          <a:ln/>
-        </p:spPr>
-        <p:txBody>
-          <a:bodyPr wrap="square" lIns="0" tIns="0" rIns="0" bIns="0" rtlCol="0" anchor="ctr"/>
-          <a:lstStyle/>
-          <a:p>
-            <a:pPr indent="0" marL="0">
-              <a:buNone/>
-            </a:pPr>
-            <a:r>
-              <a:rPr lang="en-US" sz="1250" b="1" dirty="0">
-                <a:solidFill>
-                  <a:srgbClr val="0C1726"/>
-                </a:solidFill>
-                <a:latin typeface="Arial" pitchFamily="34" charset="0"/>
-                <a:ea typeface="Arial" pitchFamily="34" charset="-122"/>
-                <a:cs typeface="Arial" pitchFamily="34" charset="-120"/>
-              </a:rPr>
-              <a:t>Add customer name
-</a:t>
-            </a:r>
-            <a:pPr indent="0" marL="0">
-              <a:buNone/>
-            </a:pPr>
-            <a:r>
-              <a:rPr lang="en-US" sz="1100" dirty="0">
-                <a:solidFill>
-                  <a:srgbClr val="8A97A8"/>
-                </a:solidFill>
-                <a:latin typeface="Arial" pitchFamily="34" charset="0"/>
-                <a:ea typeface="Arial" pitchFamily="34" charset="-122"/>
-                <a:cs typeface="Arial" pitchFamily="34" charset="-120"/>
-              </a:rPr>
-              <a:t>Shop name · City</a:t>
+              <a:lnSpc>
+                <a:spcPct val="115000"/>
+              </a:lnSpc>
+              <a:buNone/>
+            </a:pPr>
+            <a:r>
+              <a:rPr lang="en-US" sz="1250" dirty="0">
+                <a:solidFill>
+                  <a:srgbClr val="44505F"/>
+                </a:solidFill>
+                <a:latin typeface="Arial" pitchFamily="34" charset="0"/>
+                <a:ea typeface="Arial" pitchFamily="34" charset="-122"/>
+                <a:cs typeface="Arial" pitchFamily="34" charset="-120"/>
+              </a:rPr>
+              <a:t>losing to voicemail</a:t>
             </a:r>
             <a:endParaRPr lang="en-US" sz="1250" dirty="0"/>
           </a:p>
@@ -7219,7 +8701,7 @@
                 <a:ea typeface="Arial" pitchFamily="34" charset="-122"/>
                 <a:cs typeface="Arial" pitchFamily="34" charset="-120"/>
               </a:rPr>
-              <a:t>Up and running in a day</a:t>
+              <a:t>Simple, flat monthly pricing</a:t>
             </a:r>
             <a:endParaRPr lang="en-US" sz="3400" dirty="0"/>
           </a:p>
@@ -7227,54 +8709,49 @@
       </p:sp>
       <p:sp>
         <p:nvSpPr>
-          <p:cNvPr id="5" name="Shape 2"/>
-          <p:cNvSpPr/>
-          <p:nvPr/>
-        </p:nvSpPr>
-        <p:spPr>
-          <a:xfrm>
-            <a:off x="640080" y="2560320"/>
-            <a:ext cx="3474720" cy="2743200"/>
-          </a:xfrm>
-          <a:prstGeom prst="roundRect">
-            <a:avLst>
-              <a:gd name="adj" fmla="val 4000"/>
-            </a:avLst>
-          </a:prstGeom>
-          <a:solidFill>
-            <a:srgbClr val="F4F8FD"/>
-          </a:solidFill>
-          <a:ln w="12700">
-            <a:solidFill>
-              <a:srgbClr val="E7EDF6"/>
-            </a:solidFill>
-            <a:prstDash val="solid"/>
-          </a:ln>
-        </p:spPr>
-      </p:sp>
-      <p:sp>
-        <p:nvSpPr>
-          <p:cNvPr id="6" name="Shape 3"/>
-          <p:cNvSpPr/>
-          <p:nvPr/>
-        </p:nvSpPr>
-        <p:spPr>
-          <a:xfrm>
-            <a:off x="960120" y="2880360"/>
-            <a:ext cx="731520" cy="731520"/>
-          </a:xfrm>
-          <a:prstGeom prst="ellipse">
-            <a:avLst/>
-          </a:prstGeom>
-          <a:solidFill>
-            <a:srgbClr val="2F6BED"/>
-          </a:solidFill>
-          <a:ln/>
-        </p:spPr>
+          <p:cNvPr id="5" name="Text 2"/>
+          <p:cNvSpPr/>
+          <p:nvPr/>
+        </p:nvSpPr>
+        <p:spPr>
+          <a:xfrm>
+            <a:off x="640080" y="2103120"/>
+            <a:ext cx="5486400" cy="1463040"/>
+          </a:xfrm>
+          <a:prstGeom prst="rect">
+            <a:avLst/>
+          </a:prstGeom>
+          <a:noFill/>
+          <a:ln/>
+        </p:spPr>
+        <p:txBody>
+          <a:bodyPr wrap="square" lIns="0" tIns="0" rIns="0" bIns="0" rtlCol="0" anchor="ctr"/>
+          <a:lstStyle/>
+          <a:p>
+            <a:pPr indent="0" marL="0">
+              <a:lnSpc>
+                <a:spcPct val="130000"/>
+              </a:lnSpc>
+              <a:buNone/>
+            </a:pPr>
+            <a:r>
+              <a:rPr lang="en-US" sz="1600" dirty="0">
+                <a:solidFill>
+                  <a:srgbClr val="44505F"/>
+                </a:solidFill>
+                <a:latin typeface="Arial" pitchFamily="34" charset="0"/>
+                <a:ea typeface="Arial" pitchFamily="34" charset="-122"/>
+                <a:cs typeface="Arial" pitchFamily="34" charset="-120"/>
+              </a:rPr>
+              <a:t>No per-call charges. No long contracts. One predictable price — and a single missed job usually covers the month.</a:t>
+            </a:r>
+            <a:endParaRPr lang="en-US" sz="1600" dirty="0"/>
+          </a:p>
+        </p:txBody>
       </p:sp>
       <p:pic>
         <p:nvPicPr>
-          <p:cNvPr id="7" name="Image 1" descr="preencoded.png">    </p:cNvPr>
+          <p:cNvPr id="6" name="Image 1" descr="preencoded.png">    </p:cNvPr>
           <p:cNvPicPr>
             <a:picLocks noChangeAspect="1"/>
           </p:cNvPicPr>
@@ -7288,8 +8765,8 @@
         </p:blipFill>
         <p:spPr>
           <a:xfrm>
-            <a:off x="1143000" y="3063240"/>
-            <a:ext cx="365760" cy="365760"/>
+            <a:off x="640080" y="3703320"/>
+            <a:ext cx="274320" cy="274320"/>
           </a:xfrm>
           <a:prstGeom prst="rect">
             <a:avLst/>
@@ -7298,14 +8775,14 @@
       </p:pic>
       <p:sp>
         <p:nvSpPr>
-          <p:cNvPr id="8" name="Text 4"/>
-          <p:cNvSpPr/>
-          <p:nvPr/>
-        </p:nvSpPr>
-        <p:spPr>
-          <a:xfrm>
-            <a:off x="1828800" y="2971800"/>
-            <a:ext cx="2011680" cy="365760"/>
+          <p:cNvPr id="7" name="Text 3"/>
+          <p:cNvSpPr/>
+          <p:nvPr/>
+        </p:nvSpPr>
+        <p:spPr>
+          <a:xfrm>
+            <a:off x="1051560" y="3657600"/>
+            <a:ext cx="4937760" cy="411480"/>
           </a:xfrm>
           <a:prstGeom prst="rect">
             <a:avLst/>
@@ -7321,46 +8798,7 @@
               <a:buNone/>
             </a:pPr>
             <a:r>
-              <a:rPr lang="en-US" sz="1200" b="1" dirty="0">
-                <a:solidFill>
-                  <a:srgbClr val="2F6BED"/>
-                </a:solidFill>
-                <a:latin typeface="Arial" pitchFamily="34" charset="0"/>
-                <a:ea typeface="Arial" pitchFamily="34" charset="-122"/>
-                <a:cs typeface="Arial" pitchFamily="34" charset="-120"/>
-              </a:rPr>
-              <a:t>Step 1</a:t>
-            </a:r>
-            <a:endParaRPr lang="en-US" sz="1200" dirty="0"/>
-          </a:p>
-        </p:txBody>
-      </p:sp>
-      <p:sp>
-        <p:nvSpPr>
-          <p:cNvPr id="9" name="Text 5"/>
-          <p:cNvSpPr/>
-          <p:nvPr/>
-        </p:nvSpPr>
-        <p:spPr>
-          <a:xfrm>
-            <a:off x="960120" y="3794760"/>
-            <a:ext cx="2834640" cy="457200"/>
-          </a:xfrm>
-          <a:prstGeom prst="rect">
-            <a:avLst/>
-          </a:prstGeom>
-          <a:noFill/>
-          <a:ln/>
-        </p:spPr>
-        <p:txBody>
-          <a:bodyPr wrap="square" lIns="0" tIns="0" rIns="0" bIns="0" rtlCol="0" anchor="ctr"/>
-          <a:lstStyle/>
-          <a:p>
-            <a:pPr indent="0" marL="0">
-              <a:buNone/>
-            </a:pPr>
-            <a:r>
-              <a:rPr lang="en-US" sz="1600" b="1" dirty="0">
+              <a:rPr lang="en-US" sz="1450" dirty="0">
                 <a:solidFill>
                   <a:srgbClr val="0C1726"/>
                 </a:solidFill>
@@ -7368,104 +8806,15 @@
                 <a:ea typeface="Arial" pitchFamily="34" charset="-122"/>
                 <a:cs typeface="Arial" pitchFamily="34" charset="-120"/>
               </a:rPr>
-              <a:t>We set it up</a:t>
-            </a:r>
-            <a:endParaRPr lang="en-US" sz="1600" dirty="0"/>
-          </a:p>
-        </p:txBody>
-      </p:sp>
-      <p:sp>
-        <p:nvSpPr>
-          <p:cNvPr id="10" name="Text 6"/>
-          <p:cNvSpPr/>
-          <p:nvPr/>
-        </p:nvSpPr>
-        <p:spPr>
-          <a:xfrm>
-            <a:off x="960120" y="4251960"/>
-            <a:ext cx="2834640" cy="914400"/>
-          </a:xfrm>
-          <a:prstGeom prst="rect">
-            <a:avLst/>
-          </a:prstGeom>
-          <a:noFill/>
-          <a:ln/>
-        </p:spPr>
-        <p:txBody>
-          <a:bodyPr wrap="square" lIns="0" tIns="0" rIns="0" bIns="0" rtlCol="0" anchor="ctr"/>
-          <a:lstStyle/>
-          <a:p>
-            <a:pPr indent="0" marL="0">
-              <a:lnSpc>
-                <a:spcPct val="120000"/>
-              </a:lnSpc>
-              <a:buNone/>
-            </a:pPr>
-            <a:r>
-              <a:rPr lang="en-US" sz="1250" dirty="0">
-                <a:solidFill>
-                  <a:srgbClr val="44505F"/>
-                </a:solidFill>
-                <a:latin typeface="Arial" pitchFamily="34" charset="0"/>
-                <a:ea typeface="Arial" pitchFamily="34" charset="-122"/>
-                <a:cs typeface="Arial" pitchFamily="34" charset="-120"/>
-              </a:rPr>
-              <a:t>We configure your AI receptionist and dispatch number for you.</a:t>
-            </a:r>
-            <a:endParaRPr lang="en-US" sz="1250" dirty="0"/>
-          </a:p>
-        </p:txBody>
-      </p:sp>
-      <p:sp>
-        <p:nvSpPr>
-          <p:cNvPr id="11" name="Shape 7"/>
-          <p:cNvSpPr/>
-          <p:nvPr/>
-        </p:nvSpPr>
-        <p:spPr>
-          <a:xfrm>
-            <a:off x="4343400" y="2560320"/>
-            <a:ext cx="3474720" cy="2743200"/>
-          </a:xfrm>
-          <a:prstGeom prst="roundRect">
-            <a:avLst>
-              <a:gd name="adj" fmla="val 4000"/>
-            </a:avLst>
-          </a:prstGeom>
-          <a:solidFill>
-            <a:srgbClr val="F4F8FD"/>
-          </a:solidFill>
-          <a:ln w="12700">
-            <a:solidFill>
-              <a:srgbClr val="E7EDF6"/>
-            </a:solidFill>
-            <a:prstDash val="solid"/>
-          </a:ln>
-        </p:spPr>
-      </p:sp>
-      <p:sp>
-        <p:nvSpPr>
-          <p:cNvPr id="12" name="Shape 8"/>
-          <p:cNvSpPr/>
-          <p:nvPr/>
-        </p:nvSpPr>
-        <p:spPr>
-          <a:xfrm>
-            <a:off x="4663440" y="2880360"/>
-            <a:ext cx="731520" cy="731520"/>
-          </a:xfrm>
-          <a:prstGeom prst="ellipse">
-            <a:avLst/>
-          </a:prstGeom>
-          <a:solidFill>
-            <a:srgbClr val="2F6BED"/>
-          </a:solidFill>
-          <a:ln/>
-        </p:spPr>
+              <a:t>Answers your calls 24/7</a:t>
+            </a:r>
+            <a:endParaRPr lang="en-US" sz="1450" dirty="0"/>
+          </a:p>
+        </p:txBody>
       </p:sp>
       <p:pic>
         <p:nvPicPr>
-          <p:cNvPr id="13" name="Image 2" descr="preencoded.png">    </p:cNvPr>
+          <p:cNvPr id="8" name="Image 2" descr="preencoded.png">    </p:cNvPr>
           <p:cNvPicPr>
             <a:picLocks noChangeAspect="1"/>
           </p:cNvPicPr>
@@ -7479,8 +8828,8 @@
         </p:blipFill>
         <p:spPr>
           <a:xfrm>
-            <a:off x="4846320" y="3063240"/>
-            <a:ext cx="365760" cy="365760"/>
+            <a:off x="640080" y="4206240"/>
+            <a:ext cx="274320" cy="274320"/>
           </a:xfrm>
           <a:prstGeom prst="rect">
             <a:avLst/>
@@ -7489,14 +8838,14 @@
       </p:pic>
       <p:sp>
         <p:nvSpPr>
-          <p:cNvPr id="14" name="Text 9"/>
-          <p:cNvSpPr/>
-          <p:nvPr/>
-        </p:nvSpPr>
-        <p:spPr>
-          <a:xfrm>
-            <a:off x="5532120" y="2971800"/>
-            <a:ext cx="2011680" cy="365760"/>
+          <p:cNvPr id="9" name="Text 4"/>
+          <p:cNvSpPr/>
+          <p:nvPr/>
+        </p:nvSpPr>
+        <p:spPr>
+          <a:xfrm>
+            <a:off x="1051560" y="4160520"/>
+            <a:ext cx="4937760" cy="411480"/>
           </a:xfrm>
           <a:prstGeom prst="rect">
             <a:avLst/>
@@ -7512,46 +8861,7 @@
               <a:buNone/>
             </a:pPr>
             <a:r>
-              <a:rPr lang="en-US" sz="1200" b="1" dirty="0">
-                <a:solidFill>
-                  <a:srgbClr val="2F6BED"/>
-                </a:solidFill>
-                <a:latin typeface="Arial" pitchFamily="34" charset="0"/>
-                <a:ea typeface="Arial" pitchFamily="34" charset="-122"/>
-                <a:cs typeface="Arial" pitchFamily="34" charset="-120"/>
-              </a:rPr>
-              <a:t>Step 2</a:t>
-            </a:r>
-            <a:endParaRPr lang="en-US" sz="1200" dirty="0"/>
-          </a:p>
-        </p:txBody>
-      </p:sp>
-      <p:sp>
-        <p:nvSpPr>
-          <p:cNvPr id="15" name="Text 10"/>
-          <p:cNvSpPr/>
-          <p:nvPr/>
-        </p:nvSpPr>
-        <p:spPr>
-          <a:xfrm>
-            <a:off x="4663440" y="3794760"/>
-            <a:ext cx="2834640" cy="457200"/>
-          </a:xfrm>
-          <a:prstGeom prst="rect">
-            <a:avLst/>
-          </a:prstGeom>
-          <a:noFill/>
-          <a:ln/>
-        </p:spPr>
-        <p:txBody>
-          <a:bodyPr wrap="square" lIns="0" tIns="0" rIns="0" bIns="0" rtlCol="0" anchor="ctr"/>
-          <a:lstStyle/>
-          <a:p>
-            <a:pPr indent="0" marL="0">
-              <a:buNone/>
-            </a:pPr>
-            <a:r>
-              <a:rPr lang="en-US" sz="1600" b="1" dirty="0">
+              <a:rPr lang="en-US" sz="1450" dirty="0">
                 <a:solidFill>
                   <a:srgbClr val="0C1726"/>
                 </a:solidFill>
@@ -7559,104 +8869,15 @@
                 <a:ea typeface="Arial" pitchFamily="34" charset="-122"/>
                 <a:cs typeface="Arial" pitchFamily="34" charset="-120"/>
               </a:rPr>
-              <a:t>You forward your calls</a:t>
-            </a:r>
-            <a:endParaRPr lang="en-US" sz="1600" dirty="0"/>
-          </a:p>
-        </p:txBody>
-      </p:sp>
-      <p:sp>
-        <p:nvSpPr>
-          <p:cNvPr id="16" name="Text 11"/>
-          <p:cNvSpPr/>
-          <p:nvPr/>
-        </p:nvSpPr>
-        <p:spPr>
-          <a:xfrm>
-            <a:off x="4663440" y="4251960"/>
-            <a:ext cx="2834640" cy="914400"/>
-          </a:xfrm>
-          <a:prstGeom prst="rect">
-            <a:avLst/>
-          </a:prstGeom>
-          <a:noFill/>
-          <a:ln/>
-        </p:spPr>
-        <p:txBody>
-          <a:bodyPr wrap="square" lIns="0" tIns="0" rIns="0" bIns="0" rtlCol="0" anchor="ctr"/>
-          <a:lstStyle/>
-          <a:p>
-            <a:pPr indent="0" marL="0">
-              <a:lnSpc>
-                <a:spcPct val="120000"/>
-              </a:lnSpc>
-              <a:buNone/>
-            </a:pPr>
-            <a:r>
-              <a:rPr lang="en-US" sz="1250" dirty="0">
-                <a:solidFill>
-                  <a:srgbClr val="44505F"/>
-                </a:solidFill>
-                <a:latin typeface="Arial" pitchFamily="34" charset="0"/>
-                <a:ea typeface="Arial" pitchFamily="34" charset="-122"/>
-                <a:cs typeface="Arial" pitchFamily="34" charset="-120"/>
-              </a:rPr>
-              <a:t>A quick setting with your carrier — your number stays the same.</a:t>
-            </a:r>
-            <a:endParaRPr lang="en-US" sz="1250" dirty="0"/>
-          </a:p>
-        </p:txBody>
-      </p:sp>
-      <p:sp>
-        <p:nvSpPr>
-          <p:cNvPr id="17" name="Shape 12"/>
-          <p:cNvSpPr/>
-          <p:nvPr/>
-        </p:nvSpPr>
-        <p:spPr>
-          <a:xfrm>
-            <a:off x="8046720" y="2560320"/>
-            <a:ext cx="3474720" cy="2743200"/>
-          </a:xfrm>
-          <a:prstGeom prst="roundRect">
-            <a:avLst>
-              <a:gd name="adj" fmla="val 4000"/>
-            </a:avLst>
-          </a:prstGeom>
-          <a:solidFill>
-            <a:srgbClr val="F4F8FD"/>
-          </a:solidFill>
-          <a:ln w="12700">
-            <a:solidFill>
-              <a:srgbClr val="E7EDF6"/>
-            </a:solidFill>
-            <a:prstDash val="solid"/>
-          </a:ln>
-        </p:spPr>
-      </p:sp>
-      <p:sp>
-        <p:nvSpPr>
-          <p:cNvPr id="18" name="Shape 13"/>
-          <p:cNvSpPr/>
-          <p:nvPr/>
-        </p:nvSpPr>
-        <p:spPr>
-          <a:xfrm>
-            <a:off x="8366760" y="2880360"/>
-            <a:ext cx="731520" cy="731520"/>
-          </a:xfrm>
-          <a:prstGeom prst="ellipse">
-            <a:avLst/>
-          </a:prstGeom>
-          <a:solidFill>
-            <a:srgbClr val="2F6BED"/>
-          </a:solidFill>
-          <a:ln/>
-        </p:spPr>
+              <a:t>Captures &amp; texts every lead</a:t>
+            </a:r>
+            <a:endParaRPr lang="en-US" sz="1450" dirty="0"/>
+          </a:p>
+        </p:txBody>
       </p:sp>
       <p:pic>
         <p:nvPicPr>
-          <p:cNvPr id="19" name="Image 3" descr="preencoded.png">    </p:cNvPr>
+          <p:cNvPr id="10" name="Image 3" descr="preencoded.png">    </p:cNvPr>
           <p:cNvPicPr>
             <a:picLocks noChangeAspect="1"/>
           </p:cNvPicPr>
@@ -7670,8 +8891,8 @@
         </p:blipFill>
         <p:spPr>
           <a:xfrm>
-            <a:off x="8549640" y="3063240"/>
-            <a:ext cx="365760" cy="365760"/>
+            <a:off x="640080" y="4709160"/>
+            <a:ext cx="274320" cy="274320"/>
           </a:xfrm>
           <a:prstGeom prst="rect">
             <a:avLst/>
@@ -7680,14 +8901,14 @@
       </p:pic>
       <p:sp>
         <p:nvSpPr>
-          <p:cNvPr id="20" name="Text 14"/>
-          <p:cNvSpPr/>
-          <p:nvPr/>
-        </p:nvSpPr>
-        <p:spPr>
-          <a:xfrm>
-            <a:off x="9235440" y="2971800"/>
-            <a:ext cx="2011680" cy="365760"/>
+          <p:cNvPr id="11" name="Text 5"/>
+          <p:cNvSpPr/>
+          <p:nvPr/>
+        </p:nvSpPr>
+        <p:spPr>
+          <a:xfrm>
+            <a:off x="1051560" y="4663440"/>
+            <a:ext cx="4937760" cy="411480"/>
           </a:xfrm>
           <a:prstGeom prst="rect">
             <a:avLst/>
@@ -7703,30 +8924,54 @@
               <a:buNone/>
             </a:pPr>
             <a:r>
-              <a:rPr lang="en-US" sz="1200" b="1" dirty="0">
-                <a:solidFill>
-                  <a:srgbClr val="2F6BED"/>
-                </a:solidFill>
-                <a:latin typeface="Arial" pitchFamily="34" charset="0"/>
-                <a:ea typeface="Arial" pitchFamily="34" charset="-122"/>
-                <a:cs typeface="Arial" pitchFamily="34" charset="-120"/>
-              </a:rPr>
-              <a:t>Step 3</a:t>
-            </a:r>
-            <a:endParaRPr lang="en-US" sz="1200" dirty="0"/>
-          </a:p>
-        </p:txBody>
-      </p:sp>
-      <p:sp>
-        <p:nvSpPr>
-          <p:cNvPr id="21" name="Text 15"/>
-          <p:cNvSpPr/>
-          <p:nvPr/>
-        </p:nvSpPr>
-        <p:spPr>
-          <a:xfrm>
-            <a:off x="8366760" y="3794760"/>
-            <a:ext cx="2834640" cy="457200"/>
+              <a:rPr lang="en-US" sz="1450" dirty="0">
+                <a:solidFill>
+                  <a:srgbClr val="0C1726"/>
+                </a:solidFill>
+                <a:latin typeface="Arial" pitchFamily="34" charset="0"/>
+                <a:ea typeface="Arial" pitchFamily="34" charset="-122"/>
+                <a:cs typeface="Arial" pitchFamily="34" charset="-120"/>
+              </a:rPr>
+              <a:t>Returning-caller memory</a:t>
+            </a:r>
+            <a:endParaRPr lang="en-US" sz="1450" dirty="0"/>
+          </a:p>
+        </p:txBody>
+      </p:sp>
+      <p:pic>
+        <p:nvPicPr>
+          <p:cNvPr id="12" name="Image 4" descr="preencoded.png">    </p:cNvPr>
+          <p:cNvPicPr>
+            <a:picLocks noChangeAspect="1"/>
+          </p:cNvPicPr>
+          <p:nvPr/>
+        </p:nvPicPr>
+        <p:blipFill>
+          <a:blip r:embed="rId5"/>
+          <a:stretch>
+            <a:fillRect/>
+          </a:stretch>
+        </p:blipFill>
+        <p:spPr>
+          <a:xfrm>
+            <a:off x="640080" y="5212080"/>
+            <a:ext cx="274320" cy="274320"/>
+          </a:xfrm>
+          <a:prstGeom prst="rect">
+            <a:avLst/>
+          </a:prstGeom>
+        </p:spPr>
+      </p:pic>
+      <p:sp>
+        <p:nvSpPr>
+          <p:cNvPr id="13" name="Text 6"/>
+          <p:cNvSpPr/>
+          <p:nvPr/>
+        </p:nvSpPr>
+        <p:spPr>
+          <a:xfrm>
+            <a:off x="1051560" y="5166360"/>
+            <a:ext cx="4937760" cy="411480"/>
           </a:xfrm>
           <a:prstGeom prst="rect">
             <a:avLst/>
@@ -7742,7 +8987,7 @@
               <a:buNone/>
             </a:pPr>
             <a:r>
-              <a:rPr lang="en-US" sz="1600" b="1" dirty="0">
+              <a:rPr lang="en-US" sz="1450" dirty="0">
                 <a:solidFill>
                   <a:srgbClr val="0C1726"/>
                 </a:solidFill>
@@ -7750,22 +8995,51 @@
                 <a:ea typeface="Arial" pitchFamily="34" charset="-122"/>
                 <a:cs typeface="Arial" pitchFamily="34" charset="-120"/>
               </a:rPr>
-              <a:t>Leads start arriving</a:t>
-            </a:r>
-            <a:endParaRPr lang="en-US" sz="1600" dirty="0"/>
-          </a:p>
-        </p:txBody>
-      </p:sp>
-      <p:sp>
-        <p:nvSpPr>
-          <p:cNvPr id="22" name="Text 16"/>
-          <p:cNvSpPr/>
-          <p:nvPr/>
-        </p:nvSpPr>
-        <p:spPr>
-          <a:xfrm>
-            <a:off x="8366760" y="4251960"/>
-            <a:ext cx="2834640" cy="914400"/>
+              <a:t>Setup &amp; support included</a:t>
+            </a:r>
+            <a:endParaRPr lang="en-US" sz="1450" dirty="0"/>
+          </a:p>
+        </p:txBody>
+      </p:sp>
+      <p:sp>
+        <p:nvSpPr>
+          <p:cNvPr id="14" name="Shape 7"/>
+          <p:cNvSpPr/>
+          <p:nvPr/>
+        </p:nvSpPr>
+        <p:spPr>
+          <a:xfrm>
+            <a:off x="7315200" y="2194560"/>
+            <a:ext cx="3840480" cy="3566160"/>
+          </a:xfrm>
+          <a:prstGeom prst="roundRect">
+            <a:avLst>
+              <a:gd name="adj" fmla="val 4103"/>
+            </a:avLst>
+          </a:prstGeom>
+          <a:solidFill>
+            <a:srgbClr val="0C1726"/>
+          </a:solidFill>
+          <a:ln/>
+          <a:effectLst>
+            <a:outerShdw sx="100000" sy="100000" kx="0" ky="0" algn="bl" rotWithShape="0" blurRad="114300" dist="38100" dir="5400000">
+              <a:srgbClr val="0C1726">
+                <a:alpha val="10000"/>
+              </a:srgbClr>
+            </a:outerShdw>
+          </a:effectLst>
+        </p:spPr>
+      </p:sp>
+      <p:sp>
+        <p:nvSpPr>
+          <p:cNvPr id="15" name="Text 8"/>
+          <p:cNvSpPr/>
+          <p:nvPr/>
+        </p:nvSpPr>
+        <p:spPr>
+          <a:xfrm>
+            <a:off x="7680960" y="2560320"/>
+            <a:ext cx="3108960" cy="365760"/>
           </a:xfrm>
           <a:prstGeom prst="rect">
             <a:avLst/>
@@ -7778,23 +9052,173 @@
           <a:lstStyle/>
           <a:p>
             <a:pPr indent="0" marL="0">
-              <a:lnSpc>
-                <a:spcPct val="120000"/>
-              </a:lnSpc>
-              <a:buNone/>
-            </a:pPr>
-            <a:r>
-              <a:rPr lang="en-US" sz="1250" dirty="0">
-                <a:solidFill>
-                  <a:srgbClr val="44505F"/>
-                </a:solidFill>
-                <a:latin typeface="Arial" pitchFamily="34" charset="0"/>
-                <a:ea typeface="Arial" pitchFamily="34" charset="-122"/>
-                <a:cs typeface="Arial" pitchFamily="34" charset="-120"/>
-              </a:rPr>
-              <a:t>Missed calls turn into texts on your phone, starting the same day.</a:t>
-            </a:r>
-            <a:endParaRPr lang="en-US" sz="1250" dirty="0"/>
+              <a:buNone/>
+            </a:pPr>
+            <a:r>
+              <a:rPr lang="en-US" sz="1400" b="1" dirty="0">
+                <a:solidFill>
+                  <a:srgbClr val="CADCFC"/>
+                </a:solidFill>
+                <a:latin typeface="Arial" pitchFamily="34" charset="0"/>
+                <a:ea typeface="Arial" pitchFamily="34" charset="-122"/>
+                <a:cs typeface="Arial" pitchFamily="34" charset="-120"/>
+              </a:rPr>
+              <a:t>Locksmith plan</a:t>
+            </a:r>
+            <a:endParaRPr lang="en-US" sz="1400" dirty="0"/>
+          </a:p>
+        </p:txBody>
+      </p:sp>
+      <p:sp>
+        <p:nvSpPr>
+          <p:cNvPr id="16" name="Text 9"/>
+          <p:cNvSpPr/>
+          <p:nvPr/>
+        </p:nvSpPr>
+        <p:spPr>
+          <a:xfrm>
+            <a:off x="7680960" y="2971800"/>
+            <a:ext cx="3108960" cy="914400"/>
+          </a:xfrm>
+          <a:prstGeom prst="rect">
+            <a:avLst/>
+          </a:prstGeom>
+          <a:noFill/>
+          <a:ln/>
+        </p:spPr>
+        <p:txBody>
+          <a:bodyPr wrap="square" lIns="0" tIns="0" rIns="0" bIns="0" rtlCol="0" anchor="ctr"/>
+          <a:lstStyle/>
+          <a:p>
+            <a:pPr indent="0" marL="0">
+              <a:buNone/>
+            </a:pPr>
+            <a:r>
+              <a:rPr lang="en-US" sz="4600" b="1" dirty="0">
+                <a:solidFill>
+                  <a:srgbClr val="FFFFFF"/>
+                </a:solidFill>
+                <a:latin typeface="Arial" pitchFamily="34" charset="0"/>
+                <a:ea typeface="Arial" pitchFamily="34" charset="-122"/>
+                <a:cs typeface="Arial" pitchFamily="34" charset="-120"/>
+              </a:rPr>
+              <a:t>$XXX</a:t>
+            </a:r>
+            <a:pPr indent="0" marL="0">
+              <a:buNone/>
+            </a:pPr>
+            <a:r>
+              <a:rPr lang="en-US" sz="1800" dirty="0">
+                <a:solidFill>
+                  <a:srgbClr val="8A97A8"/>
+                </a:solidFill>
+                <a:latin typeface="Arial" pitchFamily="34" charset="0"/>
+                <a:ea typeface="Arial" pitchFamily="34" charset="-122"/>
+                <a:cs typeface="Arial" pitchFamily="34" charset="-120"/>
+              </a:rPr>
+              <a:t> /mo</a:t>
+            </a:r>
+            <a:endParaRPr lang="en-US" sz="4600" dirty="0"/>
+          </a:p>
+        </p:txBody>
+      </p:sp>
+      <p:sp>
+        <p:nvSpPr>
+          <p:cNvPr id="17" name="Text 10"/>
+          <p:cNvSpPr/>
+          <p:nvPr/>
+        </p:nvSpPr>
+        <p:spPr>
+          <a:xfrm>
+            <a:off x="7680960" y="3977640"/>
+            <a:ext cx="3108960" cy="548640"/>
+          </a:xfrm>
+          <a:prstGeom prst="rect">
+            <a:avLst/>
+          </a:prstGeom>
+          <a:noFill/>
+          <a:ln/>
+        </p:spPr>
+        <p:txBody>
+          <a:bodyPr wrap="square" lIns="0" tIns="0" rIns="0" bIns="0" rtlCol="0" anchor="ctr"/>
+          <a:lstStyle/>
+          <a:p>
+            <a:pPr indent="0" marL="0">
+              <a:buNone/>
+            </a:pPr>
+            <a:r>
+              <a:rPr lang="en-US" sz="1100" i="1" dirty="0">
+                <a:solidFill>
+                  <a:srgbClr val="8A97A8"/>
+                </a:solidFill>
+                <a:latin typeface="Arial" pitchFamily="34" charset="0"/>
+                <a:ea typeface="Arial" pitchFamily="34" charset="-122"/>
+                <a:cs typeface="Arial" pitchFamily="34" charset="-120"/>
+              </a:rPr>
+              <a:t>Set your price here — replace before presenting.</a:t>
+            </a:r>
+            <a:endParaRPr lang="en-US" sz="1100" dirty="0"/>
+          </a:p>
+        </p:txBody>
+      </p:sp>
+      <p:sp>
+        <p:nvSpPr>
+          <p:cNvPr id="18" name="Shape 11"/>
+          <p:cNvSpPr/>
+          <p:nvPr/>
+        </p:nvSpPr>
+        <p:spPr>
+          <a:xfrm>
+            <a:off x="7680960" y="4754880"/>
+            <a:ext cx="3108960" cy="640080"/>
+          </a:xfrm>
+          <a:prstGeom prst="roundRect">
+            <a:avLst>
+              <a:gd name="adj" fmla="val 14286"/>
+            </a:avLst>
+          </a:prstGeom>
+          <a:solidFill>
+            <a:srgbClr val="2F6BED"/>
+          </a:solidFill>
+          <a:ln/>
+        </p:spPr>
+      </p:sp>
+      <p:sp>
+        <p:nvSpPr>
+          <p:cNvPr id="19" name="Text 12"/>
+          <p:cNvSpPr/>
+          <p:nvPr/>
+        </p:nvSpPr>
+        <p:spPr>
+          <a:xfrm>
+            <a:off x="7680960" y="4754880"/>
+            <a:ext cx="3108960" cy="640080"/>
+          </a:xfrm>
+          <a:prstGeom prst="rect">
+            <a:avLst/>
+          </a:prstGeom>
+          <a:noFill/>
+          <a:ln/>
+        </p:spPr>
+        <p:txBody>
+          <a:bodyPr wrap="square" lIns="0" tIns="0" rIns="0" bIns="0" rtlCol="0" anchor="ctr"/>
+          <a:lstStyle/>
+          <a:p>
+            <a:pPr algn="ctr" indent="0" marL="0">
+              <a:buNone/>
+            </a:pPr>
+            <a:r>
+              <a:rPr lang="en-US" sz="1500" b="1" dirty="0">
+                <a:solidFill>
+                  <a:srgbClr val="FFFFFF"/>
+                </a:solidFill>
+                <a:latin typeface="Arial" pitchFamily="34" charset="0"/>
+                <a:ea typeface="Arial" pitchFamily="34" charset="-122"/>
+                <a:cs typeface="Arial" pitchFamily="34" charset="-120"/>
+              </a:rPr>
+              <a:t>Book a demo</a:t>
+            </a:r>
+            <a:endParaRPr lang="en-US" sz="1500" dirty="0"/>
           </a:p>
         </p:txBody>
       </p:sp>
